--- a/Boek 2 - Kosten, opbrengsten, elasticiteit en surplus/edities/chat-2026/bronnen/H2/paragrafen/2.2.3 Inkomenselasticiteit en kruislingse elasticiteit/2.2.3 Inkomenselasticiteit en kruislingse elasticiteit – presentatie.pptx
+++ b/Boek 2 - Kosten, opbrengsten, elasticiteit en surplus/edities/chat-2026/bronnen/H2/paragrafen/2.2.3 Inkomenselasticiteit en kruislingse elasticiteit/2.2.3 Inkomenselasticiteit en kruislingse elasticiteit – presentatie.pptx
@@ -2,42 +2,42 @@
 <file path=ppt/presentation.xml><?xml version="1.0" encoding="utf-8"?>
 <p:presentation xmlns:p="http://schemas.openxmlformats.org/presentationml/2006/main">
   <p:sldMasterIdLst>
-    <p:sldMasterId xmlns:r="http://schemas.openxmlformats.org/officeDocument/2006/relationships" id="2147483648" r:id="Rd42f96534c5d4c3d"/>
+    <p:sldMasterId xmlns:r="http://schemas.openxmlformats.org/officeDocument/2006/relationships" id="2147483648" r:id="R1e77720aa2614b5e"/>
   </p:sldMasterIdLst>
   <p:notesMasterIdLst>
-    <p:notesMasterId xmlns:r="http://schemas.openxmlformats.org/officeDocument/2006/relationships" r:id="Rf9d941ca75004e67"/>
+    <p:notesMasterId xmlns:r="http://schemas.openxmlformats.org/officeDocument/2006/relationships" r:id="Re5558bae75e04d69"/>
   </p:notesMasterIdLst>
   <p:sldIdLst>
-    <p:sldId xmlns:r="http://schemas.openxmlformats.org/officeDocument/2006/relationships" id="256" r:id="R89221ba76e09426a"/>
-    <p:sldId xmlns:r="http://schemas.openxmlformats.org/officeDocument/2006/relationships" id="257" r:id="R51469b812190496f"/>
-    <p:sldId xmlns:r="http://schemas.openxmlformats.org/officeDocument/2006/relationships" id="258" r:id="R08000de19a3748d9"/>
-    <p:sldId xmlns:r="http://schemas.openxmlformats.org/officeDocument/2006/relationships" id="259" r:id="R5e016b18c6e746ec"/>
-    <p:sldId xmlns:r="http://schemas.openxmlformats.org/officeDocument/2006/relationships" id="260" r:id="R97f4f94fe2ba452b"/>
-    <p:sldId xmlns:r="http://schemas.openxmlformats.org/officeDocument/2006/relationships" id="261" r:id="Rd3f71f1f0e2143d7"/>
-    <p:sldId xmlns:r="http://schemas.openxmlformats.org/officeDocument/2006/relationships" id="262" r:id="R791d7fd4284c48b7"/>
-    <p:sldId xmlns:r="http://schemas.openxmlformats.org/officeDocument/2006/relationships" id="263" r:id="R4dc4475ff02a43c4"/>
-    <p:sldId xmlns:r="http://schemas.openxmlformats.org/officeDocument/2006/relationships" id="264" r:id="R7e670c11358244df"/>
-    <p:sldId xmlns:r="http://schemas.openxmlformats.org/officeDocument/2006/relationships" id="265" r:id="R1ead13b39f154861"/>
-    <p:sldId xmlns:r="http://schemas.openxmlformats.org/officeDocument/2006/relationships" id="266" r:id="R2e1ff0808c0646d7"/>
-    <p:sldId xmlns:r="http://schemas.openxmlformats.org/officeDocument/2006/relationships" id="267" r:id="Rb2f41af813d54ee9"/>
-    <p:sldId xmlns:r="http://schemas.openxmlformats.org/officeDocument/2006/relationships" id="268" r:id="Rf66718ba76dc4e41"/>
-    <p:sldId xmlns:r="http://schemas.openxmlformats.org/officeDocument/2006/relationships" id="269" r:id="R76572bc3db564598"/>
-    <p:sldId xmlns:r="http://schemas.openxmlformats.org/officeDocument/2006/relationships" id="270" r:id="Rc7e0647916c54665"/>
-    <p:sldId xmlns:r="http://schemas.openxmlformats.org/officeDocument/2006/relationships" id="271" r:id="R35e1ae12eb184179"/>
-    <p:sldId xmlns:r="http://schemas.openxmlformats.org/officeDocument/2006/relationships" id="272" r:id="R2f393de17ea544ba"/>
-    <p:sldId xmlns:r="http://schemas.openxmlformats.org/officeDocument/2006/relationships" id="273" r:id="Rcaa3e59c2e16496f"/>
-    <p:sldId xmlns:r="http://schemas.openxmlformats.org/officeDocument/2006/relationships" id="274" r:id="Re1c0dac912124791"/>
-    <p:sldId xmlns:r="http://schemas.openxmlformats.org/officeDocument/2006/relationships" id="275" r:id="R53db7ef2ff2a4aed"/>
-    <p:sldId xmlns:r="http://schemas.openxmlformats.org/officeDocument/2006/relationships" id="276" r:id="R2b4393171e2549d8"/>
-    <p:sldId xmlns:r="http://schemas.openxmlformats.org/officeDocument/2006/relationships" id="277" r:id="R59b89758aa1c41ac"/>
-    <p:sldId xmlns:r="http://schemas.openxmlformats.org/officeDocument/2006/relationships" id="278" r:id="Rda1059cf4db547ea"/>
-    <p:sldId xmlns:r="http://schemas.openxmlformats.org/officeDocument/2006/relationships" id="279" r:id="Rc7f2ca7049d54bc5"/>
-    <p:sldId xmlns:r="http://schemas.openxmlformats.org/officeDocument/2006/relationships" id="280" r:id="Rb6810a07316a4edf"/>
-    <p:sldId xmlns:r="http://schemas.openxmlformats.org/officeDocument/2006/relationships" id="281" r:id="R51291239ccd941af"/>
-    <p:sldId xmlns:r="http://schemas.openxmlformats.org/officeDocument/2006/relationships" id="282" r:id="R754c2bb6ae3e479a"/>
-    <p:sldId xmlns:r="http://schemas.openxmlformats.org/officeDocument/2006/relationships" id="283" r:id="Rbcedf3bb9b6a4396"/>
-    <p:sldId xmlns:r="http://schemas.openxmlformats.org/officeDocument/2006/relationships" id="284" r:id="R7f012ee800de4a28"/>
-    <p:sldId xmlns:r="http://schemas.openxmlformats.org/officeDocument/2006/relationships" id="285" r:id="R3ab56a7b95034470"/>
+    <p:sldId xmlns:r="http://schemas.openxmlformats.org/officeDocument/2006/relationships" id="256" r:id="Rb07a198caadb4d50"/>
+    <p:sldId xmlns:r="http://schemas.openxmlformats.org/officeDocument/2006/relationships" id="257" r:id="R9edfc907546e493e"/>
+    <p:sldId xmlns:r="http://schemas.openxmlformats.org/officeDocument/2006/relationships" id="258" r:id="R8e585a39cdc04cd6"/>
+    <p:sldId xmlns:r="http://schemas.openxmlformats.org/officeDocument/2006/relationships" id="259" r:id="Rebb8731630374ceb"/>
+    <p:sldId xmlns:r="http://schemas.openxmlformats.org/officeDocument/2006/relationships" id="260" r:id="Rb824d05fc5f34da0"/>
+    <p:sldId xmlns:r="http://schemas.openxmlformats.org/officeDocument/2006/relationships" id="261" r:id="R354a104457e040e5"/>
+    <p:sldId xmlns:r="http://schemas.openxmlformats.org/officeDocument/2006/relationships" id="262" r:id="R89b7a1d2179d4bbf"/>
+    <p:sldId xmlns:r="http://schemas.openxmlformats.org/officeDocument/2006/relationships" id="263" r:id="R129b489eb15747eb"/>
+    <p:sldId xmlns:r="http://schemas.openxmlformats.org/officeDocument/2006/relationships" id="264" r:id="Rf7b0828640d14364"/>
+    <p:sldId xmlns:r="http://schemas.openxmlformats.org/officeDocument/2006/relationships" id="265" r:id="Rbc7031016a514c82"/>
+    <p:sldId xmlns:r="http://schemas.openxmlformats.org/officeDocument/2006/relationships" id="266" r:id="R1cedad4192e54035"/>
+    <p:sldId xmlns:r="http://schemas.openxmlformats.org/officeDocument/2006/relationships" id="267" r:id="R5c25f505c5464701"/>
+    <p:sldId xmlns:r="http://schemas.openxmlformats.org/officeDocument/2006/relationships" id="268" r:id="R10386c733a644630"/>
+    <p:sldId xmlns:r="http://schemas.openxmlformats.org/officeDocument/2006/relationships" id="269" r:id="R7f75c3ba1e5a4c10"/>
+    <p:sldId xmlns:r="http://schemas.openxmlformats.org/officeDocument/2006/relationships" id="270" r:id="Raf73b6a9cee84483"/>
+    <p:sldId xmlns:r="http://schemas.openxmlformats.org/officeDocument/2006/relationships" id="271" r:id="R10607110ea4444de"/>
+    <p:sldId xmlns:r="http://schemas.openxmlformats.org/officeDocument/2006/relationships" id="272" r:id="Re573b5ee2b374d60"/>
+    <p:sldId xmlns:r="http://schemas.openxmlformats.org/officeDocument/2006/relationships" id="273" r:id="R6b96bee5cf4043b4"/>
+    <p:sldId xmlns:r="http://schemas.openxmlformats.org/officeDocument/2006/relationships" id="274" r:id="Rd05b8fad3ef94fb7"/>
+    <p:sldId xmlns:r="http://schemas.openxmlformats.org/officeDocument/2006/relationships" id="275" r:id="R223e89d6636e4a0e"/>
+    <p:sldId xmlns:r="http://schemas.openxmlformats.org/officeDocument/2006/relationships" id="276" r:id="R1f476649c23646d2"/>
+    <p:sldId xmlns:r="http://schemas.openxmlformats.org/officeDocument/2006/relationships" id="277" r:id="Rd4099bed01544a3c"/>
+    <p:sldId xmlns:r="http://schemas.openxmlformats.org/officeDocument/2006/relationships" id="278" r:id="R619e629c707447c6"/>
+    <p:sldId xmlns:r="http://schemas.openxmlformats.org/officeDocument/2006/relationships" id="279" r:id="R4a4b90c81e7e4a3c"/>
+    <p:sldId xmlns:r="http://schemas.openxmlformats.org/officeDocument/2006/relationships" id="280" r:id="Re75d9825c4fb4db8"/>
+    <p:sldId xmlns:r="http://schemas.openxmlformats.org/officeDocument/2006/relationships" id="281" r:id="Rcf45d35237fb46d5"/>
+    <p:sldId xmlns:r="http://schemas.openxmlformats.org/officeDocument/2006/relationships" id="282" r:id="R4ac25d3dbde442e6"/>
+    <p:sldId xmlns:r="http://schemas.openxmlformats.org/officeDocument/2006/relationships" id="283" r:id="Rf8139b0726314fdb"/>
+    <p:sldId xmlns:r="http://schemas.openxmlformats.org/officeDocument/2006/relationships" id="284" r:id="R5ddba6624dd2409b"/>
+    <p:sldId xmlns:r="http://schemas.openxmlformats.org/officeDocument/2006/relationships" id="285" r:id="Rf6e7438018eb405d"/>
   </p:sldIdLst>
   <p:sldSz cx="15240000" cy="8572500"/>
   <p:notesSz cx="6858000" cy="9144000"/>
@@ -484,7 +484,7 @@
           <a:p xmlns:a="http://schemas.openxmlformats.org/drawingml/2006/main">
             <a:r>
               <a:rPr sz="1400"/>
-              <a:t>Uitleg: Laat de dia staan tijdens startopdracht. Opgave 1 haalt procenten en eenvoudig invullen op. Bij twijfel geef je het rekenschema (nieuw − oud) / oud × 100%, of laat je eerst P vervangen en daarna vermenigvuldigen. Opgave 2 verkent nieuwe leerstof: 2a gebruikt definities op p. 53–54; bij 2b helpt het één-factor-voorbeeld op p. 55–56. Laat leerlingen die tekst erbij nemen en een voorlopige redenering noteren; verwacht nog geen zelfstandige beheersing. Na de uitleg keren we terug naar opgave 2. Basis 3 staat op p. 59, 4–5 op p. 60; zelfstandig 6–7 op p. 61; doel 8 op p. 62. Huiswerk: 3, 4, 5, 6, 7 en 8 maken en nakijken. Bonus en herhaling zijn extra.</a:t>
+              <a:t>Uitleg: Laat de dia staan tijdens startopdracht. Opgave 1 haalt procenten en eenvoudig invullen op. Bij twijfel geef je het rekenschema (nieuw − oud) / oud × 100%, of laat je eerst P vervangen en daarna vermenigvuldigen. Opgave 2 verkent nieuwe leerstof: 2a gebruikt definities op p. 54–55; bij 2b helpt het één-factor-voorbeeld op p. 56–57. Laat leerlingen die tekst erbij nemen en een voorlopige redenering noteren; verwacht nog geen zelfstandige beheersing. Na de uitleg keren we terug naar opgave 2. Basis 3 staat op p. 60, 4–5 op p. 61; zelfstandig 6–7 op p. 62; doel 8 op p. 63. Huiswerk: 3, 4, 5, 6, 7 en 8 maken en nakijken. Bonus en herhaling zijn extra.</a:t>
             </a:r>
           </a:p>
           <a:p xmlns:a="http://schemas.openxmlformats.org/drawingml/2006/main">
@@ -520,13 +520,13 @@
           <a:p xmlns:a="http://schemas.openxmlformats.org/drawingml/2006/main">
             <a:r>
               <a:rPr sz="1400"/>
-              <a:t>Bron: Boek 2, editie chat-2026, revisie 21 september 2026; gedrukte pagina 53–56 en 59–62. https://github.com/meijer1973/4veco-lessen/blob/f2660032cf7e4e3bbab96cf32863d06a38bd74bc/Boek%202%20-%20Kosten%2C%20opbrengsten%2C%20elasticiteit%20en%20surplus/edities/chat-2026/boek/Boek_2_Compleet.pdf</a:t>
-            </a:r>
-          </a:p>
-          <a:p xmlns:a="http://schemas.openxmlformats.org/drawingml/2006/main">
-            <a:r>
-              <a:rPr sz="1400"/>
-              <a:t>Antwoordmodel: https://github.com/meijer1973/4veco-lessen/blob/f2660032cf7e4e3bbab96cf32863d06a38bd74bc/Boek%202%20-%20Kosten%2C%20opbrengsten%2C%20elasticiteit%20en%20surplus/edities/chat-2026/boek/Boek_2_Compleet_Antwoorden.pdf</a:t>
+              <a:t>Bron: Boek 2, editie chat-2026, revisie 1 oktober 2026; gedrukte pagina 54–57 en 60–63. https://github.com/meijer1973/4veco-lessen/blob/a8940a7a79e22857a3e306a91fe923c48c63e716/Boek%202%20-%20Kosten%2C%20opbrengsten%2C%20elasticiteit%20en%20surplus/edities/chat-2026/boek/Boek_2_Compleet.pdf</a:t>
+            </a:r>
+          </a:p>
+          <a:p xmlns:a="http://schemas.openxmlformats.org/drawingml/2006/main">
+            <a:r>
+              <a:rPr sz="1400"/>
+              <a:t>Antwoordmodel: https://github.com/meijer1973/4veco-lessen/blob/a8940a7a79e22857a3e306a91fe923c48c63e716/Boek%202%20-%20Kosten%2C%20opbrengsten%2C%20elasticiteit%20en%20surplus/edities/chat-2026/boek/Boek_2_Compleet_Antwoorden.pdf</a:t>
             </a:r>
           </a:p>
           <a:p xmlns:a="http://schemas.openxmlformats.org/drawingml/2006/main">
@@ -651,7 +651,7 @@
           <a:p xmlns:a="http://schemas.openxmlformats.org/drawingml/2006/main">
             <a:r>
               <a:rPr sz="1400"/>
-              <a:t>Bron: Boek 2, editie chat-2026, revisie 21 september 2026; gedrukte pagina 55. https://github.com/meijer1973/4veco-lessen/blob/f2660032cf7e4e3bbab96cf32863d06a38bd74bc/Boek%202%20-%20Kosten%2C%20opbrengsten%2C%20elasticiteit%20en%20surplus/edities/chat-2026/boek/Boek_2_Compleet.pdf</a:t>
+              <a:t>Bron: Boek 2, editie chat-2026, revisie 1 oktober 2026; gedrukte pagina 56. https://github.com/meijer1973/4veco-lessen/blob/a8940a7a79e22857a3e306a91fe923c48c63e716/Boek%202%20-%20Kosten%2C%20opbrengsten%2C%20elasticiteit%20en%20surplus/edities/chat-2026/boek/Boek_2_Compleet.pdf</a:t>
             </a:r>
           </a:p>
           <a:p xmlns:a="http://schemas.openxmlformats.org/drawingml/2006/main">
@@ -782,7 +782,7 @@
           <a:p xmlns:a="http://schemas.openxmlformats.org/drawingml/2006/main">
             <a:r>
               <a:rPr sz="1400"/>
-              <a:t>Bron: Boek 2, editie chat-2026, revisie 21 september 2026; gedrukte pagina 56 en 58. https://github.com/meijer1973/4veco-lessen/blob/f2660032cf7e4e3bbab96cf32863d06a38bd74bc/Boek%202%20-%20Kosten%2C%20opbrengsten%2C%20elasticiteit%20en%20surplus/edities/chat-2026/boek/Boek_2_Compleet.pdf</a:t>
+              <a:t>Bron: Boek 2, editie chat-2026, revisie 1 oktober 2026; gedrukte pagina 57 en 59. https://github.com/meijer1973/4veco-lessen/blob/a8940a7a79e22857a3e306a91fe923c48c63e716/Boek%202%20-%20Kosten%2C%20opbrengsten%2C%20elasticiteit%20en%20surplus/edities/chat-2026/boek/Boek_2_Compleet.pdf</a:t>
             </a:r>
           </a:p>
           <a:p xmlns:a="http://schemas.openxmlformats.org/drawingml/2006/main">
@@ -913,7 +913,7 @@
           <a:p xmlns:a="http://schemas.openxmlformats.org/drawingml/2006/main">
             <a:r>
               <a:rPr sz="1400"/>
-              <a:t>Bron: Boek 2, editie chat-2026, revisie 21 september 2026; gedrukte pagina 56 en 58. https://github.com/meijer1973/4veco-lessen/blob/f2660032cf7e4e3bbab96cf32863d06a38bd74bc/Boek%202%20-%20Kosten%2C%20opbrengsten%2C%20elasticiteit%20en%20surplus/edities/chat-2026/boek/Boek_2_Compleet.pdf</a:t>
+              <a:t>Bron: Boek 2, editie chat-2026, revisie 1 oktober 2026; gedrukte pagina 57 en 59. https://github.com/meijer1973/4veco-lessen/blob/a8940a7a79e22857a3e306a91fe923c48c63e716/Boek%202%20-%20Kosten%2C%20opbrengsten%2C%20elasticiteit%20en%20surplus/edities/chat-2026/boek/Boek_2_Compleet.pdf</a:t>
             </a:r>
           </a:p>
           <a:p xmlns:a="http://schemas.openxmlformats.org/drawingml/2006/main">
@@ -1044,7 +1044,7 @@
           <a:p xmlns:a="http://schemas.openxmlformats.org/drawingml/2006/main">
             <a:r>
               <a:rPr sz="1400"/>
-              <a:t>Bron: Boek 2, editie chat-2026, revisie 21 september 2026; gedrukte pagina 56 en 58. https://github.com/meijer1973/4veco-lessen/blob/f2660032cf7e4e3bbab96cf32863d06a38bd74bc/Boek%202%20-%20Kosten%2C%20opbrengsten%2C%20elasticiteit%20en%20surplus/edities/chat-2026/boek/Boek_2_Compleet.pdf</a:t>
+              <a:t>Bron: Boek 2, editie chat-2026, revisie 1 oktober 2026; gedrukte pagina 57 en 59. https://github.com/meijer1973/4veco-lessen/blob/a8940a7a79e22857a3e306a91fe923c48c63e716/Boek%202%20-%20Kosten%2C%20opbrengsten%2C%20elasticiteit%20en%20surplus/edities/chat-2026/boek/Boek_2_Compleet.pdf</a:t>
             </a:r>
           </a:p>
           <a:p xmlns:a="http://schemas.openxmlformats.org/drawingml/2006/main">
@@ -1175,7 +1175,7 @@
           <a:p xmlns:a="http://schemas.openxmlformats.org/drawingml/2006/main">
             <a:r>
               <a:rPr sz="1400"/>
-              <a:t>Bron: Boek 2, editie chat-2026, revisie 21 september 2026; gedrukte pagina 52, 56 en 60; hoofdstukhandleiding §2.2.3. https://github.com/meijer1973/4veco-lessen/blob/f2660032cf7e4e3bbab96cf32863d06a38bd74bc/Boek%202%20-%20Kosten%2C%20opbrengsten%2C%20elasticiteit%20en%20surplus/edities/chat-2026/boek/Boek_2_Compleet.pdf</a:t>
+              <a:t>Bron: Boek 2, editie chat-2026, revisie 1 oktober 2026; gedrukte pagina 53, 57 en 61; hoofdstukhandleiding §2.2.3. https://github.com/meijer1973/4veco-lessen/blob/a8940a7a79e22857a3e306a91fe923c48c63e716/Boek%202%20-%20Kosten%2C%20opbrengsten%2C%20elasticiteit%20en%20surplus/edities/chat-2026/boek/Boek_2_Compleet.pdf</a:t>
             </a:r>
           </a:p>
           <a:p xmlns:a="http://schemas.openxmlformats.org/drawingml/2006/main">
@@ -1306,13 +1306,13 @@
           <a:p xmlns:a="http://schemas.openxmlformats.org/drawingml/2006/main">
             <a:r>
               <a:rPr sz="1400"/>
-              <a:t>Bron: Boek 2, editie chat-2026, revisie 21 september 2026; gedrukte pagina 53–56 en 59. https://github.com/meijer1973/4veco-lessen/blob/f2660032cf7e4e3bbab96cf32863d06a38bd74bc/Boek%202%20-%20Kosten%2C%20opbrengsten%2C%20elasticiteit%20en%20surplus/edities/chat-2026/boek/Boek_2_Compleet.pdf</a:t>
-            </a:r>
-          </a:p>
-          <a:p xmlns:a="http://schemas.openxmlformats.org/drawingml/2006/main">
-            <a:r>
-              <a:rPr sz="1400"/>
-              <a:t>Antwoordmodel: https://github.com/meijer1973/4veco-lessen/blob/f2660032cf7e4e3bbab96cf32863d06a38bd74bc/Boek%202%20-%20Kosten%2C%20opbrengsten%2C%20elasticiteit%20en%20surplus/edities/chat-2026/boek/Boek_2_Compleet_Antwoorden.pdf</a:t>
+              <a:t>Bron: Boek 2, editie chat-2026, revisie 1 oktober 2026; gedrukte pagina 54–57 en 60. https://github.com/meijer1973/4veco-lessen/blob/a8940a7a79e22857a3e306a91fe923c48c63e716/Boek%202%20-%20Kosten%2C%20opbrengsten%2C%20elasticiteit%20en%20surplus/edities/chat-2026/boek/Boek_2_Compleet.pdf</a:t>
+            </a:r>
+          </a:p>
+          <a:p xmlns:a="http://schemas.openxmlformats.org/drawingml/2006/main">
+            <a:r>
+              <a:rPr sz="1400"/>
+              <a:t>Antwoordmodel: https://github.com/meijer1973/4veco-lessen/blob/a8940a7a79e22857a3e306a91fe923c48c63e716/Boek%202%20-%20Kosten%2C%20opbrengsten%2C%20elasticiteit%20en%20surplus/edities/chat-2026/boek/Boek_2_Compleet_Antwoorden.pdf</a:t>
             </a:r>
           </a:p>
           <a:p xmlns:a="http://schemas.openxmlformats.org/drawingml/2006/main">
@@ -1401,7 +1401,7 @@
           <a:p xmlns:a="http://schemas.openxmlformats.org/drawingml/2006/main">
             <a:r>
               <a:rPr sz="1400"/>
-              <a:t>Uitleg: Laat de dia staan tijdens zelfstandig werken. Opgave 1 haalt procenten en eenvoudig invullen op. Bij twijfel geef je het rekenschema (nieuw − oud) / oud × 100%, of laat je eerst P vervangen en daarna vermenigvuldigen. Opgave 2 verkent nieuwe leerstof: 2a gebruikt definities op p. 53–54; bij 2b helpt het één-factor-voorbeeld op p. 55–56. Laat leerlingen die tekst erbij nemen en een voorlopige redenering noteren; verwacht nog geen zelfstandige beheersing. Na de uitleg keren we terug naar opgave 2. Basis 3 staat op p. 59, 4–5 op p. 60; zelfstandig 6–7 op p. 61; doel 8 op p. 62. Huiswerk: 3, 4, 5, 6, 7 en 8 maken en nakijken. Bonus en herhaling zijn extra.</a:t>
+              <a:t>Uitleg: Laat de dia staan tijdens zelfstandig werken. Opgave 1 haalt procenten en eenvoudig invullen op. Bij twijfel geef je het rekenschema (nieuw − oud) / oud × 100%, of laat je eerst P vervangen en daarna vermenigvuldigen. Opgave 2 verkent nieuwe leerstof: 2a gebruikt definities op p. 54–55; bij 2b helpt het één-factor-voorbeeld op p. 56–57. Laat leerlingen die tekst erbij nemen en een voorlopige redenering noteren; verwacht nog geen zelfstandige beheersing. Na de uitleg keren we terug naar opgave 2. Basis 3 staat op p. 60, 4–5 op p. 61; zelfstandig 6–7 op p. 62; doel 8 op p. 63. Huiswerk: 3, 4, 5, 6, 7 en 8 maken en nakijken. Bonus en herhaling zijn extra.</a:t>
             </a:r>
           </a:p>
           <a:p xmlns:a="http://schemas.openxmlformats.org/drawingml/2006/main">
@@ -1437,13 +1437,13 @@
           <a:p xmlns:a="http://schemas.openxmlformats.org/drawingml/2006/main">
             <a:r>
               <a:rPr sz="1400"/>
-              <a:t>Bron: Boek 2, editie chat-2026, revisie 21 september 2026; gedrukte pagina 53–56 en 59–62. https://github.com/meijer1973/4veco-lessen/blob/f2660032cf7e4e3bbab96cf32863d06a38bd74bc/Boek%202%20-%20Kosten%2C%20opbrengsten%2C%20elasticiteit%20en%20surplus/edities/chat-2026/boek/Boek_2_Compleet.pdf</a:t>
-            </a:r>
-          </a:p>
-          <a:p xmlns:a="http://schemas.openxmlformats.org/drawingml/2006/main">
-            <a:r>
-              <a:rPr sz="1400"/>
-              <a:t>Antwoordmodel: https://github.com/meijer1973/4veco-lessen/blob/f2660032cf7e4e3bbab96cf32863d06a38bd74bc/Boek%202%20-%20Kosten%2C%20opbrengsten%2C%20elasticiteit%20en%20surplus/edities/chat-2026/boek/Boek_2_Compleet_Antwoorden.pdf</a:t>
+              <a:t>Bron: Boek 2, editie chat-2026, revisie 1 oktober 2026; gedrukte pagina 54–57 en 60–63. https://github.com/meijer1973/4veco-lessen/blob/a8940a7a79e22857a3e306a91fe923c48c63e716/Boek%202%20-%20Kosten%2C%20opbrengsten%2C%20elasticiteit%20en%20surplus/edities/chat-2026/boek/Boek_2_Compleet.pdf</a:t>
+            </a:r>
+          </a:p>
+          <a:p xmlns:a="http://schemas.openxmlformats.org/drawingml/2006/main">
+            <a:r>
+              <a:rPr sz="1400"/>
+              <a:t>Antwoordmodel: https://github.com/meijer1973/4veco-lessen/blob/a8940a7a79e22857a3e306a91fe923c48c63e716/Boek%202%20-%20Kosten%2C%20opbrengsten%2C%20elasticiteit%20en%20surplus/edities/chat-2026/boek/Boek_2_Compleet_Antwoorden.pdf</a:t>
             </a:r>
           </a:p>
           <a:p xmlns:a="http://schemas.openxmlformats.org/drawingml/2006/main">
@@ -1532,7 +1532,7 @@
           <a:p xmlns:a="http://schemas.openxmlformats.org/drawingml/2006/main">
             <a:r>
               <a:rPr sz="1400"/>
-              <a:t>Uitleg: Start de doelbespreking nadat leerlingen oefening 8 zelf hebben geprobeerd. Dit zijn de volledige rekenafspraken uit de originele context, inclusief de afwijkend begrensde categorie normaal en beide grenswaarden. De volgende vier dia’s geven alle drie bronnen en deelvragen a–e, zonder oplossingen. Laat leerlingen hun boek openhouden op p. 62.</a:t>
+              <a:t>Uitleg: Start de doelbespreking nadat leerlingen oefening 8 zelf hebben geprobeerd. Dit zijn de volledige rekenafspraken uit de originele context, inclusief de afwijkend begrensde categorie normaal en beide grenswaarden. De volgende vier dia’s geven alle drie bronnen en deelvragen a–e, zonder oplossingen. Laat leerlingen hun boek openhouden op p. 63.</a:t>
             </a:r>
           </a:p>
           <a:p xmlns:a="http://schemas.openxmlformats.org/drawingml/2006/main">
@@ -1568,13 +1568,13 @@
           <a:p xmlns:a="http://schemas.openxmlformats.org/drawingml/2006/main">
             <a:r>
               <a:rPr sz="1400"/>
-              <a:t>Bron: Boek 2, editie chat-2026, revisie 21 september 2026; gedrukte pagina 62. https://github.com/meijer1973/4veco-lessen/blob/f2660032cf7e4e3bbab96cf32863d06a38bd74bc/Boek%202%20-%20Kosten%2C%20opbrengsten%2C%20elasticiteit%20en%20surplus/edities/chat-2026/boek/Boek_2_Compleet.pdf</a:t>
-            </a:r>
-          </a:p>
-          <a:p xmlns:a="http://schemas.openxmlformats.org/drawingml/2006/main">
-            <a:r>
-              <a:rPr sz="1400"/>
-              <a:t>Antwoordmodel: https://github.com/meijer1973/4veco-lessen/blob/f2660032cf7e4e3bbab96cf32863d06a38bd74bc/Boek%202%20-%20Kosten%2C%20opbrengsten%2C%20elasticiteit%20en%20surplus/edities/chat-2026/boek/Boek_2_Compleet_Antwoorden.pdf</a:t>
+              <a:t>Bron: Boek 2, editie chat-2026, revisie 1 oktober 2026; gedrukte pagina 63. https://github.com/meijer1973/4veco-lessen/blob/a8940a7a79e22857a3e306a91fe923c48c63e716/Boek%202%20-%20Kosten%2C%20opbrengsten%2C%20elasticiteit%20en%20surplus/edities/chat-2026/boek/Boek_2_Compleet.pdf</a:t>
+            </a:r>
+          </a:p>
+          <a:p xmlns:a="http://schemas.openxmlformats.org/drawingml/2006/main">
+            <a:r>
+              <a:rPr sz="1400"/>
+              <a:t>Antwoordmodel: https://github.com/meijer1973/4veco-lessen/blob/a8940a7a79e22857a3e306a91fe923c48c63e716/Boek%202%20-%20Kosten%2C%20opbrengsten%2C%20elasticiteit%20en%20surplus/edities/chat-2026/boek/Boek_2_Compleet_Antwoorden.pdf</a:t>
             </a:r>
           </a:p>
           <a:p xmlns:a="http://schemas.openxmlformats.org/drawingml/2006/main">
@@ -1699,13 +1699,13 @@
           <a:p xmlns:a="http://schemas.openxmlformats.org/drawingml/2006/main">
             <a:r>
               <a:rPr sz="1400"/>
-              <a:t>Bron: Boek 2, editie chat-2026, revisie 21 september 2026; gedrukte pagina 62. https://github.com/meijer1973/4veco-lessen/blob/f2660032cf7e4e3bbab96cf32863d06a38bd74bc/Boek%202%20-%20Kosten%2C%20opbrengsten%2C%20elasticiteit%20en%20surplus/edities/chat-2026/boek/Boek_2_Compleet.pdf</a:t>
-            </a:r>
-          </a:p>
-          <a:p xmlns:a="http://schemas.openxmlformats.org/drawingml/2006/main">
-            <a:r>
-              <a:rPr sz="1400"/>
-              <a:t>Antwoordmodel: https://github.com/meijer1973/4veco-lessen/blob/f2660032cf7e4e3bbab96cf32863d06a38bd74bc/Boek%202%20-%20Kosten%2C%20opbrengsten%2C%20elasticiteit%20en%20surplus/edities/chat-2026/boek/Boek_2_Compleet_Antwoorden.pdf</a:t>
+              <a:t>Bron: Boek 2, editie chat-2026, revisie 1 oktober 2026; gedrukte pagina 63. https://github.com/meijer1973/4veco-lessen/blob/a8940a7a79e22857a3e306a91fe923c48c63e716/Boek%202%20-%20Kosten%2C%20opbrengsten%2C%20elasticiteit%20en%20surplus/edities/chat-2026/boek/Boek_2_Compleet.pdf</a:t>
+            </a:r>
+          </a:p>
+          <a:p xmlns:a="http://schemas.openxmlformats.org/drawingml/2006/main">
+            <a:r>
+              <a:rPr sz="1400"/>
+              <a:t>Antwoordmodel: https://github.com/meijer1973/4veco-lessen/blob/a8940a7a79e22857a3e306a91fe923c48c63e716/Boek%202%20-%20Kosten%2C%20opbrengsten%2C%20elasticiteit%20en%20surplus/edities/chat-2026/boek/Boek_2_Compleet_Antwoorden.pdf</a:t>
             </a:r>
           </a:p>
           <a:p xmlns:a="http://schemas.openxmlformats.org/drawingml/2006/main">
@@ -1830,13 +1830,13 @@
           <a:p xmlns:a="http://schemas.openxmlformats.org/drawingml/2006/main">
             <a:r>
               <a:rPr sz="1400"/>
-              <a:t>Bron: Boek 2, editie chat-2026, revisie 21 september 2026; gedrukte pagina 62. https://github.com/meijer1973/4veco-lessen/blob/f2660032cf7e4e3bbab96cf32863d06a38bd74bc/Boek%202%20-%20Kosten%2C%20opbrengsten%2C%20elasticiteit%20en%20surplus/edities/chat-2026/boek/Boek_2_Compleet.pdf</a:t>
-            </a:r>
-          </a:p>
-          <a:p xmlns:a="http://schemas.openxmlformats.org/drawingml/2006/main">
-            <a:r>
-              <a:rPr sz="1400"/>
-              <a:t>Antwoordmodel: https://github.com/meijer1973/4veco-lessen/blob/f2660032cf7e4e3bbab96cf32863d06a38bd74bc/Boek%202%20-%20Kosten%2C%20opbrengsten%2C%20elasticiteit%20en%20surplus/edities/chat-2026/boek/Boek_2_Compleet_Antwoorden.pdf</a:t>
+              <a:t>Bron: Boek 2, editie chat-2026, revisie 1 oktober 2026; gedrukte pagina 63. https://github.com/meijer1973/4veco-lessen/blob/a8940a7a79e22857a3e306a91fe923c48c63e716/Boek%202%20-%20Kosten%2C%20opbrengsten%2C%20elasticiteit%20en%20surplus/edities/chat-2026/boek/Boek_2_Compleet.pdf</a:t>
+            </a:r>
+          </a:p>
+          <a:p xmlns:a="http://schemas.openxmlformats.org/drawingml/2006/main">
+            <a:r>
+              <a:rPr sz="1400"/>
+              <a:t>Antwoordmodel: https://github.com/meijer1973/4veco-lessen/blob/a8940a7a79e22857a3e306a91fe923c48c63e716/Boek%202%20-%20Kosten%2C%20opbrengsten%2C%20elasticiteit%20en%20surplus/edities/chat-2026/boek/Boek_2_Compleet_Antwoorden.pdf</a:t>
             </a:r>
           </a:p>
           <a:p xmlns:a="http://schemas.openxmlformats.org/drawingml/2006/main">
@@ -1961,13 +1961,13 @@
           <a:p xmlns:a="http://schemas.openxmlformats.org/drawingml/2006/main">
             <a:r>
               <a:rPr sz="1400"/>
-              <a:t>Bron: Boek 2, editie chat-2026, revisie 21 september 2026; gedrukte pagina 36–38 en 52–56. https://github.com/meijer1973/4veco-lessen/blob/f2660032cf7e4e3bbab96cf32863d06a38bd74bc/Boek%202%20-%20Kosten%2C%20opbrengsten%2C%20elasticiteit%20en%20surplus/edities/chat-2026/boek/Boek_2_Compleet.pdf</a:t>
-            </a:r>
-          </a:p>
-          <a:p xmlns:a="http://schemas.openxmlformats.org/drawingml/2006/main">
-            <a:r>
-              <a:rPr sz="1400"/>
-              <a:t>Antwoordmodel: https://github.com/meijer1973/4veco-lessen/blob/f2660032cf7e4e3bbab96cf32863d06a38bd74bc/Boek%202%20-%20Kosten%2C%20opbrengsten%2C%20elasticiteit%20en%20surplus/edities/chat-2026/boek/Boek_2_Compleet_Antwoorden.pdf</a:t>
+              <a:t>Bron: Boek 2, editie chat-2026, revisie 1 oktober 2026; gedrukte pagina 37–39 en 53–57. https://github.com/meijer1973/4veco-lessen/blob/a8940a7a79e22857a3e306a91fe923c48c63e716/Boek%202%20-%20Kosten%2C%20opbrengsten%2C%20elasticiteit%20en%20surplus/edities/chat-2026/boek/Boek_2_Compleet.pdf</a:t>
+            </a:r>
+          </a:p>
+          <a:p xmlns:a="http://schemas.openxmlformats.org/drawingml/2006/main">
+            <a:r>
+              <a:rPr sz="1400"/>
+              <a:t>Antwoordmodel: https://github.com/meijer1973/4veco-lessen/blob/a8940a7a79e22857a3e306a91fe923c48c63e716/Boek%202%20-%20Kosten%2C%20opbrengsten%2C%20elasticiteit%20en%20surplus/edities/chat-2026/boek/Boek_2_Compleet_Antwoorden.pdf</a:t>
             </a:r>
           </a:p>
           <a:p xmlns:a="http://schemas.openxmlformats.org/drawingml/2006/main">
@@ -2092,13 +2092,13 @@
           <a:p xmlns:a="http://schemas.openxmlformats.org/drawingml/2006/main">
             <a:r>
               <a:rPr sz="1400"/>
-              <a:t>Bron: Boek 2, editie chat-2026, revisie 21 september 2026; gedrukte pagina 62. https://github.com/meijer1973/4veco-lessen/blob/f2660032cf7e4e3bbab96cf32863d06a38bd74bc/Boek%202%20-%20Kosten%2C%20opbrengsten%2C%20elasticiteit%20en%20surplus/edities/chat-2026/boek/Boek_2_Compleet.pdf</a:t>
-            </a:r>
-          </a:p>
-          <a:p xmlns:a="http://schemas.openxmlformats.org/drawingml/2006/main">
-            <a:r>
-              <a:rPr sz="1400"/>
-              <a:t>Antwoordmodel: https://github.com/meijer1973/4veco-lessen/blob/f2660032cf7e4e3bbab96cf32863d06a38bd74bc/Boek%202%20-%20Kosten%2C%20opbrengsten%2C%20elasticiteit%20en%20surplus/edities/chat-2026/boek/Boek_2_Compleet_Antwoorden.pdf</a:t>
+              <a:t>Bron: Boek 2, editie chat-2026, revisie 1 oktober 2026; gedrukte pagina 63. https://github.com/meijer1973/4veco-lessen/blob/a8940a7a79e22857a3e306a91fe923c48c63e716/Boek%202%20-%20Kosten%2C%20opbrengsten%2C%20elasticiteit%20en%20surplus/edities/chat-2026/boek/Boek_2_Compleet.pdf</a:t>
+            </a:r>
+          </a:p>
+          <a:p xmlns:a="http://schemas.openxmlformats.org/drawingml/2006/main">
+            <a:r>
+              <a:rPr sz="1400"/>
+              <a:t>Antwoordmodel: https://github.com/meijer1973/4veco-lessen/blob/a8940a7a79e22857a3e306a91fe923c48c63e716/Boek%202%20-%20Kosten%2C%20opbrengsten%2C%20elasticiteit%20en%20surplus/edities/chat-2026/boek/Boek_2_Compleet_Antwoorden.pdf</a:t>
             </a:r>
           </a:p>
           <a:p xmlns:a="http://schemas.openxmlformats.org/drawingml/2006/main">
@@ -2187,7 +2187,7 @@
           <a:p xmlns:a="http://schemas.openxmlformats.org/drawingml/2006/main">
             <a:r>
               <a:rPr sz="1400"/>
-              <a:t>Uitleg: Alle subvragen a–e zijn nu beschikbaar geweest, zonder oplossingen. Vraag d omvat beide hoeveelheden, de procentuele reactie, Ei, classificatie, de absolute richting en vaste variabelen. Bij Ei is ook %ΔY nodig als tussenstap. Vraag e begint opnieuw bij Y = 30.000. Blader zo nodig terug naar de brondia of gebruik p. 62.</a:t>
+              <a:t>Uitleg: Alle subvragen a–e zijn nu beschikbaar geweest, zonder oplossingen. Vraag d omvat beide hoeveelheden, de procentuele reactie, Ei, classificatie, de absolute richting en vaste variabelen. Bij Ei is ook %ΔY nodig als tussenstap. Vraag e begint opnieuw bij Y = 30.000. Blader zo nodig terug naar de brondia of gebruik p. 63.</a:t>
             </a:r>
           </a:p>
           <a:p xmlns:a="http://schemas.openxmlformats.org/drawingml/2006/main">
@@ -2223,13 +2223,13 @@
           <a:p xmlns:a="http://schemas.openxmlformats.org/drawingml/2006/main">
             <a:r>
               <a:rPr sz="1400"/>
-              <a:t>Bron: Boek 2, editie chat-2026, revisie 21 september 2026; gedrukte pagina 62. https://github.com/meijer1973/4veco-lessen/blob/f2660032cf7e4e3bbab96cf32863d06a38bd74bc/Boek%202%20-%20Kosten%2C%20opbrengsten%2C%20elasticiteit%20en%20surplus/edities/chat-2026/boek/Boek_2_Compleet.pdf</a:t>
-            </a:r>
-          </a:p>
-          <a:p xmlns:a="http://schemas.openxmlformats.org/drawingml/2006/main">
-            <a:r>
-              <a:rPr sz="1400"/>
-              <a:t>Antwoordmodel: https://github.com/meijer1973/4veco-lessen/blob/f2660032cf7e4e3bbab96cf32863d06a38bd74bc/Boek%202%20-%20Kosten%2C%20opbrengsten%2C%20elasticiteit%20en%20surplus/edities/chat-2026/boek/Boek_2_Compleet_Antwoorden.pdf</a:t>
+              <a:t>Bron: Boek 2, editie chat-2026, revisie 1 oktober 2026; gedrukte pagina 63. https://github.com/meijer1973/4veco-lessen/blob/a8940a7a79e22857a3e306a91fe923c48c63e716/Boek%202%20-%20Kosten%2C%20opbrengsten%2C%20elasticiteit%20en%20surplus/edities/chat-2026/boek/Boek_2_Compleet.pdf</a:t>
+            </a:r>
+          </a:p>
+          <a:p xmlns:a="http://schemas.openxmlformats.org/drawingml/2006/main">
+            <a:r>
+              <a:rPr sz="1400"/>
+              <a:t>Antwoordmodel: https://github.com/meijer1973/4veco-lessen/blob/a8940a7a79e22857a3e306a91fe923c48c63e716/Boek%202%20-%20Kosten%2C%20opbrengsten%2C%20elasticiteit%20en%20surplus/edities/chat-2026/boek/Boek_2_Compleet_Antwoorden.pdf</a:t>
             </a:r>
           </a:p>
           <a:p xmlns:a="http://schemas.openxmlformats.org/drawingml/2006/main">
@@ -2354,13 +2354,13 @@
           <a:p xmlns:a="http://schemas.openxmlformats.org/drawingml/2006/main">
             <a:r>
               <a:rPr sz="1400"/>
-              <a:t>Bron: Boek 2, editie chat-2026, revisie 21 september 2026; gedrukte pagina 62. https://github.com/meijer1973/4veco-lessen/blob/f2660032cf7e4e3bbab96cf32863d06a38bd74bc/Boek%202%20-%20Kosten%2C%20opbrengsten%2C%20elasticiteit%20en%20surplus/edities/chat-2026/boek/Boek_2_Compleet.pdf</a:t>
-            </a:r>
-          </a:p>
-          <a:p xmlns:a="http://schemas.openxmlformats.org/drawingml/2006/main">
-            <a:r>
-              <a:rPr sz="1400"/>
-              <a:t>Antwoordmodel: https://github.com/meijer1973/4veco-lessen/blob/f2660032cf7e4e3bbab96cf32863d06a38bd74bc/Boek%202%20-%20Kosten%2C%20opbrengsten%2C%20elasticiteit%20en%20surplus/edities/chat-2026/boek/Boek_2_Compleet_Antwoorden.pdf</a:t>
+              <a:t>Bron: Boek 2, editie chat-2026, revisie 1 oktober 2026; gedrukte pagina 63. https://github.com/meijer1973/4veco-lessen/blob/a8940a7a79e22857a3e306a91fe923c48c63e716/Boek%202%20-%20Kosten%2C%20opbrengsten%2C%20elasticiteit%20en%20surplus/edities/chat-2026/boek/Boek_2_Compleet.pdf</a:t>
+            </a:r>
+          </a:p>
+          <a:p xmlns:a="http://schemas.openxmlformats.org/drawingml/2006/main">
+            <a:r>
+              <a:rPr sz="1400"/>
+              <a:t>Antwoordmodel: https://github.com/meijer1973/4veco-lessen/blob/a8940a7a79e22857a3e306a91fe923c48c63e716/Boek%202%20-%20Kosten%2C%20opbrengsten%2C%20elasticiteit%20en%20surplus/edities/chat-2026/boek/Boek_2_Compleet_Antwoorden.pdf</a:t>
             </a:r>
           </a:p>
           <a:p xmlns:a="http://schemas.openxmlformats.org/drawingml/2006/main">
@@ -2485,13 +2485,13 @@
           <a:p xmlns:a="http://schemas.openxmlformats.org/drawingml/2006/main">
             <a:r>
               <a:rPr sz="1400"/>
-              <a:t>Bron: Boek 2, editie chat-2026, revisie 21 september 2026; gedrukte pagina 62. https://github.com/meijer1973/4veco-lessen/blob/f2660032cf7e4e3bbab96cf32863d06a38bd74bc/Boek%202%20-%20Kosten%2C%20opbrengsten%2C%20elasticiteit%20en%20surplus/edities/chat-2026/boek/Boek_2_Compleet.pdf</a:t>
-            </a:r>
-          </a:p>
-          <a:p xmlns:a="http://schemas.openxmlformats.org/drawingml/2006/main">
-            <a:r>
-              <a:rPr sz="1400"/>
-              <a:t>Antwoordmodel: https://github.com/meijer1973/4veco-lessen/blob/f2660032cf7e4e3bbab96cf32863d06a38bd74bc/Boek%202%20-%20Kosten%2C%20opbrengsten%2C%20elasticiteit%20en%20surplus/edities/chat-2026/boek/Boek_2_Compleet_Antwoorden.pdf</a:t>
+              <a:t>Bron: Boek 2, editie chat-2026, revisie 1 oktober 2026; gedrukte pagina 63. https://github.com/meijer1973/4veco-lessen/blob/a8940a7a79e22857a3e306a91fe923c48c63e716/Boek%202%20-%20Kosten%2C%20opbrengsten%2C%20elasticiteit%20en%20surplus/edities/chat-2026/boek/Boek_2_Compleet.pdf</a:t>
+            </a:r>
+          </a:p>
+          <a:p xmlns:a="http://schemas.openxmlformats.org/drawingml/2006/main">
+            <a:r>
+              <a:rPr sz="1400"/>
+              <a:t>Antwoordmodel: https://github.com/meijer1973/4veco-lessen/blob/a8940a7a79e22857a3e306a91fe923c48c63e716/Boek%202%20-%20Kosten%2C%20opbrengsten%2C%20elasticiteit%20en%20surplus/edities/chat-2026/boek/Boek_2_Compleet_Antwoorden.pdf</a:t>
             </a:r>
           </a:p>
           <a:p xmlns:a="http://schemas.openxmlformats.org/drawingml/2006/main">
@@ -2616,13 +2616,13 @@
           <a:p xmlns:a="http://schemas.openxmlformats.org/drawingml/2006/main">
             <a:r>
               <a:rPr sz="1400"/>
-              <a:t>Bron: Boek 2, editie chat-2026, revisie 21 september 2026; gedrukte pagina 62. https://github.com/meijer1973/4veco-lessen/blob/f2660032cf7e4e3bbab96cf32863d06a38bd74bc/Boek%202%20-%20Kosten%2C%20opbrengsten%2C%20elasticiteit%20en%20surplus/edities/chat-2026/boek/Boek_2_Compleet.pdf</a:t>
-            </a:r>
-          </a:p>
-          <a:p xmlns:a="http://schemas.openxmlformats.org/drawingml/2006/main">
-            <a:r>
-              <a:rPr sz="1400"/>
-              <a:t>Antwoordmodel: https://github.com/meijer1973/4veco-lessen/blob/f2660032cf7e4e3bbab96cf32863d06a38bd74bc/Boek%202%20-%20Kosten%2C%20opbrengsten%2C%20elasticiteit%20en%20surplus/edities/chat-2026/boek/Boek_2_Compleet_Antwoorden.pdf</a:t>
+              <a:t>Bron: Boek 2, editie chat-2026, revisie 1 oktober 2026; gedrukte pagina 63. https://github.com/meijer1973/4veco-lessen/blob/a8940a7a79e22857a3e306a91fe923c48c63e716/Boek%202%20-%20Kosten%2C%20opbrengsten%2C%20elasticiteit%20en%20surplus/edities/chat-2026/boek/Boek_2_Compleet.pdf</a:t>
+            </a:r>
+          </a:p>
+          <a:p xmlns:a="http://schemas.openxmlformats.org/drawingml/2006/main">
+            <a:r>
+              <a:rPr sz="1400"/>
+              <a:t>Antwoordmodel: https://github.com/meijer1973/4veco-lessen/blob/a8940a7a79e22857a3e306a91fe923c48c63e716/Boek%202%20-%20Kosten%2C%20opbrengsten%2C%20elasticiteit%20en%20surplus/edities/chat-2026/boek/Boek_2_Compleet_Antwoorden.pdf</a:t>
             </a:r>
           </a:p>
           <a:p xmlns:a="http://schemas.openxmlformats.org/drawingml/2006/main">
@@ -2747,13 +2747,13 @@
           <a:p xmlns:a="http://schemas.openxmlformats.org/drawingml/2006/main">
             <a:r>
               <a:rPr sz="1400"/>
-              <a:t>Bron: Boek 2, editie chat-2026, revisie 21 september 2026; gedrukte pagina 62. https://github.com/meijer1973/4veco-lessen/blob/f2660032cf7e4e3bbab96cf32863d06a38bd74bc/Boek%202%20-%20Kosten%2C%20opbrengsten%2C%20elasticiteit%20en%20surplus/edities/chat-2026/boek/Boek_2_Compleet.pdf</a:t>
-            </a:r>
-          </a:p>
-          <a:p xmlns:a="http://schemas.openxmlformats.org/drawingml/2006/main">
-            <a:r>
-              <a:rPr sz="1400"/>
-              <a:t>Antwoordmodel: https://github.com/meijer1973/4veco-lessen/blob/f2660032cf7e4e3bbab96cf32863d06a38bd74bc/Boek%202%20-%20Kosten%2C%20opbrengsten%2C%20elasticiteit%20en%20surplus/edities/chat-2026/boek/Boek_2_Compleet_Antwoorden.pdf</a:t>
+              <a:t>Bron: Boek 2, editie chat-2026, revisie 1 oktober 2026; gedrukte pagina 63. https://github.com/meijer1973/4veco-lessen/blob/a8940a7a79e22857a3e306a91fe923c48c63e716/Boek%202%20-%20Kosten%2C%20opbrengsten%2C%20elasticiteit%20en%20surplus/edities/chat-2026/boek/Boek_2_Compleet.pdf</a:t>
+            </a:r>
+          </a:p>
+          <a:p xmlns:a="http://schemas.openxmlformats.org/drawingml/2006/main">
+            <a:r>
+              <a:rPr sz="1400"/>
+              <a:t>Antwoordmodel: https://github.com/meijer1973/4veco-lessen/blob/a8940a7a79e22857a3e306a91fe923c48c63e716/Boek%202%20-%20Kosten%2C%20opbrengsten%2C%20elasticiteit%20en%20surplus/edities/chat-2026/boek/Boek_2_Compleet_Antwoorden.pdf</a:t>
             </a:r>
           </a:p>
           <a:p xmlns:a="http://schemas.openxmlformats.org/drawingml/2006/main">
@@ -2878,13 +2878,13 @@
           <a:p xmlns:a="http://schemas.openxmlformats.org/drawingml/2006/main">
             <a:r>
               <a:rPr sz="1400"/>
-              <a:t>Bron: Boek 2, editie chat-2026, revisie 21 september 2026; gedrukte pagina 62. https://github.com/meijer1973/4veco-lessen/blob/f2660032cf7e4e3bbab96cf32863d06a38bd74bc/Boek%202%20-%20Kosten%2C%20opbrengsten%2C%20elasticiteit%20en%20surplus/edities/chat-2026/boek/Boek_2_Compleet.pdf</a:t>
-            </a:r>
-          </a:p>
-          <a:p xmlns:a="http://schemas.openxmlformats.org/drawingml/2006/main">
-            <a:r>
-              <a:rPr sz="1400"/>
-              <a:t>Antwoordmodel: https://github.com/meijer1973/4veco-lessen/blob/f2660032cf7e4e3bbab96cf32863d06a38bd74bc/Boek%202%20-%20Kosten%2C%20opbrengsten%2C%20elasticiteit%20en%20surplus/edities/chat-2026/boek/Boek_2_Compleet_Antwoorden.pdf</a:t>
+              <a:t>Bron: Boek 2, editie chat-2026, revisie 1 oktober 2026; gedrukte pagina 63. https://github.com/meijer1973/4veco-lessen/blob/a8940a7a79e22857a3e306a91fe923c48c63e716/Boek%202%20-%20Kosten%2C%20opbrengsten%2C%20elasticiteit%20en%20surplus/edities/chat-2026/boek/Boek_2_Compleet.pdf</a:t>
+            </a:r>
+          </a:p>
+          <a:p xmlns:a="http://schemas.openxmlformats.org/drawingml/2006/main">
+            <a:r>
+              <a:rPr sz="1400"/>
+              <a:t>Antwoordmodel: https://github.com/meijer1973/4veco-lessen/blob/a8940a7a79e22857a3e306a91fe923c48c63e716/Boek%202%20-%20Kosten%2C%20opbrengsten%2C%20elasticiteit%20en%20surplus/edities/chat-2026/boek/Boek_2_Compleet_Antwoorden.pdf</a:t>
             </a:r>
           </a:p>
           <a:p xmlns:a="http://schemas.openxmlformats.org/drawingml/2006/main">
@@ -3009,13 +3009,13 @@
           <a:p xmlns:a="http://schemas.openxmlformats.org/drawingml/2006/main">
             <a:r>
               <a:rPr sz="1400"/>
-              <a:t>Bron: Boek 2, editie chat-2026, revisie 21 september 2026; gedrukte pagina 62. https://github.com/meijer1973/4veco-lessen/blob/f2660032cf7e4e3bbab96cf32863d06a38bd74bc/Boek%202%20-%20Kosten%2C%20opbrengsten%2C%20elasticiteit%20en%20surplus/edities/chat-2026/boek/Boek_2_Compleet.pdf</a:t>
-            </a:r>
-          </a:p>
-          <a:p xmlns:a="http://schemas.openxmlformats.org/drawingml/2006/main">
-            <a:r>
-              <a:rPr sz="1400"/>
-              <a:t>Antwoordmodel: https://github.com/meijer1973/4veco-lessen/blob/f2660032cf7e4e3bbab96cf32863d06a38bd74bc/Boek%202%20-%20Kosten%2C%20opbrengsten%2C%20elasticiteit%20en%20surplus/edities/chat-2026/boek/Boek_2_Compleet_Antwoorden.pdf</a:t>
+              <a:t>Bron: Boek 2, editie chat-2026, revisie 1 oktober 2026; gedrukte pagina 63. https://github.com/meijer1973/4veco-lessen/blob/a8940a7a79e22857a3e306a91fe923c48c63e716/Boek%202%20-%20Kosten%2C%20opbrengsten%2C%20elasticiteit%20en%20surplus/edities/chat-2026/boek/Boek_2_Compleet.pdf</a:t>
+            </a:r>
+          </a:p>
+          <a:p xmlns:a="http://schemas.openxmlformats.org/drawingml/2006/main">
+            <a:r>
+              <a:rPr sz="1400"/>
+              <a:t>Antwoordmodel: https://github.com/meijer1973/4veco-lessen/blob/a8940a7a79e22857a3e306a91fe923c48c63e716/Boek%202%20-%20Kosten%2C%20opbrengsten%2C%20elasticiteit%20en%20surplus/edities/chat-2026/boek/Boek_2_Compleet_Antwoorden.pdf</a:t>
             </a:r>
           </a:p>
           <a:p xmlns:a="http://schemas.openxmlformats.org/drawingml/2006/main">
@@ -3140,13 +3140,13 @@
           <a:p xmlns:a="http://schemas.openxmlformats.org/drawingml/2006/main">
             <a:r>
               <a:rPr sz="1400"/>
-              <a:t>Bron: Boek 2, editie chat-2026, revisie 21 september 2026; gedrukte pagina 62. https://github.com/meijer1973/4veco-lessen/blob/f2660032cf7e4e3bbab96cf32863d06a38bd74bc/Boek%202%20-%20Kosten%2C%20opbrengsten%2C%20elasticiteit%20en%20surplus/edities/chat-2026/boek/Boek_2_Compleet.pdf</a:t>
-            </a:r>
-          </a:p>
-          <a:p xmlns:a="http://schemas.openxmlformats.org/drawingml/2006/main">
-            <a:r>
-              <a:rPr sz="1400"/>
-              <a:t>Antwoordmodel: https://github.com/meijer1973/4veco-lessen/blob/f2660032cf7e4e3bbab96cf32863d06a38bd74bc/Boek%202%20-%20Kosten%2C%20opbrengsten%2C%20elasticiteit%20en%20surplus/edities/chat-2026/boek/Boek_2_Compleet_Antwoorden.pdf</a:t>
+              <a:t>Bron: Boek 2, editie chat-2026, revisie 1 oktober 2026; gedrukte pagina 63. https://github.com/meijer1973/4veco-lessen/blob/a8940a7a79e22857a3e306a91fe923c48c63e716/Boek%202%20-%20Kosten%2C%20opbrengsten%2C%20elasticiteit%20en%20surplus/edities/chat-2026/boek/Boek_2_Compleet.pdf</a:t>
+            </a:r>
+          </a:p>
+          <a:p xmlns:a="http://schemas.openxmlformats.org/drawingml/2006/main">
+            <a:r>
+              <a:rPr sz="1400"/>
+              <a:t>Antwoordmodel: https://github.com/meijer1973/4veco-lessen/blob/a8940a7a79e22857a3e306a91fe923c48c63e716/Boek%202%20-%20Kosten%2C%20opbrengsten%2C%20elasticiteit%20en%20surplus/edities/chat-2026/boek/Boek_2_Compleet_Antwoorden.pdf</a:t>
             </a:r>
           </a:p>
           <a:p xmlns:a="http://schemas.openxmlformats.org/drawingml/2006/main">
@@ -3271,13 +3271,13 @@
           <a:p xmlns:a="http://schemas.openxmlformats.org/drawingml/2006/main">
             <a:r>
               <a:rPr sz="1400"/>
-              <a:t>Bron: Boek 2, editie chat-2026, revisie 21 september 2026; gedrukte pagina 62. https://github.com/meijer1973/4veco-lessen/blob/f2660032cf7e4e3bbab96cf32863d06a38bd74bc/Boek%202%20-%20Kosten%2C%20opbrengsten%2C%20elasticiteit%20en%20surplus/edities/chat-2026/boek/Boek_2_Compleet.pdf</a:t>
-            </a:r>
-          </a:p>
-          <a:p xmlns:a="http://schemas.openxmlformats.org/drawingml/2006/main">
-            <a:r>
-              <a:rPr sz="1400"/>
-              <a:t>Antwoordmodel: https://github.com/meijer1973/4veco-lessen/blob/f2660032cf7e4e3bbab96cf32863d06a38bd74bc/Boek%202%20-%20Kosten%2C%20opbrengsten%2C%20elasticiteit%20en%20surplus/edities/chat-2026/boek/Boek_2_Compleet_Antwoorden.pdf</a:t>
+              <a:t>Bron: Boek 2, editie chat-2026, revisie 1 oktober 2026; gedrukte pagina 63. https://github.com/meijer1973/4veco-lessen/blob/a8940a7a79e22857a3e306a91fe923c48c63e716/Boek%202%20-%20Kosten%2C%20opbrengsten%2C%20elasticiteit%20en%20surplus/edities/chat-2026/boek/Boek_2_Compleet.pdf</a:t>
+            </a:r>
+          </a:p>
+          <a:p xmlns:a="http://schemas.openxmlformats.org/drawingml/2006/main">
+            <a:r>
+              <a:rPr sz="1400"/>
+              <a:t>Antwoordmodel: https://github.com/meijer1973/4veco-lessen/blob/a8940a7a79e22857a3e306a91fe923c48c63e716/Boek%202%20-%20Kosten%2C%20opbrengsten%2C%20elasticiteit%20en%20surplus/edities/chat-2026/boek/Boek_2_Compleet_Antwoorden.pdf</a:t>
             </a:r>
           </a:p>
           <a:p xmlns:a="http://schemas.openxmlformats.org/drawingml/2006/main">
@@ -3402,7 +3402,7 @@
           <a:p xmlns:a="http://schemas.openxmlformats.org/drawingml/2006/main">
             <a:r>
               <a:rPr sz="1400"/>
-              <a:t>Bron: Boek 2, editie chat-2026, revisie 21 september 2026; gedrukte pagina 37. https://github.com/meijer1973/4veco-lessen/blob/f2660032cf7e4e3bbab96cf32863d06a38bd74bc/Boek%202%20-%20Kosten%2C%20opbrengsten%2C%20elasticiteit%20en%20surplus/edities/chat-2026/boek/Boek_2_Compleet.pdf</a:t>
+              <a:t>Bron: Boek 2, editie chat-2026, revisie 1 oktober 2026; gedrukte pagina 38. https://github.com/meijer1973/4veco-lessen/blob/a8940a7a79e22857a3e306a91fe923c48c63e716/Boek%202%20-%20Kosten%2C%20opbrengsten%2C%20elasticiteit%20en%20surplus/edities/chat-2026/boek/Boek_2_Compleet.pdf</a:t>
             </a:r>
           </a:p>
           <a:p xmlns:a="http://schemas.openxmlformats.org/drawingml/2006/main">
@@ -3497,7 +3497,7 @@
           <a:p xmlns:a="http://schemas.openxmlformats.org/drawingml/2006/main">
             <a:r>
               <a:rPr sz="1400"/>
-              <a:t>Uitleg: Laat de dia staan tijdens afsluiting / huiswerk. Opgave 1 haalt procenten en eenvoudig invullen op. Bij twijfel geef je het rekenschema (nieuw − oud) / oud × 100%, of laat je eerst P vervangen en daarna vermenigvuldigen. Opgave 2 verkent nieuwe leerstof: 2a gebruikt definities op p. 53–54; bij 2b helpt het één-factor-voorbeeld op p. 55–56. Laat leerlingen die tekst erbij nemen en een voorlopige redenering noteren; verwacht nog geen zelfstandige beheersing. Na de uitleg keren we terug naar opgave 2. Basis 3 staat op p. 59, 4–5 op p. 60; zelfstandig 6–7 op p. 61; doel 8 op p. 62. Huiswerk: 3, 4, 5, 6, 7 en 8 maken en nakijken. Bonus en herhaling zijn extra.</a:t>
+              <a:t>Uitleg: Laat de dia staan tijdens afsluiting / huiswerk. Opgave 1 haalt procenten en eenvoudig invullen op. Bij twijfel geef je het rekenschema (nieuw − oud) / oud × 100%, of laat je eerst P vervangen en daarna vermenigvuldigen. Opgave 2 verkent nieuwe leerstof: 2a gebruikt definities op p. 54–55; bij 2b helpt het één-factor-voorbeeld op p. 56–57. Laat leerlingen die tekst erbij nemen en een voorlopige redenering noteren; verwacht nog geen zelfstandige beheersing. Na de uitleg keren we terug naar opgave 2. Basis 3 staat op p. 60, 4–5 op p. 61; zelfstandig 6–7 op p. 62; doel 8 op p. 63. Huiswerk: 3, 4, 5, 6, 7 en 8 maken en nakijken. Bonus en herhaling zijn extra.</a:t>
             </a:r>
           </a:p>
           <a:p xmlns:a="http://schemas.openxmlformats.org/drawingml/2006/main">
@@ -3533,13 +3533,13 @@
           <a:p xmlns:a="http://schemas.openxmlformats.org/drawingml/2006/main">
             <a:r>
               <a:rPr sz="1400"/>
-              <a:t>Bron: Boek 2, editie chat-2026, revisie 21 september 2026; gedrukte pagina 53–56 en 59–62. https://github.com/meijer1973/4veco-lessen/blob/f2660032cf7e4e3bbab96cf32863d06a38bd74bc/Boek%202%20-%20Kosten%2C%20opbrengsten%2C%20elasticiteit%20en%20surplus/edities/chat-2026/boek/Boek_2_Compleet.pdf</a:t>
-            </a:r>
-          </a:p>
-          <a:p xmlns:a="http://schemas.openxmlformats.org/drawingml/2006/main">
-            <a:r>
-              <a:rPr sz="1400"/>
-              <a:t>Antwoordmodel: https://github.com/meijer1973/4veco-lessen/blob/f2660032cf7e4e3bbab96cf32863d06a38bd74bc/Boek%202%20-%20Kosten%2C%20opbrengsten%2C%20elasticiteit%20en%20surplus/edities/chat-2026/boek/Boek_2_Compleet_Antwoorden.pdf</a:t>
+              <a:t>Bron: Boek 2, editie chat-2026, revisie 1 oktober 2026; gedrukte pagina 54–57 en 60–63. https://github.com/meijer1973/4veco-lessen/blob/a8940a7a79e22857a3e306a91fe923c48c63e716/Boek%202%20-%20Kosten%2C%20opbrengsten%2C%20elasticiteit%20en%20surplus/edities/chat-2026/boek/Boek_2_Compleet.pdf</a:t>
+            </a:r>
+          </a:p>
+          <a:p xmlns:a="http://schemas.openxmlformats.org/drawingml/2006/main">
+            <a:r>
+              <a:rPr sz="1400"/>
+              <a:t>Antwoordmodel: https://github.com/meijer1973/4veco-lessen/blob/a8940a7a79e22857a3e306a91fe923c48c63e716/Boek%202%20-%20Kosten%2C%20opbrengsten%2C%20elasticiteit%20en%20surplus/edities/chat-2026/boek/Boek_2_Compleet_Antwoorden.pdf</a:t>
             </a:r>
           </a:p>
           <a:p xmlns:a="http://schemas.openxmlformats.org/drawingml/2006/main">
@@ -3664,7 +3664,7 @@
           <a:p xmlns:a="http://schemas.openxmlformats.org/drawingml/2006/main">
             <a:r>
               <a:rPr sz="1400"/>
-              <a:t>Bron: Boek 2, editie chat-2026, revisie 21 september 2026; gedrukte pagina 55; voorkennis volgens hoofdstukhandleiding. https://github.com/meijer1973/4veco-lessen/blob/f2660032cf7e4e3bbab96cf32863d06a38bd74bc/Boek%202%20-%20Kosten%2C%20opbrengsten%2C%20elasticiteit%20en%20surplus/edities/chat-2026/boek/Boek_2_Compleet.pdf</a:t>
+              <a:t>Bron: Boek 2, editie chat-2026, revisie 1 oktober 2026; gedrukte pagina 56; voorkennis volgens hoofdstukhandleiding. https://github.com/meijer1973/4veco-lessen/blob/a8940a7a79e22857a3e306a91fe923c48c63e716/Boek%202%20-%20Kosten%2C%20opbrengsten%2C%20elasticiteit%20en%20surplus/edities/chat-2026/boek/Boek_2_Compleet.pdf</a:t>
             </a:r>
           </a:p>
           <a:p xmlns:a="http://schemas.openxmlformats.org/drawingml/2006/main">
@@ -3795,7 +3795,7 @@
           <a:p xmlns:a="http://schemas.openxmlformats.org/drawingml/2006/main">
             <a:r>
               <a:rPr sz="1400"/>
-              <a:t>Bron: Boek 2, editie chat-2026, revisie 21 september 2026; gedrukte pagina 53. https://github.com/meijer1973/4veco-lessen/blob/f2660032cf7e4e3bbab96cf32863d06a38bd74bc/Boek%202%20-%20Kosten%2C%20opbrengsten%2C%20elasticiteit%20en%20surplus/edities/chat-2026/boek/Boek_2_Compleet.pdf</a:t>
+              <a:t>Bron: Boek 2, editie chat-2026, revisie 1 oktober 2026; gedrukte pagina 54. https://github.com/meijer1973/4veco-lessen/blob/a8940a7a79e22857a3e306a91fe923c48c63e716/Boek%202%20-%20Kosten%2C%20opbrengsten%2C%20elasticiteit%20en%20surplus/edities/chat-2026/boek/Boek_2_Compleet.pdf</a:t>
             </a:r>
           </a:p>
           <a:p xmlns:a="http://schemas.openxmlformats.org/drawingml/2006/main">
@@ -3926,13 +3926,13 @@
           <a:p xmlns:a="http://schemas.openxmlformats.org/drawingml/2006/main">
             <a:r>
               <a:rPr sz="1400"/>
-              <a:t>Bron: Boek 2, editie chat-2026, revisie 21 september 2026; gedrukte pagina 53. https://github.com/meijer1973/4veco-lessen/blob/f2660032cf7e4e3bbab96cf32863d06a38bd74bc/Boek%202%20-%20Kosten%2C%20opbrengsten%2C%20elasticiteit%20en%20surplus/edities/chat-2026/boek/Boek_2_Compleet.pdf</a:t>
-            </a:r>
-          </a:p>
-          <a:p xmlns:a="http://schemas.openxmlformats.org/drawingml/2006/main">
-            <a:r>
-              <a:rPr sz="1400"/>
-              <a:t>Antwoordmodel: https://github.com/meijer1973/4veco-lessen/blob/f2660032cf7e4e3bbab96cf32863d06a38bd74bc/Boek%202%20-%20Kosten%2C%20opbrengsten%2C%20elasticiteit%20en%20surplus/edities/chat-2026/boek/Boek_2_Compleet_Antwoorden.pdf</a:t>
+              <a:t>Bron: Boek 2, editie chat-2026, revisie 1 oktober 2026; gedrukte pagina 54. https://github.com/meijer1973/4veco-lessen/blob/a8940a7a79e22857a3e306a91fe923c48c63e716/Boek%202%20-%20Kosten%2C%20opbrengsten%2C%20elasticiteit%20en%20surplus/edities/chat-2026/boek/Boek_2_Compleet.pdf</a:t>
+            </a:r>
+          </a:p>
+          <a:p xmlns:a="http://schemas.openxmlformats.org/drawingml/2006/main">
+            <a:r>
+              <a:rPr sz="1400"/>
+              <a:t>Antwoordmodel: https://github.com/meijer1973/4veco-lessen/blob/a8940a7a79e22857a3e306a91fe923c48c63e716/Boek%202%20-%20Kosten%2C%20opbrengsten%2C%20elasticiteit%20en%20surplus/edities/chat-2026/boek/Boek_2_Compleet_Antwoorden.pdf</a:t>
             </a:r>
           </a:p>
           <a:p xmlns:a="http://schemas.openxmlformats.org/drawingml/2006/main">
@@ -4057,7 +4057,7 @@
           <a:p xmlns:a="http://schemas.openxmlformats.org/drawingml/2006/main">
             <a:r>
               <a:rPr sz="1400"/>
-              <a:t>Bron: Boek 2, editie chat-2026, revisie 21 september 2026; gedrukte pagina 54. https://github.com/meijer1973/4veco-lessen/blob/f2660032cf7e4e3bbab96cf32863d06a38bd74bc/Boek%202%20-%20Kosten%2C%20opbrengsten%2C%20elasticiteit%20en%20surplus/edities/chat-2026/boek/Boek_2_Compleet.pdf</a:t>
+              <a:t>Bron: Boek 2, editie chat-2026, revisie 1 oktober 2026; gedrukte pagina 55. https://github.com/meijer1973/4veco-lessen/blob/a8940a7a79e22857a3e306a91fe923c48c63e716/Boek%202%20-%20Kosten%2C%20opbrengsten%2C%20elasticiteit%20en%20surplus/edities/chat-2026/boek/Boek_2_Compleet.pdf</a:t>
             </a:r>
           </a:p>
           <a:p xmlns:a="http://schemas.openxmlformats.org/drawingml/2006/main">
@@ -4188,7 +4188,7 @@
           <a:p xmlns:a="http://schemas.openxmlformats.org/drawingml/2006/main">
             <a:r>
               <a:rPr sz="1400"/>
-              <a:t>Bron: Boek 2, editie chat-2026, revisie 21 september 2026; gedrukte pagina 54. https://github.com/meijer1973/4veco-lessen/blob/f2660032cf7e4e3bbab96cf32863d06a38bd74bc/Boek%202%20-%20Kosten%2C%20opbrengsten%2C%20elasticiteit%20en%20surplus/edities/chat-2026/boek/Boek_2_Compleet.pdf</a:t>
+              <a:t>Bron: Boek 2, editie chat-2026, revisie 1 oktober 2026; gedrukte pagina 55. https://github.com/meijer1973/4veco-lessen/blob/a8940a7a79e22857a3e306a91fe923c48c63e716/Boek%202%20-%20Kosten%2C%20opbrengsten%2C%20elasticiteit%20en%20surplus/edities/chat-2026/boek/Boek_2_Compleet.pdf</a:t>
             </a:r>
           </a:p>
           <a:p xmlns:a="http://schemas.openxmlformats.org/drawingml/2006/main">
@@ -4319,7 +4319,7 @@
           <a:p xmlns:a="http://schemas.openxmlformats.org/drawingml/2006/main">
             <a:r>
               <a:rPr sz="1400"/>
-              <a:t>Bron: Boek 2, editie chat-2026, revisie 21 september 2026; gedrukte pagina 55. https://github.com/meijer1973/4veco-lessen/blob/f2660032cf7e4e3bbab96cf32863d06a38bd74bc/Boek%202%20-%20Kosten%2C%20opbrengsten%2C%20elasticiteit%20en%20surplus/edities/chat-2026/boek/Boek_2_Compleet.pdf</a:t>
+              <a:t>Bron: Boek 2, editie chat-2026, revisie 1 oktober 2026; gedrukte pagina 56. https://github.com/meijer1973/4veco-lessen/blob/a8940a7a79e22857a3e306a91fe923c48c63e716/Boek%202%20-%20Kosten%2C%20opbrengsten%2C%20elasticiteit%20en%20surplus/edities/chat-2026/boek/Boek_2_Compleet.pdf</a:t>
             </a:r>
           </a:p>
           <a:p xmlns:a="http://schemas.openxmlformats.org/drawingml/2006/main">
@@ -4399,7 +4399,7 @@
   </p:cSld>
   <p:clrMap bg1="lt1" tx1="dk1" bg2="lt2" tx2="dk2" accent1="accent1" accent2="accent2" accent3="accent3" accent4="accent4" accent5="accent5" accent6="accent6" hlink="hlink" folHlink="folHlink"/>
   <p:sldLayoutIdLst>
-    <p:sldLayoutId xmlns:r="http://schemas.openxmlformats.org/officeDocument/2006/relationships" id="2147483649" r:id="Re2d09fd9d4eb439b"/>
+    <p:sldLayoutId xmlns:r="http://schemas.openxmlformats.org/officeDocument/2006/relationships" id="2147483649" r:id="R46ce843d042a4170"/>
   </p:sldLayoutIdLst>
   <p:txStyles>
     <p:titleStyle>
@@ -4950,7 +4950,7 @@
           <p:cNvPr id="29" name="overview-title">
             <a:extLst xmlns:a="http://schemas.openxmlformats.org/drawingml/2006/main">
               <a:ext uri="{FF2B5EF4-FFF2-40B4-BE49-F238E27FC236}">
-                <a16:creationId xmlns:a16="http://schemas.microsoft.com/office/drawing/2014/main" id="{97DD3329-6506-4F96-B7B0-F01DE33E38F9}"/>
+                <a16:creationId xmlns:a16="http://schemas.microsoft.com/office/drawing/2014/main" id="{F49DAD47-69DC-4A69-AF71-F624408B8760}"/>
               </a:ext>
             </a:extLst>
           </p:cNvPr>
@@ -5030,7 +5030,7 @@
           <p:cNvPr id="2" name="phase">
             <a:extLst xmlns:a="http://schemas.openxmlformats.org/drawingml/2006/main">
               <a:ext uri="{FF2B5EF4-FFF2-40B4-BE49-F238E27FC236}">
-                <a16:creationId xmlns:a16="http://schemas.microsoft.com/office/drawing/2014/main" id="{0CB4C588-5349-4543-BEEB-F24B69F8C8F5}"/>
+                <a16:creationId xmlns:a16="http://schemas.microsoft.com/office/drawing/2014/main" id="{8394C4A6-B5CE-4FE6-A0F3-4361DAB62173}"/>
               </a:ext>
             </a:extLst>
           </p:cNvPr>
@@ -5087,7 +5087,7 @@
           <p:cNvPr id="3" name="">
             <a:extLst xmlns:a="http://schemas.openxmlformats.org/drawingml/2006/main">
               <a:ext uri="{FF2B5EF4-FFF2-40B4-BE49-F238E27FC236}">
-                <a16:creationId xmlns:a16="http://schemas.microsoft.com/office/drawing/2014/main" id="{F3AEDC01-926E-474D-9933-1514B8BF0486}"/>
+                <a16:creationId xmlns:a16="http://schemas.microsoft.com/office/drawing/2014/main" id="{032A5238-DB65-42D1-A174-882059E1BDA1}"/>
               </a:ext>
             </a:extLst>
           </p:cNvPr>
@@ -5116,7 +5116,7 @@
           <p:cNvPr id="4" name="Lesroute">
             <a:extLst xmlns:a="http://schemas.openxmlformats.org/drawingml/2006/main">
               <a:ext uri="{FF2B5EF4-FFF2-40B4-BE49-F238E27FC236}">
-                <a16:creationId xmlns:a16="http://schemas.microsoft.com/office/drawing/2014/main" id="{FB4F811E-7863-42D9-93A6-B77A251020E2}"/>
+                <a16:creationId xmlns:a16="http://schemas.microsoft.com/office/drawing/2014/main" id="{C2EBCFCC-8925-43E5-96EE-A426634CCE0D}"/>
               </a:ext>
             </a:extLst>
           </p:cNvPr>
@@ -5173,7 +5173,7 @@
           <p:cNvPr id="5" name="route-number-1">
             <a:extLst xmlns:a="http://schemas.openxmlformats.org/drawingml/2006/main">
               <a:ext uri="{FF2B5EF4-FFF2-40B4-BE49-F238E27FC236}">
-                <a16:creationId xmlns:a16="http://schemas.microsoft.com/office/drawing/2014/main" id="{ABBD8AAD-9F8E-42F3-9C30-2264443E8AF5}"/>
+                <a16:creationId xmlns:a16="http://schemas.microsoft.com/office/drawing/2014/main" id="{E3163395-D1B7-477A-9745-C3E25D8EA80F}"/>
               </a:ext>
             </a:extLst>
           </p:cNvPr>
@@ -5230,7 +5230,7 @@
           <p:cNvPr id="6" name="route-1">
             <a:extLst xmlns:a="http://schemas.openxmlformats.org/drawingml/2006/main">
               <a:ext uri="{FF2B5EF4-FFF2-40B4-BE49-F238E27FC236}">
-                <a16:creationId xmlns:a16="http://schemas.microsoft.com/office/drawing/2014/main" id="{14D37A37-20CC-4AED-908D-E6C2FE1C0743}"/>
+                <a16:creationId xmlns:a16="http://schemas.microsoft.com/office/drawing/2014/main" id="{ED05E716-67B7-4241-9717-909A65CB988E}"/>
               </a:ext>
             </a:extLst>
           </p:cNvPr>
@@ -5287,7 +5287,7 @@
           <p:cNvPr id="7" name="route-number-2">
             <a:extLst xmlns:a="http://schemas.openxmlformats.org/drawingml/2006/main">
               <a:ext uri="{FF2B5EF4-FFF2-40B4-BE49-F238E27FC236}">
-                <a16:creationId xmlns:a16="http://schemas.microsoft.com/office/drawing/2014/main" id="{5A4B1C7F-B000-455F-A097-E62EEF7749BF}"/>
+                <a16:creationId xmlns:a16="http://schemas.microsoft.com/office/drawing/2014/main" id="{EB893333-A066-49B3-86F9-44955107DE10}"/>
               </a:ext>
             </a:extLst>
           </p:cNvPr>
@@ -5344,7 +5344,7 @@
           <p:cNvPr id="8" name="route-2">
             <a:extLst xmlns:a="http://schemas.openxmlformats.org/drawingml/2006/main">
               <a:ext uri="{FF2B5EF4-FFF2-40B4-BE49-F238E27FC236}">
-                <a16:creationId xmlns:a16="http://schemas.microsoft.com/office/drawing/2014/main" id="{B6B86BBE-E5B2-4E09-8BC4-072B7D4D7BDB}"/>
+                <a16:creationId xmlns:a16="http://schemas.microsoft.com/office/drawing/2014/main" id="{A8EFFD83-E6A9-4B70-869B-C1B58EEAAFD0}"/>
               </a:ext>
             </a:extLst>
           </p:cNvPr>
@@ -5401,7 +5401,7 @@
           <p:cNvPr id="9" name="route-number-3">
             <a:extLst xmlns:a="http://schemas.openxmlformats.org/drawingml/2006/main">
               <a:ext uri="{FF2B5EF4-FFF2-40B4-BE49-F238E27FC236}">
-                <a16:creationId xmlns:a16="http://schemas.microsoft.com/office/drawing/2014/main" id="{EEC42C92-DD12-45B9-BB66-C93F743D77C6}"/>
+                <a16:creationId xmlns:a16="http://schemas.microsoft.com/office/drawing/2014/main" id="{7F9FC34A-D6B4-4CD8-8DE3-A62C7DDEC74F}"/>
               </a:ext>
             </a:extLst>
           </p:cNvPr>
@@ -5458,7 +5458,7 @@
           <p:cNvPr id="10" name="route-3">
             <a:extLst xmlns:a="http://schemas.openxmlformats.org/drawingml/2006/main">
               <a:ext uri="{FF2B5EF4-FFF2-40B4-BE49-F238E27FC236}">
-                <a16:creationId xmlns:a16="http://schemas.microsoft.com/office/drawing/2014/main" id="{6A32F770-A3F6-447D-AA62-407DCBAA410C}"/>
+                <a16:creationId xmlns:a16="http://schemas.microsoft.com/office/drawing/2014/main" id="{9A8E19AF-59DA-488D-9B7B-7AB0DE5DB7EE}"/>
               </a:ext>
             </a:extLst>
           </p:cNvPr>
@@ -5515,7 +5515,7 @@
           <p:cNvPr id="11" name="route-number-4">
             <a:extLst xmlns:a="http://schemas.openxmlformats.org/drawingml/2006/main">
               <a:ext uri="{FF2B5EF4-FFF2-40B4-BE49-F238E27FC236}">
-                <a16:creationId xmlns:a16="http://schemas.microsoft.com/office/drawing/2014/main" id="{023E2F06-DDEB-40D2-96A3-8E184A4DDB33}"/>
+                <a16:creationId xmlns:a16="http://schemas.microsoft.com/office/drawing/2014/main" id="{23291408-F472-447C-A12A-5A77D602CB84}"/>
               </a:ext>
             </a:extLst>
           </p:cNvPr>
@@ -5572,7 +5572,7 @@
           <p:cNvPr id="12" name="route-4">
             <a:extLst xmlns:a="http://schemas.openxmlformats.org/drawingml/2006/main">
               <a:ext uri="{FF2B5EF4-FFF2-40B4-BE49-F238E27FC236}">
-                <a16:creationId xmlns:a16="http://schemas.microsoft.com/office/drawing/2014/main" id="{EFB651F0-36B2-43F9-88BD-790BD8BA2D16}"/>
+                <a16:creationId xmlns:a16="http://schemas.microsoft.com/office/drawing/2014/main" id="{73B0D8FC-A209-4E07-BD47-75261589182B}"/>
               </a:ext>
             </a:extLst>
           </p:cNvPr>
@@ -5629,7 +5629,7 @@
           <p:cNvPr id="13" name="route-number-5">
             <a:extLst xmlns:a="http://schemas.openxmlformats.org/drawingml/2006/main">
               <a:ext uri="{FF2B5EF4-FFF2-40B4-BE49-F238E27FC236}">
-                <a16:creationId xmlns:a16="http://schemas.microsoft.com/office/drawing/2014/main" id="{ADA72F56-00F5-417A-80D4-8407894B53AF}"/>
+                <a16:creationId xmlns:a16="http://schemas.microsoft.com/office/drawing/2014/main" id="{FC1BE97B-AD9B-4A67-BB94-0BA4BA754811}"/>
               </a:ext>
             </a:extLst>
           </p:cNvPr>
@@ -5686,7 +5686,7 @@
           <p:cNvPr id="14" name="route-5">
             <a:extLst xmlns:a="http://schemas.openxmlformats.org/drawingml/2006/main">
               <a:ext uri="{FF2B5EF4-FFF2-40B4-BE49-F238E27FC236}">
-                <a16:creationId xmlns:a16="http://schemas.microsoft.com/office/drawing/2014/main" id="{7153224E-9E2C-46CD-ADBB-D44E69387239}"/>
+                <a16:creationId xmlns:a16="http://schemas.microsoft.com/office/drawing/2014/main" id="{DFAAECDD-C753-4AC9-978A-8707F38084B4}"/>
               </a:ext>
             </a:extLst>
           </p:cNvPr>
@@ -5743,7 +5743,7 @@
           <p:cNvPr id="15" name="route-number-6">
             <a:extLst xmlns:a="http://schemas.openxmlformats.org/drawingml/2006/main">
               <a:ext uri="{FF2B5EF4-FFF2-40B4-BE49-F238E27FC236}">
-                <a16:creationId xmlns:a16="http://schemas.microsoft.com/office/drawing/2014/main" id="{0A16AEED-2B2C-4763-88DD-A7131CFBF9F5}"/>
+                <a16:creationId xmlns:a16="http://schemas.microsoft.com/office/drawing/2014/main" id="{6C9BF6E9-82EC-4B5A-873E-0B6BBB1266DA}"/>
               </a:ext>
             </a:extLst>
           </p:cNvPr>
@@ -5800,7 +5800,7 @@
           <p:cNvPr id="16" name="route-6">
             <a:extLst xmlns:a="http://schemas.openxmlformats.org/drawingml/2006/main">
               <a:ext uri="{FF2B5EF4-FFF2-40B4-BE49-F238E27FC236}">
-                <a16:creationId xmlns:a16="http://schemas.microsoft.com/office/drawing/2014/main" id="{1608DD4A-183F-4F9C-B5BE-FB317B7645AB}"/>
+                <a16:creationId xmlns:a16="http://schemas.microsoft.com/office/drawing/2014/main" id="{EE8AED73-CB63-4245-8B89-674601A563BD}"/>
               </a:ext>
             </a:extLst>
           </p:cNvPr>
@@ -5857,7 +5857,7 @@
           <p:cNvPr id="17" name="route-number-7">
             <a:extLst xmlns:a="http://schemas.openxmlformats.org/drawingml/2006/main">
               <a:ext uri="{FF2B5EF4-FFF2-40B4-BE49-F238E27FC236}">
-                <a16:creationId xmlns:a16="http://schemas.microsoft.com/office/drawing/2014/main" id="{E653C7E1-388D-4317-BC3F-72CE434CA6A2}"/>
+                <a16:creationId xmlns:a16="http://schemas.microsoft.com/office/drawing/2014/main" id="{7349837C-F767-4DE9-9899-13A42E8D47DC}"/>
               </a:ext>
             </a:extLst>
           </p:cNvPr>
@@ -5914,7 +5914,7 @@
           <p:cNvPr id="18" name="route-7">
             <a:extLst xmlns:a="http://schemas.openxmlformats.org/drawingml/2006/main">
               <a:ext uri="{FF2B5EF4-FFF2-40B4-BE49-F238E27FC236}">
-                <a16:creationId xmlns:a16="http://schemas.microsoft.com/office/drawing/2014/main" id="{512CA37C-D4E1-4FBC-BFFD-F90B24CC1A92}"/>
+                <a16:creationId xmlns:a16="http://schemas.microsoft.com/office/drawing/2014/main" id="{7F775B70-321F-4C33-996E-128BD5461E6F}"/>
               </a:ext>
             </a:extLst>
           </p:cNvPr>
@@ -5971,7 +5971,7 @@
           <p:cNvPr id="19" name="Lesdoelen">
             <a:extLst xmlns:a="http://schemas.openxmlformats.org/drawingml/2006/main">
               <a:ext uri="{FF2B5EF4-FFF2-40B4-BE49-F238E27FC236}">
-                <a16:creationId xmlns:a16="http://schemas.microsoft.com/office/drawing/2014/main" id="{26561E31-48F2-4639-AB1F-1DC89ED01068}"/>
+                <a16:creationId xmlns:a16="http://schemas.microsoft.com/office/drawing/2014/main" id="{FEBDCA48-3E65-4289-BE28-5DFFF2538A5E}"/>
               </a:ext>
             </a:extLst>
           </p:cNvPr>
@@ -6028,7 +6028,7 @@
           <p:cNvPr id="20" name="overview-goals">
             <a:extLst xmlns:a="http://schemas.openxmlformats.org/drawingml/2006/main">
               <a:ext uri="{FF2B5EF4-FFF2-40B4-BE49-F238E27FC236}">
-                <a16:creationId xmlns:a16="http://schemas.microsoft.com/office/drawing/2014/main" id="{9C0D2AB1-A2A8-4555-899A-E6A0B639C9EF}"/>
+                <a16:creationId xmlns:a16="http://schemas.microsoft.com/office/drawing/2014/main" id="{AA582FE1-5FD7-4A12-8E80-2882323A15B1}"/>
               </a:ext>
             </a:extLst>
           </p:cNvPr>
@@ -6131,7 +6131,7 @@
           <p:cNvPr id="21" name="">
             <a:extLst xmlns:a="http://schemas.openxmlformats.org/drawingml/2006/main">
               <a:ext uri="{FF2B5EF4-FFF2-40B4-BE49-F238E27FC236}">
-                <a16:creationId xmlns:a16="http://schemas.microsoft.com/office/drawing/2014/main" id="{5B77F881-D807-425D-95B7-76A3DB15F381}"/>
+                <a16:creationId xmlns:a16="http://schemas.microsoft.com/office/drawing/2014/main" id="{5D9B3CF9-180D-4CE6-B617-6B147AB794C1}"/>
               </a:ext>
             </a:extLst>
           </p:cNvPr>
@@ -6157,10 +6157,10 @@
       </p:sp>
       <p:sp>
         <p:nvSpPr>
-          <p:cNvPr id="22" name="Startopdracht · pagina 59">
-            <a:extLst xmlns:a="http://schemas.openxmlformats.org/drawingml/2006/main">
-              <a:ext uri="{FF2B5EF4-FFF2-40B4-BE49-F238E27FC236}">
-                <a16:creationId xmlns:a16="http://schemas.microsoft.com/office/drawing/2014/main" id="{EE7C8830-0D55-4D35-BCBF-1052F847ED49}"/>
+          <p:cNvPr id="22" name="Startopdracht · pagina 60">
+            <a:extLst xmlns:a="http://schemas.openxmlformats.org/drawingml/2006/main">
+              <a:ext uri="{FF2B5EF4-FFF2-40B4-BE49-F238E27FC236}">
+                <a16:creationId xmlns:a16="http://schemas.microsoft.com/office/drawing/2014/main" id="{57DF7698-2469-4411-AAE0-B0828A5F6CC9}"/>
               </a:ext>
             </a:extLst>
           </p:cNvPr>
@@ -6207,7 +6207,7 @@
                 <a:ea typeface="Arial"/>
                 <a:cs typeface="Arial"/>
               </a:rPr>
-              <a:t>Startopdracht · pagina 59</a:t>
+              <a:t>Startopdracht · pagina 60</a:t>
             </a:r>
           </a:p>
         </p:txBody>
@@ -6217,7 +6217,7 @@
           <p:cNvPr id="23" name="overview-start">
             <a:extLst xmlns:a="http://schemas.openxmlformats.org/drawingml/2006/main">
               <a:ext uri="{FF2B5EF4-FFF2-40B4-BE49-F238E27FC236}">
-                <a16:creationId xmlns:a16="http://schemas.microsoft.com/office/drawing/2014/main" id="{C6E75305-6C99-4747-8AC5-18E7D6A42BE5}"/>
+                <a16:creationId xmlns:a16="http://schemas.microsoft.com/office/drawing/2014/main" id="{C1C68613-95B1-4AC9-B5A4-007F6AC9F450}"/>
               </a:ext>
             </a:extLst>
           </p:cNvPr>
@@ -6310,7 +6310,7 @@
                 <a:ea typeface="Arial"/>
                 <a:cs typeface="Arial"/>
               </a:rPr>
-              <a:t>de theorie, p. 53–56</a:t>
+              <a:t>de theorie, p. 54–57</a:t>
             </a:r>
           </a:p>
         </p:txBody>
@@ -6320,7 +6320,7 @@
           <p:cNvPr id="24" name="">
             <a:extLst xmlns:a="http://schemas.openxmlformats.org/drawingml/2006/main">
               <a:ext uri="{FF2B5EF4-FFF2-40B4-BE49-F238E27FC236}">
-                <a16:creationId xmlns:a16="http://schemas.microsoft.com/office/drawing/2014/main" id="{06A008FC-4015-4359-AE81-84E1106B3026}"/>
+                <a16:creationId xmlns:a16="http://schemas.microsoft.com/office/drawing/2014/main" id="{76BB9D1E-7F52-4279-9E52-3E07CB53FE59}"/>
               </a:ext>
             </a:extLst>
           </p:cNvPr>
@@ -6349,7 +6349,7 @@
           <p:cNvPr id="25" name="Huiswerk">
             <a:extLst xmlns:a="http://schemas.openxmlformats.org/drawingml/2006/main">
               <a:ext uri="{FF2B5EF4-FFF2-40B4-BE49-F238E27FC236}">
-                <a16:creationId xmlns:a16="http://schemas.microsoft.com/office/drawing/2014/main" id="{6D45093F-EF1A-4C0E-9F64-92D9ED05B72C}"/>
+                <a16:creationId xmlns:a16="http://schemas.microsoft.com/office/drawing/2014/main" id="{BA28BD2F-D242-41D4-866C-A4ED53914A67}"/>
               </a:ext>
             </a:extLst>
           </p:cNvPr>
@@ -6406,7 +6406,7 @@
           <p:cNvPr id="26" name="overview-homework">
             <a:extLst xmlns:a="http://schemas.openxmlformats.org/drawingml/2006/main">
               <a:ext uri="{FF2B5EF4-FFF2-40B4-BE49-F238E27FC236}">
-                <a16:creationId xmlns:a16="http://schemas.microsoft.com/office/drawing/2014/main" id="{75ADB6B8-4279-49D3-8AD4-6E0E573A0C2B}"/>
+                <a16:creationId xmlns:a16="http://schemas.microsoft.com/office/drawing/2014/main" id="{B90B52FB-F8D2-4C05-9518-93F3FC4DBD3E}"/>
               </a:ext>
             </a:extLst>
           </p:cNvPr>
@@ -6532,7 +6532,7 @@
           <p:cNvPr id="27" name="footer">
             <a:extLst xmlns:a="http://schemas.openxmlformats.org/drawingml/2006/main">
               <a:ext uri="{FF2B5EF4-FFF2-40B4-BE49-F238E27FC236}">
-                <a16:creationId xmlns:a16="http://schemas.microsoft.com/office/drawing/2014/main" id="{A5A137FA-F36D-4509-A823-40A0504F19AD}"/>
+                <a16:creationId xmlns:a16="http://schemas.microsoft.com/office/drawing/2014/main" id="{0B73D0B9-6878-4CA5-A7CB-CCED14FDFC1F}"/>
               </a:ext>
             </a:extLst>
           </p:cNvPr>
@@ -6589,7 +6589,7 @@
           <p:cNvPr id="28" name="slide-number">
             <a:extLst xmlns:a="http://schemas.openxmlformats.org/drawingml/2006/main">
               <a:ext uri="{FF2B5EF4-FFF2-40B4-BE49-F238E27FC236}">
-                <a16:creationId xmlns:a16="http://schemas.microsoft.com/office/drawing/2014/main" id="{068ACA9E-47A7-4813-89DE-B1637285E337}"/>
+                <a16:creationId xmlns:a16="http://schemas.microsoft.com/office/drawing/2014/main" id="{A7266069-04D3-4A65-AFDD-806C76A4F49D}"/>
               </a:ext>
             </a:extLst>
           </p:cNvPr>
@@ -6644,7 +6644,7 @@
     </p:spTree>
     <p:extLst>
       <p:ext uri="{BB962C8B-B14F-4D97-AF65-F5344CB8AC3E}">
-        <p14:creationId xmlns:p14="http://schemas.microsoft.com/office/powerpoint/2010/main" val="118729531"/>
+        <p14:creationId xmlns:p14="http://schemas.microsoft.com/office/powerpoint/2010/main" val="1873163165"/>
       </p:ext>
     </p:extLst>
   </p:cSld>
@@ -6675,7 +6675,7 @@
           <p:cNvPr id="10" name="LeesClub X · De beginhoeveelheid">
             <a:extLst xmlns:a="http://schemas.openxmlformats.org/drawingml/2006/main">
               <a:ext uri="{FF2B5EF4-FFF2-40B4-BE49-F238E27FC236}">
-                <a16:creationId xmlns:a16="http://schemas.microsoft.com/office/drawing/2014/main" id="{C0A543A6-9144-4BA1-8527-B00C0901EBC7}"/>
+                <a16:creationId xmlns:a16="http://schemas.microsoft.com/office/drawing/2014/main" id="{ADECAECD-3D77-4860-829B-1C6688B89E59}"/>
               </a:ext>
             </a:extLst>
           </p:cNvPr>
@@ -6732,7 +6732,7 @@
           <p:cNvPr id="2" name="">
             <a:extLst xmlns:a="http://schemas.openxmlformats.org/drawingml/2006/main">
               <a:ext uri="{FF2B5EF4-FFF2-40B4-BE49-F238E27FC236}">
-                <a16:creationId xmlns:a16="http://schemas.microsoft.com/office/drawing/2014/main" id="{74B7370B-84F0-4725-8713-56AFCC9589F1}"/>
+                <a16:creationId xmlns:a16="http://schemas.microsoft.com/office/drawing/2014/main" id="{C9920A26-0C66-47EF-84D9-EE727BF548FF}"/>
               </a:ext>
             </a:extLst>
           </p:cNvPr>
@@ -6761,7 +6761,7 @@
           <p:cNvPr id="3" name="footer">
             <a:extLst xmlns:a="http://schemas.openxmlformats.org/drawingml/2006/main">
               <a:ext uri="{FF2B5EF4-FFF2-40B4-BE49-F238E27FC236}">
-                <a16:creationId xmlns:a16="http://schemas.microsoft.com/office/drawing/2014/main" id="{1A371E38-783A-4621-AF34-24D1CF5F70ED}"/>
+                <a16:creationId xmlns:a16="http://schemas.microsoft.com/office/drawing/2014/main" id="{47E8E556-F65C-43E7-9B21-B66878F664C8}"/>
               </a:ext>
             </a:extLst>
           </p:cNvPr>
@@ -6818,7 +6818,7 @@
           <p:cNvPr id="4" name="slide-number">
             <a:extLst xmlns:a="http://schemas.openxmlformats.org/drawingml/2006/main">
               <a:ext uri="{FF2B5EF4-FFF2-40B4-BE49-F238E27FC236}">
-                <a16:creationId xmlns:a16="http://schemas.microsoft.com/office/drawing/2014/main" id="{15E7F870-41D1-4F26-A3BA-DFA192A8F4C3}"/>
+                <a16:creationId xmlns:a16="http://schemas.microsoft.com/office/drawing/2014/main" id="{A25487D8-7E92-4EE8-9139-3745505DE498}"/>
               </a:ext>
             </a:extLst>
           </p:cNvPr>
@@ -6875,7 +6875,7 @@
           <p:cNvPr id="5" name="Uitlegvoorbeeld — niet uit het boek">
             <a:extLst xmlns:a="http://schemas.openxmlformats.org/drawingml/2006/main">
               <a:ext uri="{FF2B5EF4-FFF2-40B4-BE49-F238E27FC236}">
-                <a16:creationId xmlns:a16="http://schemas.microsoft.com/office/drawing/2014/main" id="{7B80BDCB-CDE5-4BB2-84D5-8154D689FAE2}"/>
+                <a16:creationId xmlns:a16="http://schemas.microsoft.com/office/drawing/2014/main" id="{21631100-6C9A-4569-BF09-0D5CC0A0DE4B}"/>
               </a:ext>
             </a:extLst>
           </p:cNvPr>
@@ -6932,7 +6932,7 @@
           <p:cNvPr id="6" name="Px = 15 · Pz = 20 · Y = 26.000">
             <a:extLst xmlns:a="http://schemas.openxmlformats.org/drawingml/2006/main">
               <a:ext uri="{FF2B5EF4-FFF2-40B4-BE49-F238E27FC236}">
-                <a16:creationId xmlns:a16="http://schemas.microsoft.com/office/drawing/2014/main" id="{BFA1DC86-06AC-44DD-9D90-C31B5E746450}"/>
+                <a16:creationId xmlns:a16="http://schemas.microsoft.com/office/drawing/2014/main" id="{D3F8DFF5-3C7B-4FCF-9084-B18FA4527FFA}"/>
               </a:ext>
             </a:extLst>
           </p:cNvPr>
@@ -6989,7 +6989,7 @@
           <p:cNvPr id="7" name="Qx = 160 − 4 × 15 + 2 × 20 + 0,01 × 26.000">
             <a:extLst xmlns:a="http://schemas.openxmlformats.org/drawingml/2006/main">
               <a:ext uri="{FF2B5EF4-FFF2-40B4-BE49-F238E27FC236}">
-                <a16:creationId xmlns:a16="http://schemas.microsoft.com/office/drawing/2014/main" id="{20607FDE-265C-45A9-97F5-4B8996514FC7}"/>
+                <a16:creationId xmlns:a16="http://schemas.microsoft.com/office/drawing/2014/main" id="{D0400AF1-48BC-4B5F-BF6D-35593644803A}"/>
               </a:ext>
             </a:extLst>
           </p:cNvPr>
@@ -7046,7 +7046,7 @@
           <p:cNvPr id="8" name="Qx = 160 − 60 + 40 + 260">
             <a:extLst xmlns:a="http://schemas.openxmlformats.org/drawingml/2006/main">
               <a:ext uri="{FF2B5EF4-FFF2-40B4-BE49-F238E27FC236}">
-                <a16:creationId xmlns:a16="http://schemas.microsoft.com/office/drawing/2014/main" id="{7F400413-2A5B-4D03-851E-C0E01070916A}"/>
+                <a16:creationId xmlns:a16="http://schemas.microsoft.com/office/drawing/2014/main" id="{EC1AEBFE-023E-4EBD-BD4F-67032CCB3009}"/>
               </a:ext>
             </a:extLst>
           </p:cNvPr>
@@ -7103,7 +7103,7 @@
           <p:cNvPr id="9" name="Qx = 400 abonnementen per maand">
             <a:extLst xmlns:a="http://schemas.openxmlformats.org/drawingml/2006/main">
               <a:ext uri="{FF2B5EF4-FFF2-40B4-BE49-F238E27FC236}">
-                <a16:creationId xmlns:a16="http://schemas.microsoft.com/office/drawing/2014/main" id="{76E2D875-422A-48C6-BFB9-6D2C7A5BF414}"/>
+                <a16:creationId xmlns:a16="http://schemas.microsoft.com/office/drawing/2014/main" id="{A52977F4-F7A8-4E71-A002-974B0CBD9391}"/>
               </a:ext>
             </a:extLst>
           </p:cNvPr>
@@ -7158,7 +7158,7 @@
     </p:spTree>
     <p:extLst>
       <p:ext uri="{BB962C8B-B14F-4D97-AF65-F5344CB8AC3E}">
-        <p14:creationId xmlns:p14="http://schemas.microsoft.com/office/powerpoint/2010/main" val="355251419"/>
+        <p14:creationId xmlns:p14="http://schemas.microsoft.com/office/powerpoint/2010/main" val="1181938200"/>
       </p:ext>
     </p:extLst>
   </p:cSld>
@@ -7189,7 +7189,7 @@
           <p:cNvPr id="10" name="LeesClub X · Alleen het inkomen verandert">
             <a:extLst xmlns:a="http://schemas.openxmlformats.org/drawingml/2006/main">
               <a:ext uri="{FF2B5EF4-FFF2-40B4-BE49-F238E27FC236}">
-                <a16:creationId xmlns:a16="http://schemas.microsoft.com/office/drawing/2014/main" id="{318FA6DD-F859-4BAE-99D9-36C324923E7E}"/>
+                <a16:creationId xmlns:a16="http://schemas.microsoft.com/office/drawing/2014/main" id="{F77A57DD-BB5C-4119-9DC4-0C9AFCC54278}"/>
               </a:ext>
             </a:extLst>
           </p:cNvPr>
@@ -7246,7 +7246,7 @@
           <p:cNvPr id="2" name="">
             <a:extLst xmlns:a="http://schemas.openxmlformats.org/drawingml/2006/main">
               <a:ext uri="{FF2B5EF4-FFF2-40B4-BE49-F238E27FC236}">
-                <a16:creationId xmlns:a16="http://schemas.microsoft.com/office/drawing/2014/main" id="{35A0A90F-3D89-4F66-AC96-78426A19C381}"/>
+                <a16:creationId xmlns:a16="http://schemas.microsoft.com/office/drawing/2014/main" id="{CFEB16B7-B117-45A9-BB3B-B0C8BC8A0D72}"/>
               </a:ext>
             </a:extLst>
           </p:cNvPr>
@@ -7275,7 +7275,7 @@
           <p:cNvPr id="3" name="footer">
             <a:extLst xmlns:a="http://schemas.openxmlformats.org/drawingml/2006/main">
               <a:ext uri="{FF2B5EF4-FFF2-40B4-BE49-F238E27FC236}">
-                <a16:creationId xmlns:a16="http://schemas.microsoft.com/office/drawing/2014/main" id="{1E545B89-2227-424C-80FD-F058E71063B6}"/>
+                <a16:creationId xmlns:a16="http://schemas.microsoft.com/office/drawing/2014/main" id="{23196BC9-127F-47C9-AC87-C9E547A9FD14}"/>
               </a:ext>
             </a:extLst>
           </p:cNvPr>
@@ -7332,7 +7332,7 @@
           <p:cNvPr id="4" name="slide-number">
             <a:extLst xmlns:a="http://schemas.openxmlformats.org/drawingml/2006/main">
               <a:ext uri="{FF2B5EF4-FFF2-40B4-BE49-F238E27FC236}">
-                <a16:creationId xmlns:a16="http://schemas.microsoft.com/office/drawing/2014/main" id="{5431E8AC-20B4-4682-85E9-8E2818197C44}"/>
+                <a16:creationId xmlns:a16="http://schemas.microsoft.com/office/drawing/2014/main" id="{02460407-4724-4D5B-818E-C0E8C804AF23}"/>
               </a:ext>
             </a:extLst>
           </p:cNvPr>
@@ -7389,7 +7389,7 @@
           <p:cNvPr id="5" name="Uitlegvoorbeeld — niet uit het boek">
             <a:extLst xmlns:a="http://schemas.openxmlformats.org/drawingml/2006/main">
               <a:ext uri="{FF2B5EF4-FFF2-40B4-BE49-F238E27FC236}">
-                <a16:creationId xmlns:a16="http://schemas.microsoft.com/office/drawing/2014/main" id="{771CE15B-46FE-49B1-82F7-3FEC2692C6E1}"/>
+                <a16:creationId xmlns:a16="http://schemas.microsoft.com/office/drawing/2014/main" id="{113CFE44-B718-4551-8E85-418D12AEF1E6}"/>
               </a:ext>
             </a:extLst>
           </p:cNvPr>
@@ -7764,7 +7764,7 @@
           <p:cNvPr id="7" name="Qx nieuw = 160 − 4 × 15 + 2 × 20 + 0,01 × 28.600">
             <a:extLst xmlns:a="http://schemas.openxmlformats.org/drawingml/2006/main">
               <a:ext uri="{FF2B5EF4-FFF2-40B4-BE49-F238E27FC236}">
-                <a16:creationId xmlns:a16="http://schemas.microsoft.com/office/drawing/2014/main" id="{B1DF3780-5C61-42EF-AE73-E65081FAF803}"/>
+                <a16:creationId xmlns:a16="http://schemas.microsoft.com/office/drawing/2014/main" id="{64B8C938-A848-490C-B904-D04DD8081AB4}"/>
               </a:ext>
             </a:extLst>
           </p:cNvPr>
@@ -7821,7 +7821,7 @@
           <p:cNvPr id="8" name="= 160 − 60 + 40 + 286 = 426">
             <a:extLst xmlns:a="http://schemas.openxmlformats.org/drawingml/2006/main">
               <a:ext uri="{FF2B5EF4-FFF2-40B4-BE49-F238E27FC236}">
-                <a16:creationId xmlns:a16="http://schemas.microsoft.com/office/drawing/2014/main" id="{52B6A62B-DDB2-404C-9065-9C100F41DB9E}"/>
+                <a16:creationId xmlns:a16="http://schemas.microsoft.com/office/drawing/2014/main" id="{870A39B0-69AF-46C5-B341-FF720C599BD1}"/>
               </a:ext>
             </a:extLst>
           </p:cNvPr>
@@ -7878,7 +7878,7 @@
           <p:cNvPr id="9" name="426 abonnementen per maand · Px en Pz blijven gelijk">
             <a:extLst xmlns:a="http://schemas.openxmlformats.org/drawingml/2006/main">
               <a:ext uri="{FF2B5EF4-FFF2-40B4-BE49-F238E27FC236}">
-                <a16:creationId xmlns:a16="http://schemas.microsoft.com/office/drawing/2014/main" id="{2F4CC547-37FC-44D2-BFED-8188B2DB0451}"/>
+                <a16:creationId xmlns:a16="http://schemas.microsoft.com/office/drawing/2014/main" id="{19FD9804-5304-4A20-B920-B31CADC9772C}"/>
               </a:ext>
             </a:extLst>
           </p:cNvPr>
@@ -7933,7 +7933,7 @@
     </p:spTree>
     <p:extLst>
       <p:ext uri="{BB962C8B-B14F-4D97-AF65-F5344CB8AC3E}">
-        <p14:creationId xmlns:p14="http://schemas.microsoft.com/office/powerpoint/2010/main" val="1322378893"/>
+        <p14:creationId xmlns:p14="http://schemas.microsoft.com/office/powerpoint/2010/main" val="1774552334"/>
       </p:ext>
     </p:extLst>
   </p:cSld>
@@ -7964,7 +7964,7 @@
           <p:cNvPr id="10" name="LeesClub X · Van hoeveelheden naar Ei">
             <a:extLst xmlns:a="http://schemas.openxmlformats.org/drawingml/2006/main">
               <a:ext uri="{FF2B5EF4-FFF2-40B4-BE49-F238E27FC236}">
-                <a16:creationId xmlns:a16="http://schemas.microsoft.com/office/drawing/2014/main" id="{D734429D-7FD8-4C58-8992-7351A32F1C96}"/>
+                <a16:creationId xmlns:a16="http://schemas.microsoft.com/office/drawing/2014/main" id="{2C40221E-4E01-4BF4-89FD-F095FCA1D46C}"/>
               </a:ext>
             </a:extLst>
           </p:cNvPr>
@@ -8021,7 +8021,7 @@
           <p:cNvPr id="2" name="">
             <a:extLst xmlns:a="http://schemas.openxmlformats.org/drawingml/2006/main">
               <a:ext uri="{FF2B5EF4-FFF2-40B4-BE49-F238E27FC236}">
-                <a16:creationId xmlns:a16="http://schemas.microsoft.com/office/drawing/2014/main" id="{2994AA8B-0E15-4BF9-809E-EAD895F7C469}"/>
+                <a16:creationId xmlns:a16="http://schemas.microsoft.com/office/drawing/2014/main" id="{F5DCFA98-D1B9-47D1-A2D1-9ECFA9AB2DB7}"/>
               </a:ext>
             </a:extLst>
           </p:cNvPr>
@@ -8050,7 +8050,7 @@
           <p:cNvPr id="3" name="footer">
             <a:extLst xmlns:a="http://schemas.openxmlformats.org/drawingml/2006/main">
               <a:ext uri="{FF2B5EF4-FFF2-40B4-BE49-F238E27FC236}">
-                <a16:creationId xmlns:a16="http://schemas.microsoft.com/office/drawing/2014/main" id="{C9BB687C-C746-4806-B24F-3AF575F4EE64}"/>
+                <a16:creationId xmlns:a16="http://schemas.microsoft.com/office/drawing/2014/main" id="{007C5C2D-E361-474B-93B4-A5A1E277213B}"/>
               </a:ext>
             </a:extLst>
           </p:cNvPr>
@@ -8107,7 +8107,7 @@
           <p:cNvPr id="4" name="slide-number">
             <a:extLst xmlns:a="http://schemas.openxmlformats.org/drawingml/2006/main">
               <a:ext uri="{FF2B5EF4-FFF2-40B4-BE49-F238E27FC236}">
-                <a16:creationId xmlns:a16="http://schemas.microsoft.com/office/drawing/2014/main" id="{404D7DB1-6053-448C-B05D-68C266EA6866}"/>
+                <a16:creationId xmlns:a16="http://schemas.microsoft.com/office/drawing/2014/main" id="{D7357DD6-F145-46B6-BC5B-4A19E7260097}"/>
               </a:ext>
             </a:extLst>
           </p:cNvPr>
@@ -8164,7 +8164,7 @@
           <p:cNvPr id="5" name="Uitlegvoorbeeld — niet uit het boek">
             <a:extLst xmlns:a="http://schemas.openxmlformats.org/drawingml/2006/main">
               <a:ext uri="{FF2B5EF4-FFF2-40B4-BE49-F238E27FC236}">
-                <a16:creationId xmlns:a16="http://schemas.microsoft.com/office/drawing/2014/main" id="{42A053F9-CBA6-4CD0-85AB-209C3DC3F3AC}"/>
+                <a16:creationId xmlns:a16="http://schemas.microsoft.com/office/drawing/2014/main" id="{D892B9AD-93FC-4D35-9061-CD47B58582BC}"/>
               </a:ext>
             </a:extLst>
           </p:cNvPr>
@@ -8221,7 +8221,7 @@
           <p:cNvPr id="6" name="%ΔQx = (426 − 400) / 400 × 100% = +6,5%">
             <a:extLst xmlns:a="http://schemas.openxmlformats.org/drawingml/2006/main">
               <a:ext uri="{FF2B5EF4-FFF2-40B4-BE49-F238E27FC236}">
-                <a16:creationId xmlns:a16="http://schemas.microsoft.com/office/drawing/2014/main" id="{9B1D3F4E-EC6B-4CE8-8425-79899ECC194A}"/>
+                <a16:creationId xmlns:a16="http://schemas.microsoft.com/office/drawing/2014/main" id="{9D2A3117-FA95-42CF-81BF-EDEAAC19114F}"/>
               </a:ext>
             </a:extLst>
           </p:cNvPr>
@@ -8278,7 +8278,7 @@
           <p:cNvPr id="7" name="%ΔY = (28.600 − 26.000) / 26.000 × 100% = +10%">
             <a:extLst xmlns:a="http://schemas.openxmlformats.org/drawingml/2006/main">
               <a:ext uri="{FF2B5EF4-FFF2-40B4-BE49-F238E27FC236}">
-                <a16:creationId xmlns:a16="http://schemas.microsoft.com/office/drawing/2014/main" id="{CD607618-F2AE-4ACF-B3F6-775276154732}"/>
+                <a16:creationId xmlns:a16="http://schemas.microsoft.com/office/drawing/2014/main" id="{DD300E47-7BF1-4480-A36A-6772EF6ACB93}"/>
               </a:ext>
             </a:extLst>
           </p:cNvPr>
@@ -8335,7 +8335,7 @@
           <p:cNvPr id="8" name="Ei = +6,5% / +10% = +0,65">
             <a:extLst xmlns:a="http://schemas.openxmlformats.org/drawingml/2006/main">
               <a:ext uri="{FF2B5EF4-FFF2-40B4-BE49-F238E27FC236}">
-                <a16:creationId xmlns:a16="http://schemas.microsoft.com/office/drawing/2014/main" id="{33D1880D-6A3F-4B0A-8598-06A21C3889C8}"/>
+                <a16:creationId xmlns:a16="http://schemas.microsoft.com/office/drawing/2014/main" id="{269BB260-DE71-451B-A56F-006994538DAD}"/>
               </a:ext>
             </a:extLst>
           </p:cNvPr>
@@ -8392,7 +8392,7 @@
           <p:cNvPr id="9" name="0 &lt; Ei &lt; 1 → normaal goed in deze situatie">
             <a:extLst xmlns:a="http://schemas.openxmlformats.org/drawingml/2006/main">
               <a:ext uri="{FF2B5EF4-FFF2-40B4-BE49-F238E27FC236}">
-                <a16:creationId xmlns:a16="http://schemas.microsoft.com/office/drawing/2014/main" id="{CE44FB45-B988-4D8C-830B-AAB0403EE774}"/>
+                <a16:creationId xmlns:a16="http://schemas.microsoft.com/office/drawing/2014/main" id="{E6D3B628-E00F-444C-98EA-657A521D6E88}"/>
               </a:ext>
             </a:extLst>
           </p:cNvPr>
@@ -8447,7 +8447,7 @@
     </p:spTree>
     <p:extLst>
       <p:ext uri="{BB962C8B-B14F-4D97-AF65-F5344CB8AC3E}">
-        <p14:creationId xmlns:p14="http://schemas.microsoft.com/office/powerpoint/2010/main" val="1715287162"/>
+        <p14:creationId xmlns:p14="http://schemas.microsoft.com/office/powerpoint/2010/main" val="82027862"/>
       </p:ext>
     </p:extLst>
   </p:cSld>
@@ -8478,7 +8478,7 @@
           <p:cNvPr id="9" name="LeesClub X · Terug naar het begin">
             <a:extLst xmlns:a="http://schemas.openxmlformats.org/drawingml/2006/main">
               <a:ext uri="{FF2B5EF4-FFF2-40B4-BE49-F238E27FC236}">
-                <a16:creationId xmlns:a16="http://schemas.microsoft.com/office/drawing/2014/main" id="{C2C01F13-1218-4995-A8E7-B653AC71E75F}"/>
+                <a16:creationId xmlns:a16="http://schemas.microsoft.com/office/drawing/2014/main" id="{DC202D88-DD0B-4B14-8453-F5B6FD8F2000}"/>
               </a:ext>
             </a:extLst>
           </p:cNvPr>
@@ -8535,7 +8535,7 @@
           <p:cNvPr id="2" name="">
             <a:extLst xmlns:a="http://schemas.openxmlformats.org/drawingml/2006/main">
               <a:ext uri="{FF2B5EF4-FFF2-40B4-BE49-F238E27FC236}">
-                <a16:creationId xmlns:a16="http://schemas.microsoft.com/office/drawing/2014/main" id="{D394C583-28F8-4623-9124-CEF762C68FF6}"/>
+                <a16:creationId xmlns:a16="http://schemas.microsoft.com/office/drawing/2014/main" id="{003551A9-084E-4E17-9950-A4A03D0C0D75}"/>
               </a:ext>
             </a:extLst>
           </p:cNvPr>
@@ -8564,7 +8564,7 @@
           <p:cNvPr id="3" name="footer">
             <a:extLst xmlns:a="http://schemas.openxmlformats.org/drawingml/2006/main">
               <a:ext uri="{FF2B5EF4-FFF2-40B4-BE49-F238E27FC236}">
-                <a16:creationId xmlns:a16="http://schemas.microsoft.com/office/drawing/2014/main" id="{2ABA0300-B574-495F-8276-FD3564D3585C}"/>
+                <a16:creationId xmlns:a16="http://schemas.microsoft.com/office/drawing/2014/main" id="{E1A431E8-0DCA-4954-A491-58BA75EC86F7}"/>
               </a:ext>
             </a:extLst>
           </p:cNvPr>
@@ -8621,7 +8621,7 @@
           <p:cNvPr id="4" name="slide-number">
             <a:extLst xmlns:a="http://schemas.openxmlformats.org/drawingml/2006/main">
               <a:ext uri="{FF2B5EF4-FFF2-40B4-BE49-F238E27FC236}">
-                <a16:creationId xmlns:a16="http://schemas.microsoft.com/office/drawing/2014/main" id="{58296F4F-9A3C-4AB2-81A9-5B9D4C373B26}"/>
+                <a16:creationId xmlns:a16="http://schemas.microsoft.com/office/drawing/2014/main" id="{C69C190B-461E-434B-A5D7-96E1170B474E}"/>
               </a:ext>
             </a:extLst>
           </p:cNvPr>
@@ -8678,7 +8678,7 @@
           <p:cNvPr id="5" name="Uitlegvoorbeeld — niet uit het boek">
             <a:extLst xmlns:a="http://schemas.openxmlformats.org/drawingml/2006/main">
               <a:ext uri="{FF2B5EF4-FFF2-40B4-BE49-F238E27FC236}">
-                <a16:creationId xmlns:a16="http://schemas.microsoft.com/office/drawing/2014/main" id="{46165DD4-CBDD-4694-8620-FCF7C0C71E6A}"/>
+                <a16:creationId xmlns:a16="http://schemas.microsoft.com/office/drawing/2014/main" id="{76CB6C2B-9987-4F73-BBCF-B5AF44ED2B20}"/>
               </a:ext>
             </a:extLst>
           </p:cNvPr>
@@ -9248,7 +9248,7 @@
           <p:cNvPr id="7" name="Qx = 160 − 4 × 15 + 2 × 25 + 0,01 × 26.000 = 410">
             <a:extLst xmlns:a="http://schemas.openxmlformats.org/drawingml/2006/main">
               <a:ext uri="{FF2B5EF4-FFF2-40B4-BE49-F238E27FC236}">
-                <a16:creationId xmlns:a16="http://schemas.microsoft.com/office/drawing/2014/main" id="{923582A5-7A95-4B0A-92BE-E0C55F06DEF8}"/>
+                <a16:creationId xmlns:a16="http://schemas.microsoft.com/office/drawing/2014/main" id="{55C0DBF8-DE80-4A72-A4B7-5D0562985B08}"/>
               </a:ext>
             </a:extLst>
           </p:cNvPr>
@@ -9305,7 +9305,7 @@
           <p:cNvPr id="8" name="Pz stijgt → Qx stijgt. Px en Y blijven op hun beginwaarde.">
             <a:extLst xmlns:a="http://schemas.openxmlformats.org/drawingml/2006/main">
               <a:ext uri="{FF2B5EF4-FFF2-40B4-BE49-F238E27FC236}">
-                <a16:creationId xmlns:a16="http://schemas.microsoft.com/office/drawing/2014/main" id="{49FC68CB-88CB-43CB-9303-FC6B97AC76BE}"/>
+                <a16:creationId xmlns:a16="http://schemas.microsoft.com/office/drawing/2014/main" id="{444CA527-B379-430B-A2EF-5777BCDA8083}"/>
               </a:ext>
             </a:extLst>
           </p:cNvPr>
@@ -9360,7 +9360,7 @@
     </p:spTree>
     <p:extLst>
       <p:ext uri="{BB962C8B-B14F-4D97-AF65-F5344CB8AC3E}">
-        <p14:creationId xmlns:p14="http://schemas.microsoft.com/office/powerpoint/2010/main" val="1760279167"/>
+        <p14:creationId xmlns:p14="http://schemas.microsoft.com/office/powerpoint/2010/main" val="257754052"/>
       </p:ext>
     </p:extLst>
   </p:cSld>
@@ -9391,7 +9391,7 @@
           <p:cNvPr id="9" name="Twee factoren tegelijk">
             <a:extLst xmlns:a="http://schemas.openxmlformats.org/drawingml/2006/main">
               <a:ext uri="{FF2B5EF4-FFF2-40B4-BE49-F238E27FC236}">
-                <a16:creationId xmlns:a16="http://schemas.microsoft.com/office/drawing/2014/main" id="{F9286E5A-AF50-4FD9-93A7-4CAF89386902}"/>
+                <a16:creationId xmlns:a16="http://schemas.microsoft.com/office/drawing/2014/main" id="{4440D3E5-D17B-4A86-B6AF-3FB1E57F09B7}"/>
               </a:ext>
             </a:extLst>
           </p:cNvPr>
@@ -9448,7 +9448,7 @@
           <p:cNvPr id="2" name="">
             <a:extLst xmlns:a="http://schemas.openxmlformats.org/drawingml/2006/main">
               <a:ext uri="{FF2B5EF4-FFF2-40B4-BE49-F238E27FC236}">
-                <a16:creationId xmlns:a16="http://schemas.microsoft.com/office/drawing/2014/main" id="{4FA6A0F8-5EBE-439F-A37E-5F7EC162F92D}"/>
+                <a16:creationId xmlns:a16="http://schemas.microsoft.com/office/drawing/2014/main" id="{A771DAF5-06C9-4BE4-9EB9-E1BCA973553C}"/>
               </a:ext>
             </a:extLst>
           </p:cNvPr>
@@ -9477,7 +9477,7 @@
           <p:cNvPr id="3" name="footer">
             <a:extLst xmlns:a="http://schemas.openxmlformats.org/drawingml/2006/main">
               <a:ext uri="{FF2B5EF4-FFF2-40B4-BE49-F238E27FC236}">
-                <a16:creationId xmlns:a16="http://schemas.microsoft.com/office/drawing/2014/main" id="{53770D41-FBE4-4F6C-8DFC-4EEA2AEBAC6F}"/>
+                <a16:creationId xmlns:a16="http://schemas.microsoft.com/office/drawing/2014/main" id="{21B249A1-FC72-471A-BF61-9C3320957F68}"/>
               </a:ext>
             </a:extLst>
           </p:cNvPr>
@@ -9534,7 +9534,7 @@
           <p:cNvPr id="4" name="slide-number">
             <a:extLst xmlns:a="http://schemas.openxmlformats.org/drawingml/2006/main">
               <a:ext uri="{FF2B5EF4-FFF2-40B4-BE49-F238E27FC236}">
-                <a16:creationId xmlns:a16="http://schemas.microsoft.com/office/drawing/2014/main" id="{3B7A7237-85C2-4483-BE80-4278348D5DC6}"/>
+                <a16:creationId xmlns:a16="http://schemas.microsoft.com/office/drawing/2014/main" id="{913A4043-A8CF-4C26-A92C-DA392CC580CE}"/>
               </a:ext>
             </a:extLst>
           </p:cNvPr>
@@ -9591,7 +9591,7 @@
           <p:cNvPr id="5" name="Uitlegvoorbeeld — niet uit het boek">
             <a:extLst xmlns:a="http://schemas.openxmlformats.org/drawingml/2006/main">
               <a:ext uri="{FF2B5EF4-FFF2-40B4-BE49-F238E27FC236}">
-                <a16:creationId xmlns:a16="http://schemas.microsoft.com/office/drawing/2014/main" id="{E9188BF9-60A9-4110-A98A-1F4D2F418758}"/>
+                <a16:creationId xmlns:a16="http://schemas.microsoft.com/office/drawing/2014/main" id="{E7ED9460-2581-4A0F-B501-2D90D9C2CABE}"/>
               </a:ext>
             </a:extLst>
           </p:cNvPr>
@@ -9820,7 +9820,7 @@
           <p:cNvPr id="7" name="Beide prijzen tegelijk omhoog: de richtingen werken elkaar t">
             <a:extLst xmlns:a="http://schemas.openxmlformats.org/drawingml/2006/main">
               <a:ext uri="{FF2B5EF4-FFF2-40B4-BE49-F238E27FC236}">
-                <a16:creationId xmlns:a16="http://schemas.microsoft.com/office/drawing/2014/main" id="{20DA70C2-B335-4263-A6C8-4255CF3480AB}"/>
+                <a16:creationId xmlns:a16="http://schemas.microsoft.com/office/drawing/2014/main" id="{9961BD1A-68DC-444F-A440-C924EFA7F318}"/>
               </a:ext>
             </a:extLst>
           </p:cNvPr>
@@ -9877,7 +9877,7 @@
           <p:cNvPr id="8" name="Zonder gezamenlijk model is het totale effect niet zeker.">
             <a:extLst xmlns:a="http://schemas.openxmlformats.org/drawingml/2006/main">
               <a:ext uri="{FF2B5EF4-FFF2-40B4-BE49-F238E27FC236}">
-                <a16:creationId xmlns:a16="http://schemas.microsoft.com/office/drawing/2014/main" id="{4DED64B4-99FA-48C1-BC8A-3ACC88B60A86}"/>
+                <a16:creationId xmlns:a16="http://schemas.microsoft.com/office/drawing/2014/main" id="{77B53472-15E5-43A9-A9F6-124278CBCE8C}"/>
               </a:ext>
             </a:extLst>
           </p:cNvPr>
@@ -9932,7 +9932,7 @@
     </p:spTree>
     <p:extLst>
       <p:ext uri="{BB962C8B-B14F-4D97-AF65-F5344CB8AC3E}">
-        <p14:creationId xmlns:p14="http://schemas.microsoft.com/office/powerpoint/2010/main" val="1365978046"/>
+        <p14:creationId xmlns:p14="http://schemas.microsoft.com/office/powerpoint/2010/main" val="211042318"/>
       </p:ext>
     </p:extLst>
   </p:cSld>
@@ -9963,7 +9963,7 @@
           <p:cNvPr id="8" name="Terug naar startopgave 2">
             <a:extLst xmlns:a="http://schemas.openxmlformats.org/drawingml/2006/main">
               <a:ext uri="{FF2B5EF4-FFF2-40B4-BE49-F238E27FC236}">
-                <a16:creationId xmlns:a16="http://schemas.microsoft.com/office/drawing/2014/main" id="{B9F4155D-1CE5-4BFE-AA33-D2AC5F97C666}"/>
+                <a16:creationId xmlns:a16="http://schemas.microsoft.com/office/drawing/2014/main" id="{12F81FEE-0CE7-4E6C-B610-C115C98A2D9E}"/>
               </a:ext>
             </a:extLst>
           </p:cNvPr>
@@ -10020,7 +10020,7 @@
           <p:cNvPr id="2" name="">
             <a:extLst xmlns:a="http://schemas.openxmlformats.org/drawingml/2006/main">
               <a:ext uri="{FF2B5EF4-FFF2-40B4-BE49-F238E27FC236}">
-                <a16:creationId xmlns:a16="http://schemas.microsoft.com/office/drawing/2014/main" id="{F8E6C3AE-A1DD-482E-AE08-3F2646700280}"/>
+                <a16:creationId xmlns:a16="http://schemas.microsoft.com/office/drawing/2014/main" id="{6134BDC4-DC71-4351-AC2F-502EB7BC6BB0}"/>
               </a:ext>
             </a:extLst>
           </p:cNvPr>
@@ -10049,7 +10049,7 @@
           <p:cNvPr id="3" name="footer">
             <a:extLst xmlns:a="http://schemas.openxmlformats.org/drawingml/2006/main">
               <a:ext uri="{FF2B5EF4-FFF2-40B4-BE49-F238E27FC236}">
-                <a16:creationId xmlns:a16="http://schemas.microsoft.com/office/drawing/2014/main" id="{82CE6EFB-9A2D-44EF-9D3A-F33839463C10}"/>
+                <a16:creationId xmlns:a16="http://schemas.microsoft.com/office/drawing/2014/main" id="{15284662-0CFC-465A-8043-C03C9F28A376}"/>
               </a:ext>
             </a:extLst>
           </p:cNvPr>
@@ -10096,7 +10096,7 @@
                 <a:ea typeface="Arial"/>
                 <a:cs typeface="Arial"/>
               </a:rPr>
-              <a:t>§2.2.3 · Startopgave 2 · Boekpagina 59</a:t>
+              <a:t>§2.2.3 · Startopgave 2 · Boekpagina 60</a:t>
             </a:r>
           </a:p>
         </p:txBody>
@@ -10106,7 +10106,7 @@
           <p:cNvPr id="4" name="slide-number">
             <a:extLst xmlns:a="http://schemas.openxmlformats.org/drawingml/2006/main">
               <a:ext uri="{FF2B5EF4-FFF2-40B4-BE49-F238E27FC236}">
-                <a16:creationId xmlns:a16="http://schemas.microsoft.com/office/drawing/2014/main" id="{848BFAD8-A909-48DC-95E9-026C9D643538}"/>
+                <a16:creationId xmlns:a16="http://schemas.microsoft.com/office/drawing/2014/main" id="{7F75B8AA-E905-4D14-B253-D7E488041DA0}"/>
               </a:ext>
             </a:extLst>
           </p:cNvPr>
@@ -10163,7 +10163,7 @@
           <p:cNvPr id="5" name="a) Wat deel je door wat bij Ei? En bij Ek?&#10;Gebruik woorden, ">
             <a:extLst xmlns:a="http://schemas.openxmlformats.org/drawingml/2006/main">
               <a:ext uri="{FF2B5EF4-FFF2-40B4-BE49-F238E27FC236}">
-                <a16:creationId xmlns:a16="http://schemas.microsoft.com/office/drawing/2014/main" id="{13EE0206-69E3-4728-942A-1BEB178134F5}"/>
+                <a16:creationId xmlns:a16="http://schemas.microsoft.com/office/drawing/2014/main" id="{BE7BD1EF-7037-4737-A940-AF474091B768}"/>
               </a:ext>
             </a:extLst>
           </p:cNvPr>
@@ -10243,7 +10243,7 @@
           <p:cNvPr id="6" name="b) Je verandert Y in een vraagfunctie met Px, Pz en Y.&#10;Welke">
             <a:extLst xmlns:a="http://schemas.openxmlformats.org/drawingml/2006/main">
               <a:ext uri="{FF2B5EF4-FFF2-40B4-BE49-F238E27FC236}">
-                <a16:creationId xmlns:a16="http://schemas.microsoft.com/office/drawing/2014/main" id="{12F528B1-722A-40CF-9026-3514888E2D1A}"/>
+                <a16:creationId xmlns:a16="http://schemas.microsoft.com/office/drawing/2014/main" id="{D31553EE-A80B-438F-B9D7-70A0FADFD7B6}"/>
               </a:ext>
             </a:extLst>
           </p:cNvPr>
@@ -10323,7 +10323,7 @@
           <p:cNvPr id="7" name="Vergelijk met je eerste poging en verbeter je uitleg.">
             <a:extLst xmlns:a="http://schemas.openxmlformats.org/drawingml/2006/main">
               <a:ext uri="{FF2B5EF4-FFF2-40B4-BE49-F238E27FC236}">
-                <a16:creationId xmlns:a16="http://schemas.microsoft.com/office/drawing/2014/main" id="{897937F4-A7C7-4DFC-A5B7-EC83A7A84DDD}"/>
+                <a16:creationId xmlns:a16="http://schemas.microsoft.com/office/drawing/2014/main" id="{C382CA54-429C-4BA7-845F-0D421DF8BA91}"/>
               </a:ext>
             </a:extLst>
           </p:cNvPr>
@@ -10378,7 +10378,7 @@
     </p:spTree>
     <p:extLst>
       <p:ext uri="{BB962C8B-B14F-4D97-AF65-F5344CB8AC3E}">
-        <p14:creationId xmlns:p14="http://schemas.microsoft.com/office/powerpoint/2010/main" val="221736041"/>
+        <p14:creationId xmlns:p14="http://schemas.microsoft.com/office/powerpoint/2010/main" val="382736170"/>
       </p:ext>
     </p:extLst>
   </p:cSld>
@@ -10409,7 +10409,7 @@
           <p:cNvPr id="29" name="overview-title">
             <a:extLst xmlns:a="http://schemas.openxmlformats.org/drawingml/2006/main">
               <a:ext uri="{FF2B5EF4-FFF2-40B4-BE49-F238E27FC236}">
-                <a16:creationId xmlns:a16="http://schemas.microsoft.com/office/drawing/2014/main" id="{661E746E-8014-43CB-A420-CB8C2EC6E98B}"/>
+                <a16:creationId xmlns:a16="http://schemas.microsoft.com/office/drawing/2014/main" id="{4C6ECEE9-1743-4B85-8BF1-37C8F7F27E8F}"/>
               </a:ext>
             </a:extLst>
           </p:cNvPr>
@@ -10489,7 +10489,7 @@
           <p:cNvPr id="2" name="phase">
             <a:extLst xmlns:a="http://schemas.openxmlformats.org/drawingml/2006/main">
               <a:ext uri="{FF2B5EF4-FFF2-40B4-BE49-F238E27FC236}">
-                <a16:creationId xmlns:a16="http://schemas.microsoft.com/office/drawing/2014/main" id="{4F3BEDE2-F9E8-4D6F-A11C-C60993F9A080}"/>
+                <a16:creationId xmlns:a16="http://schemas.microsoft.com/office/drawing/2014/main" id="{799798EA-5919-4917-8344-A8AF545B9D58}"/>
               </a:ext>
             </a:extLst>
           </p:cNvPr>
@@ -10546,7 +10546,7 @@
           <p:cNvPr id="3" name="">
             <a:extLst xmlns:a="http://schemas.openxmlformats.org/drawingml/2006/main">
               <a:ext uri="{FF2B5EF4-FFF2-40B4-BE49-F238E27FC236}">
-                <a16:creationId xmlns:a16="http://schemas.microsoft.com/office/drawing/2014/main" id="{995D2904-8461-4615-8F4F-88E895E40F1F}"/>
+                <a16:creationId xmlns:a16="http://schemas.microsoft.com/office/drawing/2014/main" id="{767A4283-049B-4D10-91F9-5209F92FD36E}"/>
               </a:ext>
             </a:extLst>
           </p:cNvPr>
@@ -10575,7 +10575,7 @@
           <p:cNvPr id="4" name="Lesroute">
             <a:extLst xmlns:a="http://schemas.openxmlformats.org/drawingml/2006/main">
               <a:ext uri="{FF2B5EF4-FFF2-40B4-BE49-F238E27FC236}">
-                <a16:creationId xmlns:a16="http://schemas.microsoft.com/office/drawing/2014/main" id="{73CB5189-2E55-47E9-9092-BA9E98AA16F6}"/>
+                <a16:creationId xmlns:a16="http://schemas.microsoft.com/office/drawing/2014/main" id="{EB0A84A4-A73A-4E3F-B407-6CEFF0E823D4}"/>
               </a:ext>
             </a:extLst>
           </p:cNvPr>
@@ -10632,7 +10632,7 @@
           <p:cNvPr id="5" name="route-number-1">
             <a:extLst xmlns:a="http://schemas.openxmlformats.org/drawingml/2006/main">
               <a:ext uri="{FF2B5EF4-FFF2-40B4-BE49-F238E27FC236}">
-                <a16:creationId xmlns:a16="http://schemas.microsoft.com/office/drawing/2014/main" id="{CA2261A4-2DF3-42CE-BC36-1187D4499C2C}"/>
+                <a16:creationId xmlns:a16="http://schemas.microsoft.com/office/drawing/2014/main" id="{F72F2AF3-BD49-4450-B041-F71EAC997FA5}"/>
               </a:ext>
             </a:extLst>
           </p:cNvPr>
@@ -10689,7 +10689,7 @@
           <p:cNvPr id="6" name="route-1">
             <a:extLst xmlns:a="http://schemas.openxmlformats.org/drawingml/2006/main">
               <a:ext uri="{FF2B5EF4-FFF2-40B4-BE49-F238E27FC236}">
-                <a16:creationId xmlns:a16="http://schemas.microsoft.com/office/drawing/2014/main" id="{EFC327E5-C5E0-412F-A7D3-9C8916451AD6}"/>
+                <a16:creationId xmlns:a16="http://schemas.microsoft.com/office/drawing/2014/main" id="{30D744BC-368F-4415-A341-9C58D8A4D6A5}"/>
               </a:ext>
             </a:extLst>
           </p:cNvPr>
@@ -10746,7 +10746,7 @@
           <p:cNvPr id="7" name="route-number-2">
             <a:extLst xmlns:a="http://schemas.openxmlformats.org/drawingml/2006/main">
               <a:ext uri="{FF2B5EF4-FFF2-40B4-BE49-F238E27FC236}">
-                <a16:creationId xmlns:a16="http://schemas.microsoft.com/office/drawing/2014/main" id="{2C8001DA-0720-480A-952B-12247F144B8B}"/>
+                <a16:creationId xmlns:a16="http://schemas.microsoft.com/office/drawing/2014/main" id="{D58ABE4A-2E3B-45D6-B27C-BE46B179EBFB}"/>
               </a:ext>
             </a:extLst>
           </p:cNvPr>
@@ -10803,7 +10803,7 @@
           <p:cNvPr id="8" name="route-2">
             <a:extLst xmlns:a="http://schemas.openxmlformats.org/drawingml/2006/main">
               <a:ext uri="{FF2B5EF4-FFF2-40B4-BE49-F238E27FC236}">
-                <a16:creationId xmlns:a16="http://schemas.microsoft.com/office/drawing/2014/main" id="{829E7148-E376-4C99-9270-8544E738FFB4}"/>
+                <a16:creationId xmlns:a16="http://schemas.microsoft.com/office/drawing/2014/main" id="{FA539116-F0E7-4ECC-843F-14C42967DCDE}"/>
               </a:ext>
             </a:extLst>
           </p:cNvPr>
@@ -10860,7 +10860,7 @@
           <p:cNvPr id="9" name="route-number-3">
             <a:extLst xmlns:a="http://schemas.openxmlformats.org/drawingml/2006/main">
               <a:ext uri="{FF2B5EF4-FFF2-40B4-BE49-F238E27FC236}">
-                <a16:creationId xmlns:a16="http://schemas.microsoft.com/office/drawing/2014/main" id="{A0D2C2E2-F5B2-47AF-8088-4270581739B4}"/>
+                <a16:creationId xmlns:a16="http://schemas.microsoft.com/office/drawing/2014/main" id="{BBBBB197-667F-4A1A-BC69-7662DCEB1C29}"/>
               </a:ext>
             </a:extLst>
           </p:cNvPr>
@@ -10917,7 +10917,7 @@
           <p:cNvPr id="10" name="route-3">
             <a:extLst xmlns:a="http://schemas.openxmlformats.org/drawingml/2006/main">
               <a:ext uri="{FF2B5EF4-FFF2-40B4-BE49-F238E27FC236}">
-                <a16:creationId xmlns:a16="http://schemas.microsoft.com/office/drawing/2014/main" id="{381B1488-5152-4417-BE00-DAA0198CB607}"/>
+                <a16:creationId xmlns:a16="http://schemas.microsoft.com/office/drawing/2014/main" id="{425D9C48-44F2-4298-8827-BAC98BA27D01}"/>
               </a:ext>
             </a:extLst>
           </p:cNvPr>
@@ -10974,7 +10974,7 @@
           <p:cNvPr id="11" name="route-number-4">
             <a:extLst xmlns:a="http://schemas.openxmlformats.org/drawingml/2006/main">
               <a:ext uri="{FF2B5EF4-FFF2-40B4-BE49-F238E27FC236}">
-                <a16:creationId xmlns:a16="http://schemas.microsoft.com/office/drawing/2014/main" id="{7F5B6A3F-B013-4EC8-916F-7AD64569B84F}"/>
+                <a16:creationId xmlns:a16="http://schemas.microsoft.com/office/drawing/2014/main" id="{56E38DF8-EB40-4CA7-A128-8F5BDA54EDFF}"/>
               </a:ext>
             </a:extLst>
           </p:cNvPr>
@@ -11031,7 +11031,7 @@
           <p:cNvPr id="12" name="route-4">
             <a:extLst xmlns:a="http://schemas.openxmlformats.org/drawingml/2006/main">
               <a:ext uri="{FF2B5EF4-FFF2-40B4-BE49-F238E27FC236}">
-                <a16:creationId xmlns:a16="http://schemas.microsoft.com/office/drawing/2014/main" id="{DBB88C12-AEAF-4839-AB95-FC5867CA0EBF}"/>
+                <a16:creationId xmlns:a16="http://schemas.microsoft.com/office/drawing/2014/main" id="{7B963318-BAEB-4DF1-926B-7B115DFFA4B4}"/>
               </a:ext>
             </a:extLst>
           </p:cNvPr>
@@ -11088,7 +11088,7 @@
           <p:cNvPr id="13" name="route-number-5">
             <a:extLst xmlns:a="http://schemas.openxmlformats.org/drawingml/2006/main">
               <a:ext uri="{FF2B5EF4-FFF2-40B4-BE49-F238E27FC236}">
-                <a16:creationId xmlns:a16="http://schemas.microsoft.com/office/drawing/2014/main" id="{CF9A6609-3D26-427F-A2E4-3967FF7A7370}"/>
+                <a16:creationId xmlns:a16="http://schemas.microsoft.com/office/drawing/2014/main" id="{1541C908-4F44-477E-83E3-28464E5BAB82}"/>
               </a:ext>
             </a:extLst>
           </p:cNvPr>
@@ -11145,7 +11145,7 @@
           <p:cNvPr id="14" name="route-5">
             <a:extLst xmlns:a="http://schemas.openxmlformats.org/drawingml/2006/main">
               <a:ext uri="{FF2B5EF4-FFF2-40B4-BE49-F238E27FC236}">
-                <a16:creationId xmlns:a16="http://schemas.microsoft.com/office/drawing/2014/main" id="{880BC7DA-22F3-4470-A335-B05A5C370465}"/>
+                <a16:creationId xmlns:a16="http://schemas.microsoft.com/office/drawing/2014/main" id="{A5FC7D50-D167-4365-BC5B-9D6AE85D96B5}"/>
               </a:ext>
             </a:extLst>
           </p:cNvPr>
@@ -11202,7 +11202,7 @@
           <p:cNvPr id="15" name="route-number-6">
             <a:extLst xmlns:a="http://schemas.openxmlformats.org/drawingml/2006/main">
               <a:ext uri="{FF2B5EF4-FFF2-40B4-BE49-F238E27FC236}">
-                <a16:creationId xmlns:a16="http://schemas.microsoft.com/office/drawing/2014/main" id="{5E0DCF51-3EBE-4F9B-8EB2-0C717108B97C}"/>
+                <a16:creationId xmlns:a16="http://schemas.microsoft.com/office/drawing/2014/main" id="{C911CBE1-40BD-4847-B5DB-6CBBBC77F66E}"/>
               </a:ext>
             </a:extLst>
           </p:cNvPr>
@@ -11259,7 +11259,7 @@
           <p:cNvPr id="16" name="route-6">
             <a:extLst xmlns:a="http://schemas.openxmlformats.org/drawingml/2006/main">
               <a:ext uri="{FF2B5EF4-FFF2-40B4-BE49-F238E27FC236}">
-                <a16:creationId xmlns:a16="http://schemas.microsoft.com/office/drawing/2014/main" id="{3EFFBF0B-1BF9-46A2-BE61-A61FF4C63177}"/>
+                <a16:creationId xmlns:a16="http://schemas.microsoft.com/office/drawing/2014/main" id="{2DCC7729-DF0F-480A-BFEB-9F60926BCBA5}"/>
               </a:ext>
             </a:extLst>
           </p:cNvPr>
@@ -11316,7 +11316,7 @@
           <p:cNvPr id="17" name="route-number-7">
             <a:extLst xmlns:a="http://schemas.openxmlformats.org/drawingml/2006/main">
               <a:ext uri="{FF2B5EF4-FFF2-40B4-BE49-F238E27FC236}">
-                <a16:creationId xmlns:a16="http://schemas.microsoft.com/office/drawing/2014/main" id="{34F1F172-B026-42E4-9CDF-0E42E6173E5C}"/>
+                <a16:creationId xmlns:a16="http://schemas.microsoft.com/office/drawing/2014/main" id="{8955453B-8719-4224-A7A7-C330617EAE25}"/>
               </a:ext>
             </a:extLst>
           </p:cNvPr>
@@ -11373,7 +11373,7 @@
           <p:cNvPr id="18" name="route-7">
             <a:extLst xmlns:a="http://schemas.openxmlformats.org/drawingml/2006/main">
               <a:ext uri="{FF2B5EF4-FFF2-40B4-BE49-F238E27FC236}">
-                <a16:creationId xmlns:a16="http://schemas.microsoft.com/office/drawing/2014/main" id="{60C6919A-B7C6-4833-A8A8-AD77137777B5}"/>
+                <a16:creationId xmlns:a16="http://schemas.microsoft.com/office/drawing/2014/main" id="{8C023F42-3C94-48B7-AA5A-D8B4B8F8D288}"/>
               </a:ext>
             </a:extLst>
           </p:cNvPr>
@@ -11430,7 +11430,7 @@
           <p:cNvPr id="19" name="Lesdoelen">
             <a:extLst xmlns:a="http://schemas.openxmlformats.org/drawingml/2006/main">
               <a:ext uri="{FF2B5EF4-FFF2-40B4-BE49-F238E27FC236}">
-                <a16:creationId xmlns:a16="http://schemas.microsoft.com/office/drawing/2014/main" id="{85C08246-2B25-48DE-9558-C04D071F5AF4}"/>
+                <a16:creationId xmlns:a16="http://schemas.microsoft.com/office/drawing/2014/main" id="{E8C7A309-4DD4-4570-90F1-807319DBE612}"/>
               </a:ext>
             </a:extLst>
           </p:cNvPr>
@@ -11487,7 +11487,7 @@
           <p:cNvPr id="20" name="overview-goals">
             <a:extLst xmlns:a="http://schemas.openxmlformats.org/drawingml/2006/main">
               <a:ext uri="{FF2B5EF4-FFF2-40B4-BE49-F238E27FC236}">
-                <a16:creationId xmlns:a16="http://schemas.microsoft.com/office/drawing/2014/main" id="{C7309698-1D50-4AA3-BACB-C66B1E6B7F4A}"/>
+                <a16:creationId xmlns:a16="http://schemas.microsoft.com/office/drawing/2014/main" id="{6B981904-5215-4C4D-971A-1EFD46A86674}"/>
               </a:ext>
             </a:extLst>
           </p:cNvPr>
@@ -11590,7 +11590,7 @@
           <p:cNvPr id="21" name="">
             <a:extLst xmlns:a="http://schemas.openxmlformats.org/drawingml/2006/main">
               <a:ext uri="{FF2B5EF4-FFF2-40B4-BE49-F238E27FC236}">
-                <a16:creationId xmlns:a16="http://schemas.microsoft.com/office/drawing/2014/main" id="{4A4419A3-2406-49F4-9BC1-3463D7A2D344}"/>
+                <a16:creationId xmlns:a16="http://schemas.microsoft.com/office/drawing/2014/main" id="{B4160A98-2415-4016-A95F-511242ADE737}"/>
               </a:ext>
             </a:extLst>
           </p:cNvPr>
@@ -11616,10 +11616,10 @@
       </p:sp>
       <p:sp>
         <p:nvSpPr>
-          <p:cNvPr id="22" name="Startopdracht · pagina 59">
-            <a:extLst xmlns:a="http://schemas.openxmlformats.org/drawingml/2006/main">
-              <a:ext uri="{FF2B5EF4-FFF2-40B4-BE49-F238E27FC236}">
-                <a16:creationId xmlns:a16="http://schemas.microsoft.com/office/drawing/2014/main" id="{2EC3CCF0-6965-47A4-870F-F55B5D15BB26}"/>
+          <p:cNvPr id="22" name="Startopdracht · pagina 60">
+            <a:extLst xmlns:a="http://schemas.openxmlformats.org/drawingml/2006/main">
+              <a:ext uri="{FF2B5EF4-FFF2-40B4-BE49-F238E27FC236}">
+                <a16:creationId xmlns:a16="http://schemas.microsoft.com/office/drawing/2014/main" id="{D846C81E-16EF-4B0B-A45D-DE45F6313BEB}"/>
               </a:ext>
             </a:extLst>
           </p:cNvPr>
@@ -11666,7 +11666,7 @@
                 <a:ea typeface="Arial"/>
                 <a:cs typeface="Arial"/>
               </a:rPr>
-              <a:t>Startopdracht · pagina 59</a:t>
+              <a:t>Startopdracht · pagina 60</a:t>
             </a:r>
           </a:p>
         </p:txBody>
@@ -11676,7 +11676,7 @@
           <p:cNvPr id="23" name="overview-start">
             <a:extLst xmlns:a="http://schemas.openxmlformats.org/drawingml/2006/main">
               <a:ext uri="{FF2B5EF4-FFF2-40B4-BE49-F238E27FC236}">
-                <a16:creationId xmlns:a16="http://schemas.microsoft.com/office/drawing/2014/main" id="{DA7AFAC6-A7A9-4C4D-B014-AB69A70A9F25}"/>
+                <a16:creationId xmlns:a16="http://schemas.microsoft.com/office/drawing/2014/main" id="{786DAD7C-32F8-4F93-859B-830ED44EEA45}"/>
               </a:ext>
             </a:extLst>
           </p:cNvPr>
@@ -11769,7 +11769,7 @@
                 <a:ea typeface="Arial"/>
                 <a:cs typeface="Arial"/>
               </a:rPr>
-              <a:t>de theorie, p. 53–56</a:t>
+              <a:t>de theorie, p. 54–57</a:t>
             </a:r>
           </a:p>
         </p:txBody>
@@ -11779,7 +11779,7 @@
           <p:cNvPr id="24" name="">
             <a:extLst xmlns:a="http://schemas.openxmlformats.org/drawingml/2006/main">
               <a:ext uri="{FF2B5EF4-FFF2-40B4-BE49-F238E27FC236}">
-                <a16:creationId xmlns:a16="http://schemas.microsoft.com/office/drawing/2014/main" id="{0B9F0A30-DF6B-454C-A75E-54C25BAB0B9B}"/>
+                <a16:creationId xmlns:a16="http://schemas.microsoft.com/office/drawing/2014/main" id="{8469ED1B-9988-4CE4-B763-308F57D3017A}"/>
               </a:ext>
             </a:extLst>
           </p:cNvPr>
@@ -11808,7 +11808,7 @@
           <p:cNvPr id="25" name="Huiswerk">
             <a:extLst xmlns:a="http://schemas.openxmlformats.org/drawingml/2006/main">
               <a:ext uri="{FF2B5EF4-FFF2-40B4-BE49-F238E27FC236}">
-                <a16:creationId xmlns:a16="http://schemas.microsoft.com/office/drawing/2014/main" id="{B3ECBF66-968E-48B0-9771-C3D6837EB8BE}"/>
+                <a16:creationId xmlns:a16="http://schemas.microsoft.com/office/drawing/2014/main" id="{7EB481B9-3432-46DE-AE93-7AB11E9CB0A8}"/>
               </a:ext>
             </a:extLst>
           </p:cNvPr>
@@ -11865,7 +11865,7 @@
           <p:cNvPr id="26" name="overview-homework">
             <a:extLst xmlns:a="http://schemas.openxmlformats.org/drawingml/2006/main">
               <a:ext uri="{FF2B5EF4-FFF2-40B4-BE49-F238E27FC236}">
-                <a16:creationId xmlns:a16="http://schemas.microsoft.com/office/drawing/2014/main" id="{1AD0A789-729D-4D93-8A5D-7D9AADAEE83C}"/>
+                <a16:creationId xmlns:a16="http://schemas.microsoft.com/office/drawing/2014/main" id="{2371F2CB-A088-46E0-AD13-28919DC54E91}"/>
               </a:ext>
             </a:extLst>
           </p:cNvPr>
@@ -11991,7 +11991,7 @@
           <p:cNvPr id="27" name="footer">
             <a:extLst xmlns:a="http://schemas.openxmlformats.org/drawingml/2006/main">
               <a:ext uri="{FF2B5EF4-FFF2-40B4-BE49-F238E27FC236}">
-                <a16:creationId xmlns:a16="http://schemas.microsoft.com/office/drawing/2014/main" id="{6302E8B2-0D1A-42E8-836C-0D3647A67081}"/>
+                <a16:creationId xmlns:a16="http://schemas.microsoft.com/office/drawing/2014/main" id="{AAB79C4D-FA73-4BB6-8D13-EACB3676C983}"/>
               </a:ext>
             </a:extLst>
           </p:cNvPr>
@@ -12048,7 +12048,7 @@
           <p:cNvPr id="28" name="slide-number">
             <a:extLst xmlns:a="http://schemas.openxmlformats.org/drawingml/2006/main">
               <a:ext uri="{FF2B5EF4-FFF2-40B4-BE49-F238E27FC236}">
-                <a16:creationId xmlns:a16="http://schemas.microsoft.com/office/drawing/2014/main" id="{C65439A3-2416-4662-AED1-1BA020748FE6}"/>
+                <a16:creationId xmlns:a16="http://schemas.microsoft.com/office/drawing/2014/main" id="{A5069B81-553A-4E87-9209-DB316E17BA15}"/>
               </a:ext>
             </a:extLst>
           </p:cNvPr>
@@ -12103,7 +12103,7 @@
     </p:spTree>
     <p:extLst>
       <p:ext uri="{BB962C8B-B14F-4D97-AF65-F5344CB8AC3E}">
-        <p14:creationId xmlns:p14="http://schemas.microsoft.com/office/powerpoint/2010/main" val="32799645"/>
+        <p14:creationId xmlns:p14="http://schemas.microsoft.com/office/powerpoint/2010/main" val="3461430"/>
       </p:ext>
     </p:extLst>
   </p:cSld>
@@ -12134,7 +12134,7 @@
           <p:cNvPr id="10" name="Opgave 8 · Inkomen, koffie en fitness">
             <a:extLst xmlns:a="http://schemas.openxmlformats.org/drawingml/2006/main">
               <a:ext uri="{FF2B5EF4-FFF2-40B4-BE49-F238E27FC236}">
-                <a16:creationId xmlns:a16="http://schemas.microsoft.com/office/drawing/2014/main" id="{89E53562-E189-4FCC-B0E7-9143BCC22BB7}"/>
+                <a16:creationId xmlns:a16="http://schemas.microsoft.com/office/drawing/2014/main" id="{1C7E070C-EF8E-407E-95E6-2016436533AD}"/>
               </a:ext>
             </a:extLst>
           </p:cNvPr>
@@ -12191,7 +12191,7 @@
           <p:cNvPr id="2" name="">
             <a:extLst xmlns:a="http://schemas.openxmlformats.org/drawingml/2006/main">
               <a:ext uri="{FF2B5EF4-FFF2-40B4-BE49-F238E27FC236}">
-                <a16:creationId xmlns:a16="http://schemas.microsoft.com/office/drawing/2014/main" id="{4B303717-61F8-4774-B657-C9F408717738}"/>
+                <a16:creationId xmlns:a16="http://schemas.microsoft.com/office/drawing/2014/main" id="{F9F2F2D1-D991-49F8-80E7-1D19231A0590}"/>
               </a:ext>
             </a:extLst>
           </p:cNvPr>
@@ -12220,7 +12220,7 @@
           <p:cNvPr id="3" name="footer">
             <a:extLst xmlns:a="http://schemas.openxmlformats.org/drawingml/2006/main">
               <a:ext uri="{FF2B5EF4-FFF2-40B4-BE49-F238E27FC236}">
-                <a16:creationId xmlns:a16="http://schemas.microsoft.com/office/drawing/2014/main" id="{5A3C8F45-EB2D-4025-B113-D6E0D5665B01}"/>
+                <a16:creationId xmlns:a16="http://schemas.microsoft.com/office/drawing/2014/main" id="{9125B8D9-FAC8-49D3-8962-603E721CFACE}"/>
               </a:ext>
             </a:extLst>
           </p:cNvPr>
@@ -12267,7 +12267,7 @@
                 <a:ea typeface="Arial"/>
                 <a:cs typeface="Arial"/>
               </a:rPr>
-              <a:t>§2.2.3 · Doeloefening 8 · Boekpagina 62</a:t>
+              <a:t>§2.2.3 · Doeloefening 8 · Boekpagina 63</a:t>
             </a:r>
           </a:p>
         </p:txBody>
@@ -12277,7 +12277,7 @@
           <p:cNvPr id="4" name="slide-number">
             <a:extLst xmlns:a="http://schemas.openxmlformats.org/drawingml/2006/main">
               <a:ext uri="{FF2B5EF4-FFF2-40B4-BE49-F238E27FC236}">
-                <a16:creationId xmlns:a16="http://schemas.microsoft.com/office/drawing/2014/main" id="{8DE3167D-C5FA-445D-8D6A-D7F445F71BEC}"/>
+                <a16:creationId xmlns:a16="http://schemas.microsoft.com/office/drawing/2014/main" id="{86A5D2A7-9B4E-4C4C-9689-736145E3658C}"/>
               </a:ext>
             </a:extLst>
           </p:cNvPr>
@@ -12334,7 +12334,7 @@
           <p:cNvPr id="5" name="Gebruik steeds de oude waarde als noemer.">
             <a:extLst xmlns:a="http://schemas.openxmlformats.org/drawingml/2006/main">
               <a:ext uri="{FF2B5EF4-FFF2-40B4-BE49-F238E27FC236}">
-                <a16:creationId xmlns:a16="http://schemas.microsoft.com/office/drawing/2014/main" id="{3A1464EB-E0DB-495D-A694-A33664B2BF09}"/>
+                <a16:creationId xmlns:a16="http://schemas.microsoft.com/office/drawing/2014/main" id="{B6E0911A-9422-4024-AFC8-8D5D39FFB871}"/>
               </a:ext>
             </a:extLst>
           </p:cNvPr>
@@ -12391,7 +12391,7 @@
           <p:cNvPr id="6" name="Ei = %ΔQv / %ΔY">
             <a:extLst xmlns:a="http://schemas.openxmlformats.org/drawingml/2006/main">
               <a:ext uri="{FF2B5EF4-FFF2-40B4-BE49-F238E27FC236}">
-                <a16:creationId xmlns:a16="http://schemas.microsoft.com/office/drawing/2014/main" id="{B98E5547-B56B-45C2-A828-82E5DC5CD8B2}"/>
+                <a16:creationId xmlns:a16="http://schemas.microsoft.com/office/drawing/2014/main" id="{9800E2E1-9B81-4FC0-A274-59BE3FBFAD16}"/>
               </a:ext>
             </a:extLst>
           </p:cNvPr>
@@ -12448,7 +12448,7 @@
           <p:cNvPr id="7" name="Ei &lt; 0: inferieur goed · 0 &lt; Ei &lt; 1: normaal goed&#10;Ei &gt; 1: lu">
             <a:extLst xmlns:a="http://schemas.openxmlformats.org/drawingml/2006/main">
               <a:ext uri="{FF2B5EF4-FFF2-40B4-BE49-F238E27FC236}">
-                <a16:creationId xmlns:a16="http://schemas.microsoft.com/office/drawing/2014/main" id="{FDC264FA-A6EB-4DE6-B9F7-43C0D3647C9F}"/>
+                <a16:creationId xmlns:a16="http://schemas.microsoft.com/office/drawing/2014/main" id="{816CD957-9B03-4D87-B53D-40C5CF1E14D0}"/>
               </a:ext>
             </a:extLst>
           </p:cNvPr>
@@ -12528,7 +12528,7 @@
           <p:cNvPr id="8" name="Ek = %ΔQv van goed X / %ΔP van ander goed Z">
             <a:extLst xmlns:a="http://schemas.openxmlformats.org/drawingml/2006/main">
               <a:ext uri="{FF2B5EF4-FFF2-40B4-BE49-F238E27FC236}">
-                <a16:creationId xmlns:a16="http://schemas.microsoft.com/office/drawing/2014/main" id="{A1CECFCF-E21F-4352-9F7D-C4745293F4C4}"/>
+                <a16:creationId xmlns:a16="http://schemas.microsoft.com/office/drawing/2014/main" id="{74CE2920-C53F-49FD-BCF1-399A7E41597D}"/>
               </a:ext>
             </a:extLst>
           </p:cNvPr>
@@ -12585,7 +12585,7 @@
           <p:cNvPr id="9" name="Noem bij Ek altijd beide goederen.">
             <a:extLst xmlns:a="http://schemas.openxmlformats.org/drawingml/2006/main">
               <a:ext uri="{FF2B5EF4-FFF2-40B4-BE49-F238E27FC236}">
-                <a16:creationId xmlns:a16="http://schemas.microsoft.com/office/drawing/2014/main" id="{48A1BD91-BFA4-4D05-A941-E7609230EDF1}"/>
+                <a16:creationId xmlns:a16="http://schemas.microsoft.com/office/drawing/2014/main" id="{89AAC287-1C10-43FF-9998-8C78814AF7F0}"/>
               </a:ext>
             </a:extLst>
           </p:cNvPr>
@@ -12640,7 +12640,7 @@
     </p:spTree>
     <p:extLst>
       <p:ext uri="{BB962C8B-B14F-4D97-AF65-F5344CB8AC3E}">
-        <p14:creationId xmlns:p14="http://schemas.microsoft.com/office/powerpoint/2010/main" val="310640666"/>
+        <p14:creationId xmlns:p14="http://schemas.microsoft.com/office/powerpoint/2010/main" val="2025073208"/>
       </p:ext>
     </p:extLst>
   </p:cSld>
@@ -12671,7 +12671,7 @@
           <p:cNvPr id="9" name="Opgave 8 · Bron inkomen en vragen a–b">
             <a:extLst xmlns:a="http://schemas.openxmlformats.org/drawingml/2006/main">
               <a:ext uri="{FF2B5EF4-FFF2-40B4-BE49-F238E27FC236}">
-                <a16:creationId xmlns:a16="http://schemas.microsoft.com/office/drawing/2014/main" id="{D7EDFDC2-84B7-4A73-AAFE-2BED2970CB1C}"/>
+                <a16:creationId xmlns:a16="http://schemas.microsoft.com/office/drawing/2014/main" id="{5398C642-4D86-498D-A093-FD19C5BBA92F}"/>
               </a:ext>
             </a:extLst>
           </p:cNvPr>
@@ -12728,7 +12728,7 @@
           <p:cNvPr id="2" name="">
             <a:extLst xmlns:a="http://schemas.openxmlformats.org/drawingml/2006/main">
               <a:ext uri="{FF2B5EF4-FFF2-40B4-BE49-F238E27FC236}">
-                <a16:creationId xmlns:a16="http://schemas.microsoft.com/office/drawing/2014/main" id="{F2E626AC-2C2B-4CE3-8146-8A0D2B15C403}"/>
+                <a16:creationId xmlns:a16="http://schemas.microsoft.com/office/drawing/2014/main" id="{5D9D68D3-8A18-42DB-BF6D-9750814CD1F6}"/>
               </a:ext>
             </a:extLst>
           </p:cNvPr>
@@ -12757,7 +12757,7 @@
           <p:cNvPr id="3" name="footer">
             <a:extLst xmlns:a="http://schemas.openxmlformats.org/drawingml/2006/main">
               <a:ext uri="{FF2B5EF4-FFF2-40B4-BE49-F238E27FC236}">
-                <a16:creationId xmlns:a16="http://schemas.microsoft.com/office/drawing/2014/main" id="{0084346C-F35E-4F3E-A448-813CA083628D}"/>
+                <a16:creationId xmlns:a16="http://schemas.microsoft.com/office/drawing/2014/main" id="{0A094311-BACF-4E92-9BEB-4544C8D72F56}"/>
               </a:ext>
             </a:extLst>
           </p:cNvPr>
@@ -12804,7 +12804,7 @@
                 <a:ea typeface="Arial"/>
                 <a:cs typeface="Arial"/>
               </a:rPr>
-              <a:t>§2.2.3 · Doeloefening 8 · Boekpagina 62</a:t>
+              <a:t>§2.2.3 · Doeloefening 8 · Boekpagina 63</a:t>
             </a:r>
           </a:p>
         </p:txBody>
@@ -12814,7 +12814,7 @@
           <p:cNvPr id="4" name="slide-number">
             <a:extLst xmlns:a="http://schemas.openxmlformats.org/drawingml/2006/main">
               <a:ext uri="{FF2B5EF4-FFF2-40B4-BE49-F238E27FC236}">
-                <a16:creationId xmlns:a16="http://schemas.microsoft.com/office/drawing/2014/main" id="{CD317A40-5118-40F3-A114-6B1AB382C6C1}"/>
+                <a16:creationId xmlns:a16="http://schemas.microsoft.com/office/drawing/2014/main" id="{D07D001D-1214-4B51-95BA-72A56CB95A7A}"/>
               </a:ext>
             </a:extLst>
           </p:cNvPr>
@@ -12871,7 +12871,7 @@
           <p:cNvPr id="5" name="Het gemiddelde inkomen stijgt 5%. De vraag naar maaltijdpakk">
             <a:extLst xmlns:a="http://schemas.openxmlformats.org/drawingml/2006/main">
               <a:ext uri="{FF2B5EF4-FFF2-40B4-BE49-F238E27FC236}">
-                <a16:creationId xmlns:a16="http://schemas.microsoft.com/office/drawing/2014/main" id="{7E53E274-8FD0-4C0A-A6C9-85AAE08241CE}"/>
+                <a16:creationId xmlns:a16="http://schemas.microsoft.com/office/drawing/2014/main" id="{FA373764-9C1E-4901-8AE0-7AF53EFC0194}"/>
               </a:ext>
             </a:extLst>
           </p:cNvPr>
@@ -12928,7 +12928,7 @@
           <p:cNvPr id="6" name="">
             <a:extLst xmlns:a="http://schemas.openxmlformats.org/drawingml/2006/main">
               <a:ext uri="{FF2B5EF4-FFF2-40B4-BE49-F238E27FC236}">
-                <a16:creationId xmlns:a16="http://schemas.microsoft.com/office/drawing/2014/main" id="{0F6F80BC-1ECD-4E69-A057-BAE4B5E43993}"/>
+                <a16:creationId xmlns:a16="http://schemas.microsoft.com/office/drawing/2014/main" id="{746E59A9-8DED-41C6-AEF1-59E13CACF082}"/>
               </a:ext>
             </a:extLst>
           </p:cNvPr>
@@ -12957,7 +12957,7 @@
           <p:cNvPr id="7" name="a) Bereken met bron inkomen Ei voor maaltijdpakketten en bud">
             <a:extLst xmlns:a="http://schemas.openxmlformats.org/drawingml/2006/main">
               <a:ext uri="{FF2B5EF4-FFF2-40B4-BE49-F238E27FC236}">
-                <a16:creationId xmlns:a16="http://schemas.microsoft.com/office/drawing/2014/main" id="{4402325F-A33C-4C64-B415-056475D7E846}"/>
+                <a16:creationId xmlns:a16="http://schemas.microsoft.com/office/drawing/2014/main" id="{EDB8DBE7-A9A0-4BAD-BF7F-BCF1177F78BB}"/>
               </a:ext>
             </a:extLst>
           </p:cNvPr>
@@ -13014,7 +13014,7 @@
           <p:cNvPr id="8" name="b) Classificeer beide goederen met de drie categorieën uit d">
             <a:extLst xmlns:a="http://schemas.openxmlformats.org/drawingml/2006/main">
               <a:ext uri="{FF2B5EF4-FFF2-40B4-BE49-F238E27FC236}">
-                <a16:creationId xmlns:a16="http://schemas.microsoft.com/office/drawing/2014/main" id="{BE7975EE-7E35-425B-B8DB-999B1329846E}"/>
+                <a16:creationId xmlns:a16="http://schemas.microsoft.com/office/drawing/2014/main" id="{1FF492F0-5438-4E8A-BF26-CED5986E93F7}"/>
               </a:ext>
             </a:extLst>
           </p:cNvPr>
@@ -13069,7 +13069,7 @@
     </p:spTree>
     <p:extLst>
       <p:ext uri="{BB962C8B-B14F-4D97-AF65-F5344CB8AC3E}">
-        <p14:creationId xmlns:p14="http://schemas.microsoft.com/office/powerpoint/2010/main" val="1890068422"/>
+        <p14:creationId xmlns:p14="http://schemas.microsoft.com/office/powerpoint/2010/main" val="1799547430"/>
       </p:ext>
     </p:extLst>
   </p:cSld>
@@ -13100,7 +13100,7 @@
           <p:cNvPr id="9" name="Opgave 8 · Bron koffie en vraag c">
             <a:extLst xmlns:a="http://schemas.openxmlformats.org/drawingml/2006/main">
               <a:ext uri="{FF2B5EF4-FFF2-40B4-BE49-F238E27FC236}">
-                <a16:creationId xmlns:a16="http://schemas.microsoft.com/office/drawing/2014/main" id="{2766869B-F19C-4C51-8446-18FECB02FC5D}"/>
+                <a16:creationId xmlns:a16="http://schemas.microsoft.com/office/drawing/2014/main" id="{87684D66-A286-4FDF-9F47-60EEC4FC24AC}"/>
               </a:ext>
             </a:extLst>
           </p:cNvPr>
@@ -13157,7 +13157,7 @@
           <p:cNvPr id="2" name="">
             <a:extLst xmlns:a="http://schemas.openxmlformats.org/drawingml/2006/main">
               <a:ext uri="{FF2B5EF4-FFF2-40B4-BE49-F238E27FC236}">
-                <a16:creationId xmlns:a16="http://schemas.microsoft.com/office/drawing/2014/main" id="{B485FCB5-8E73-4E7F-99C7-31B04BE04583}"/>
+                <a16:creationId xmlns:a16="http://schemas.microsoft.com/office/drawing/2014/main" id="{9A2A037C-24AA-434A-A158-38DEA8A996A9}"/>
               </a:ext>
             </a:extLst>
           </p:cNvPr>
@@ -13186,7 +13186,7 @@
           <p:cNvPr id="3" name="footer">
             <a:extLst xmlns:a="http://schemas.openxmlformats.org/drawingml/2006/main">
               <a:ext uri="{FF2B5EF4-FFF2-40B4-BE49-F238E27FC236}">
-                <a16:creationId xmlns:a16="http://schemas.microsoft.com/office/drawing/2014/main" id="{C54D99F1-E6DA-41E0-BE17-A0D4DA4BFBFB}"/>
+                <a16:creationId xmlns:a16="http://schemas.microsoft.com/office/drawing/2014/main" id="{06391D3E-329F-4751-A498-E71C2CAE45B9}"/>
               </a:ext>
             </a:extLst>
           </p:cNvPr>
@@ -13233,7 +13233,7 @@
                 <a:ea typeface="Arial"/>
                 <a:cs typeface="Arial"/>
               </a:rPr>
-              <a:t>§2.2.3 · Doeloefening 8 · Boekpagina 62</a:t>
+              <a:t>§2.2.3 · Doeloefening 8 · Boekpagina 63</a:t>
             </a:r>
           </a:p>
         </p:txBody>
@@ -13243,7 +13243,7 @@
           <p:cNvPr id="4" name="slide-number">
             <a:extLst xmlns:a="http://schemas.openxmlformats.org/drawingml/2006/main">
               <a:ext uri="{FF2B5EF4-FFF2-40B4-BE49-F238E27FC236}">
-                <a16:creationId xmlns:a16="http://schemas.microsoft.com/office/drawing/2014/main" id="{24FD0FD5-E48C-465A-8BAD-1F6B1756358C}"/>
+                <a16:creationId xmlns:a16="http://schemas.microsoft.com/office/drawing/2014/main" id="{DB8C1752-BC11-4D86-B8CD-78F62A947508}"/>
               </a:ext>
             </a:extLst>
           </p:cNvPr>
@@ -13300,7 +13300,7 @@
           <p:cNvPr id="5" name="De koffieprijs stijgt 10%. De vraag naar thee stijgt 4%; de ">
             <a:extLst xmlns:a="http://schemas.openxmlformats.org/drawingml/2006/main">
               <a:ext uri="{FF2B5EF4-FFF2-40B4-BE49-F238E27FC236}">
-                <a16:creationId xmlns:a16="http://schemas.microsoft.com/office/drawing/2014/main" id="{9158B25A-9C02-4FC7-8568-2CB17C218D2D}"/>
+                <a16:creationId xmlns:a16="http://schemas.microsoft.com/office/drawing/2014/main" id="{3BEF8AEA-C9F8-4433-93FD-CC453C8F208C}"/>
               </a:ext>
             </a:extLst>
           </p:cNvPr>
@@ -13357,7 +13357,7 @@
           <p:cNvPr id="6" name="">
             <a:extLst xmlns:a="http://schemas.openxmlformats.org/drawingml/2006/main">
               <a:ext uri="{FF2B5EF4-FFF2-40B4-BE49-F238E27FC236}">
-                <a16:creationId xmlns:a16="http://schemas.microsoft.com/office/drawing/2014/main" id="{18639AA5-A0CF-456B-92B8-BDCDD14A639E}"/>
+                <a16:creationId xmlns:a16="http://schemas.microsoft.com/office/drawing/2014/main" id="{BF784C3D-042E-4CD3-A070-9214462CDAA5}"/>
               </a:ext>
             </a:extLst>
           </p:cNvPr>
@@ -13386,7 +13386,7 @@
           <p:cNvPr id="7" name="c) Bereken met bron koffie Ek voor de vraag naar thee ten op">
             <a:extLst xmlns:a="http://schemas.openxmlformats.org/drawingml/2006/main">
               <a:ext uri="{FF2B5EF4-FFF2-40B4-BE49-F238E27FC236}">
-                <a16:creationId xmlns:a16="http://schemas.microsoft.com/office/drawing/2014/main" id="{0ACA0756-102E-464E-96FB-F9431BAAA51C}"/>
+                <a16:creationId xmlns:a16="http://schemas.microsoft.com/office/drawing/2014/main" id="{24419836-B8B9-4F90-A449-608050CF1294}"/>
               </a:ext>
             </a:extLst>
           </p:cNvPr>
@@ -13443,7 +13443,7 @@
           <p:cNvPr id="8" name="Noem teller- en noemergoed en classificeer de relaties. (4 p">
             <a:extLst xmlns:a="http://schemas.openxmlformats.org/drawingml/2006/main">
               <a:ext uri="{FF2B5EF4-FFF2-40B4-BE49-F238E27FC236}">
-                <a16:creationId xmlns:a16="http://schemas.microsoft.com/office/drawing/2014/main" id="{73089A13-47C1-4F28-8B42-1B8B1988DEBD}"/>
+                <a16:creationId xmlns:a16="http://schemas.microsoft.com/office/drawing/2014/main" id="{8D3450BF-4FDF-4A89-8BFD-B8645A23C23A}"/>
               </a:ext>
             </a:extLst>
           </p:cNvPr>
@@ -13498,7 +13498,7 @@
     </p:spTree>
     <p:extLst>
       <p:ext uri="{BB962C8B-B14F-4D97-AF65-F5344CB8AC3E}">
-        <p14:creationId xmlns:p14="http://schemas.microsoft.com/office/powerpoint/2010/main" val="701057943"/>
+        <p14:creationId xmlns:p14="http://schemas.microsoft.com/office/powerpoint/2010/main" val="2107810011"/>
       </p:ext>
     </p:extLst>
   </p:cSld>
@@ -13529,7 +13529,7 @@
           <p:cNvPr id="7" name="Lesdoelen · De veranderde factor bepaalt de noemer">
             <a:extLst xmlns:a="http://schemas.openxmlformats.org/drawingml/2006/main">
               <a:ext uri="{FF2B5EF4-FFF2-40B4-BE49-F238E27FC236}">
-                <a16:creationId xmlns:a16="http://schemas.microsoft.com/office/drawing/2014/main" id="{BF52304F-6F6C-4F26-AA07-24DA69667DCC}"/>
+                <a16:creationId xmlns:a16="http://schemas.microsoft.com/office/drawing/2014/main" id="{B2383E24-DBA1-4E3D-8390-33D07C19E579}"/>
               </a:ext>
             </a:extLst>
           </p:cNvPr>
@@ -13586,7 +13586,7 @@
           <p:cNvPr id="2" name="">
             <a:extLst xmlns:a="http://schemas.openxmlformats.org/drawingml/2006/main">
               <a:ext uri="{FF2B5EF4-FFF2-40B4-BE49-F238E27FC236}">
-                <a16:creationId xmlns:a16="http://schemas.microsoft.com/office/drawing/2014/main" id="{5B996A01-72D9-4D7D-B506-F09396EFADE6}"/>
+                <a16:creationId xmlns:a16="http://schemas.microsoft.com/office/drawing/2014/main" id="{5FDB7BBE-CDA5-4207-983B-D16C46106E13}"/>
               </a:ext>
             </a:extLst>
           </p:cNvPr>
@@ -13615,7 +13615,7 @@
           <p:cNvPr id="3" name="footer">
             <a:extLst xmlns:a="http://schemas.openxmlformats.org/drawingml/2006/main">
               <a:ext uri="{FF2B5EF4-FFF2-40B4-BE49-F238E27FC236}">
-                <a16:creationId xmlns:a16="http://schemas.microsoft.com/office/drawing/2014/main" id="{C38C6DEB-1525-4F62-9FA6-552C523AFFCC}"/>
+                <a16:creationId xmlns:a16="http://schemas.microsoft.com/office/drawing/2014/main" id="{76EA383D-BCCE-47FA-8E2F-7DE33619E243}"/>
               </a:ext>
             </a:extLst>
           </p:cNvPr>
@@ -13672,7 +13672,7 @@
           <p:cNvPr id="4" name="slide-number">
             <a:extLst xmlns:a="http://schemas.openxmlformats.org/drawingml/2006/main">
               <a:ext uri="{FF2B5EF4-FFF2-40B4-BE49-F238E27FC236}">
-                <a16:creationId xmlns:a16="http://schemas.microsoft.com/office/drawing/2014/main" id="{946377AA-A172-4DD7-AD95-3FB17B5C7319}"/>
+                <a16:creationId xmlns:a16="http://schemas.microsoft.com/office/drawing/2014/main" id="{4757C4AE-395F-47B6-823B-7C35CC7A6317}"/>
               </a:ext>
             </a:extLst>
           </p:cNvPr>
@@ -14048,7 +14048,7 @@
           <p:cNvPr id="6" name="Bij functies: één factor veranderen, de rest gelijk houden.">
             <a:extLst xmlns:a="http://schemas.openxmlformats.org/drawingml/2006/main">
               <a:ext uri="{FF2B5EF4-FFF2-40B4-BE49-F238E27FC236}">
-                <a16:creationId xmlns:a16="http://schemas.microsoft.com/office/drawing/2014/main" id="{986C76BF-F2A3-40B5-BF83-10E6A76DBD81}"/>
+                <a16:creationId xmlns:a16="http://schemas.microsoft.com/office/drawing/2014/main" id="{DAC67F47-3BC8-4970-83C7-01153C9EE57C}"/>
               </a:ext>
             </a:extLst>
           </p:cNvPr>
@@ -14103,7 +14103,7 @@
     </p:spTree>
     <p:extLst>
       <p:ext uri="{BB962C8B-B14F-4D97-AF65-F5344CB8AC3E}">
-        <p14:creationId xmlns:p14="http://schemas.microsoft.com/office/powerpoint/2010/main" val="444725623"/>
+        <p14:creationId xmlns:p14="http://schemas.microsoft.com/office/powerpoint/2010/main" val="1862870116"/>
       </p:ext>
     </p:extLst>
   </p:cSld>
@@ -14134,7 +14134,7 @@
           <p:cNvPr id="7" name="Opgave 8 · Bron functie">
             <a:extLst xmlns:a="http://schemas.openxmlformats.org/drawingml/2006/main">
               <a:ext uri="{FF2B5EF4-FFF2-40B4-BE49-F238E27FC236}">
-                <a16:creationId xmlns:a16="http://schemas.microsoft.com/office/drawing/2014/main" id="{65E9D09B-BFE9-4CC3-95E7-0215C42CB23F}"/>
+                <a16:creationId xmlns:a16="http://schemas.microsoft.com/office/drawing/2014/main" id="{3A9447AA-DFFE-47DD-AE42-A2CBBEDAEE10}"/>
               </a:ext>
             </a:extLst>
           </p:cNvPr>
@@ -14191,7 +14191,7 @@
           <p:cNvPr id="2" name="">
             <a:extLst xmlns:a="http://schemas.openxmlformats.org/drawingml/2006/main">
               <a:ext uri="{FF2B5EF4-FFF2-40B4-BE49-F238E27FC236}">
-                <a16:creationId xmlns:a16="http://schemas.microsoft.com/office/drawing/2014/main" id="{0B82367B-BBF3-420F-9F2E-83EC0A1DC6DD}"/>
+                <a16:creationId xmlns:a16="http://schemas.microsoft.com/office/drawing/2014/main" id="{53A83A2C-060F-484D-B24B-89C0B174578C}"/>
               </a:ext>
             </a:extLst>
           </p:cNvPr>
@@ -14220,7 +14220,7 @@
           <p:cNvPr id="3" name="footer">
             <a:extLst xmlns:a="http://schemas.openxmlformats.org/drawingml/2006/main">
               <a:ext uri="{FF2B5EF4-FFF2-40B4-BE49-F238E27FC236}">
-                <a16:creationId xmlns:a16="http://schemas.microsoft.com/office/drawing/2014/main" id="{7D008BD2-CC1C-42DF-AAFD-59975FA7BDC4}"/>
+                <a16:creationId xmlns:a16="http://schemas.microsoft.com/office/drawing/2014/main" id="{FDBAC856-F322-4ECB-B2DF-E28C01001002}"/>
               </a:ext>
             </a:extLst>
           </p:cNvPr>
@@ -14267,7 +14267,7 @@
                 <a:ea typeface="Arial"/>
                 <a:cs typeface="Arial"/>
               </a:rPr>
-              <a:t>§2.2.3 · Doeloefening 8 · Boekpagina 62</a:t>
+              <a:t>§2.2.3 · Doeloefening 8 · Boekpagina 63</a:t>
             </a:r>
           </a:p>
         </p:txBody>
@@ -14277,7 +14277,7 @@
           <p:cNvPr id="4" name="slide-number">
             <a:extLst xmlns:a="http://schemas.openxmlformats.org/drawingml/2006/main">
               <a:ext uri="{FF2B5EF4-FFF2-40B4-BE49-F238E27FC236}">
-                <a16:creationId xmlns:a16="http://schemas.microsoft.com/office/drawing/2014/main" id="{5C0DE16F-1D91-48E6-9D77-056C9CDE13E1}"/>
+                <a16:creationId xmlns:a16="http://schemas.microsoft.com/office/drawing/2014/main" id="{569970A2-E91A-4374-88D9-890305AFBED2}"/>
               </a:ext>
             </a:extLst>
           </p:cNvPr>
@@ -14334,7 +14334,7 @@
           <p:cNvPr id="5" name="Fitnessdienst X: Qx = 100 − 2Px + 0,5Pz + 0,01Y">
             <a:extLst xmlns:a="http://schemas.openxmlformats.org/drawingml/2006/main">
               <a:ext uri="{FF2B5EF4-FFF2-40B4-BE49-F238E27FC236}">
-                <a16:creationId xmlns:a16="http://schemas.microsoft.com/office/drawing/2014/main" id="{16360A84-9D5C-4E60-8E4E-02C1835D487B}"/>
+                <a16:creationId xmlns:a16="http://schemas.microsoft.com/office/drawing/2014/main" id="{2F21B548-AD76-4978-A3EB-F26F8DD878C0}"/>
               </a:ext>
             </a:extLst>
           </p:cNvPr>
@@ -14782,7 +14782,7 @@
     </p:spTree>
     <p:extLst>
       <p:ext uri="{BB962C8B-B14F-4D97-AF65-F5344CB8AC3E}">
-        <p14:creationId xmlns:p14="http://schemas.microsoft.com/office/powerpoint/2010/main" val="508287886"/>
+        <p14:creationId xmlns:p14="http://schemas.microsoft.com/office/powerpoint/2010/main" val="1997051074"/>
       </p:ext>
     </p:extLst>
   </p:cSld>
@@ -14813,7 +14813,7 @@
           <p:cNvPr id="8" name="Opgave 8 · Vragen d–e">
             <a:extLst xmlns:a="http://schemas.openxmlformats.org/drawingml/2006/main">
               <a:ext uri="{FF2B5EF4-FFF2-40B4-BE49-F238E27FC236}">
-                <a16:creationId xmlns:a16="http://schemas.microsoft.com/office/drawing/2014/main" id="{DF8502AB-3E34-481F-A8AE-3850CCF9AA97}"/>
+                <a16:creationId xmlns:a16="http://schemas.microsoft.com/office/drawing/2014/main" id="{187461C3-355E-4ECF-A22E-DA42AA113286}"/>
               </a:ext>
             </a:extLst>
           </p:cNvPr>
@@ -14870,7 +14870,7 @@
           <p:cNvPr id="2" name="">
             <a:extLst xmlns:a="http://schemas.openxmlformats.org/drawingml/2006/main">
               <a:ext uri="{FF2B5EF4-FFF2-40B4-BE49-F238E27FC236}">
-                <a16:creationId xmlns:a16="http://schemas.microsoft.com/office/drawing/2014/main" id="{CDD48F41-7B44-44DF-97FA-CF30101E09CE}"/>
+                <a16:creationId xmlns:a16="http://schemas.microsoft.com/office/drawing/2014/main" id="{57A4C677-E47C-4267-B328-53C6D07ECB19}"/>
               </a:ext>
             </a:extLst>
           </p:cNvPr>
@@ -14899,7 +14899,7 @@
           <p:cNvPr id="3" name="footer">
             <a:extLst xmlns:a="http://schemas.openxmlformats.org/drawingml/2006/main">
               <a:ext uri="{FF2B5EF4-FFF2-40B4-BE49-F238E27FC236}">
-                <a16:creationId xmlns:a16="http://schemas.microsoft.com/office/drawing/2014/main" id="{6F3C0D4E-5D76-4509-8A36-5657B6D32C33}"/>
+                <a16:creationId xmlns:a16="http://schemas.microsoft.com/office/drawing/2014/main" id="{C26FC2AD-CAC6-4720-BC1D-ED80A4014BC5}"/>
               </a:ext>
             </a:extLst>
           </p:cNvPr>
@@ -14946,7 +14946,7 @@
                 <a:ea typeface="Arial"/>
                 <a:cs typeface="Arial"/>
               </a:rPr>
-              <a:t>§2.2.3 · Doeloefening 8 · Boekpagina 62</a:t>
+              <a:t>§2.2.3 · Doeloefening 8 · Boekpagina 63</a:t>
             </a:r>
           </a:p>
         </p:txBody>
@@ -14956,7 +14956,7 @@
           <p:cNvPr id="4" name="slide-number">
             <a:extLst xmlns:a="http://schemas.openxmlformats.org/drawingml/2006/main">
               <a:ext uri="{FF2B5EF4-FFF2-40B4-BE49-F238E27FC236}">
-                <a16:creationId xmlns:a16="http://schemas.microsoft.com/office/drawing/2014/main" id="{79C31152-8627-4300-8226-3256BBF3DC4C}"/>
+                <a16:creationId xmlns:a16="http://schemas.microsoft.com/office/drawing/2014/main" id="{6451B29B-6EB2-421F-B436-F284895F9728}"/>
               </a:ext>
             </a:extLst>
           </p:cNvPr>
@@ -15013,7 +15013,7 @@
           <p:cNvPr id="5" name="d) Bereken Qx in de beginsituatie en nadat alleen Y stijgt n">
             <a:extLst xmlns:a="http://schemas.openxmlformats.org/drawingml/2006/main">
               <a:ext uri="{FF2B5EF4-FFF2-40B4-BE49-F238E27FC236}">
-                <a16:creationId xmlns:a16="http://schemas.microsoft.com/office/drawing/2014/main" id="{2C638C73-4FC9-4AC6-B3A7-7B92E46FD572}"/>
+                <a16:creationId xmlns:a16="http://schemas.microsoft.com/office/drawing/2014/main" id="{27DB70E0-25CF-48CF-B906-F236587DDE80}"/>
               </a:ext>
             </a:extLst>
           </p:cNvPr>
@@ -15070,7 +15070,7 @@
           <p:cNvPr id="6" name="">
             <a:extLst xmlns:a="http://schemas.openxmlformats.org/drawingml/2006/main">
               <a:ext uri="{FF2B5EF4-FFF2-40B4-BE49-F238E27FC236}">
-                <a16:creationId xmlns:a16="http://schemas.microsoft.com/office/drawing/2014/main" id="{421B9231-5E18-4460-BACE-F1DAD762DB33}"/>
+                <a16:creationId xmlns:a16="http://schemas.microsoft.com/office/drawing/2014/main" id="{8FC23E2A-240F-4FCD-B992-99DC2C5A4E85}"/>
               </a:ext>
             </a:extLst>
           </p:cNvPr>
@@ -15099,7 +15099,7 @@
           <p:cNvPr id="7" name="e) Zet Y terug op 30.000. Bereken Qx nadat alleen Pz stijgt ">
             <a:extLst xmlns:a="http://schemas.openxmlformats.org/drawingml/2006/main">
               <a:ext uri="{FF2B5EF4-FFF2-40B4-BE49-F238E27FC236}">
-                <a16:creationId xmlns:a16="http://schemas.microsoft.com/office/drawing/2014/main" id="{B8FC3D6D-3764-4B2E-9F4C-157320EC1164}"/>
+                <a16:creationId xmlns:a16="http://schemas.microsoft.com/office/drawing/2014/main" id="{79A91A5C-0544-4984-9C8B-2F5B8E9681AD}"/>
               </a:ext>
             </a:extLst>
           </p:cNvPr>
@@ -15154,7 +15154,7 @@
     </p:spTree>
     <p:extLst>
       <p:ext uri="{BB962C8B-B14F-4D97-AF65-F5344CB8AC3E}">
-        <p14:creationId xmlns:p14="http://schemas.microsoft.com/office/powerpoint/2010/main" val="453796184"/>
+        <p14:creationId xmlns:p14="http://schemas.microsoft.com/office/powerpoint/2010/main" val="589351506"/>
       </p:ext>
     </p:extLst>
   </p:cSld>
@@ -15185,7 +15185,7 @@
           <p:cNvPr id="8" name="Opgave 8a–b · Ei berekenen en goederen indelen">
             <a:extLst xmlns:a="http://schemas.openxmlformats.org/drawingml/2006/main">
               <a:ext uri="{FF2B5EF4-FFF2-40B4-BE49-F238E27FC236}">
-                <a16:creationId xmlns:a16="http://schemas.microsoft.com/office/drawing/2014/main" id="{EDF5DEF6-B27E-4B10-A55D-49FEA511700B}"/>
+                <a16:creationId xmlns:a16="http://schemas.microsoft.com/office/drawing/2014/main" id="{2E03FD2D-4459-4897-B060-276BDC914D36}"/>
               </a:ext>
             </a:extLst>
           </p:cNvPr>
@@ -15242,7 +15242,7 @@
           <p:cNvPr id="2" name="">
             <a:extLst xmlns:a="http://schemas.openxmlformats.org/drawingml/2006/main">
               <a:ext uri="{FF2B5EF4-FFF2-40B4-BE49-F238E27FC236}">
-                <a16:creationId xmlns:a16="http://schemas.microsoft.com/office/drawing/2014/main" id="{987A3FCA-30BD-41A7-B46E-CAD672633538}"/>
+                <a16:creationId xmlns:a16="http://schemas.microsoft.com/office/drawing/2014/main" id="{5F60F8C2-7700-4E44-B7F0-0AD4B52D6C15}"/>
               </a:ext>
             </a:extLst>
           </p:cNvPr>
@@ -15271,7 +15271,7 @@
           <p:cNvPr id="3" name="footer">
             <a:extLst xmlns:a="http://schemas.openxmlformats.org/drawingml/2006/main">
               <a:ext uri="{FF2B5EF4-FFF2-40B4-BE49-F238E27FC236}">
-                <a16:creationId xmlns:a16="http://schemas.microsoft.com/office/drawing/2014/main" id="{E77A04E7-FFA7-4D93-B884-973885465850}"/>
+                <a16:creationId xmlns:a16="http://schemas.microsoft.com/office/drawing/2014/main" id="{C94E9458-FFDD-4D48-AB5A-71861938AB43}"/>
               </a:ext>
             </a:extLst>
           </p:cNvPr>
@@ -15318,7 +15318,7 @@
                 <a:ea typeface="Arial"/>
                 <a:cs typeface="Arial"/>
               </a:rPr>
-              <a:t>§2.2.3 · Opgave 8a–b · Boekpagina 62</a:t>
+              <a:t>§2.2.3 · Opgave 8a–b · Boekpagina 63</a:t>
             </a:r>
           </a:p>
         </p:txBody>
@@ -15328,7 +15328,7 @@
           <p:cNvPr id="4" name="slide-number">
             <a:extLst xmlns:a="http://schemas.openxmlformats.org/drawingml/2006/main">
               <a:ext uri="{FF2B5EF4-FFF2-40B4-BE49-F238E27FC236}">
-                <a16:creationId xmlns:a16="http://schemas.microsoft.com/office/drawing/2014/main" id="{CD11D0CB-AD97-4E2F-BF35-2C19B367559B}"/>
+                <a16:creationId xmlns:a16="http://schemas.microsoft.com/office/drawing/2014/main" id="{023540D8-4886-41F5-A4B0-E3E79C8B049A}"/>
               </a:ext>
             </a:extLst>
           </p:cNvPr>
@@ -15385,7 +15385,7 @@
           <p:cNvPr id="5" name="Ei = %ΔQv / %ΔY">
             <a:extLst xmlns:a="http://schemas.openxmlformats.org/drawingml/2006/main">
               <a:ext uri="{FF2B5EF4-FFF2-40B4-BE49-F238E27FC236}">
-                <a16:creationId xmlns:a16="http://schemas.microsoft.com/office/drawing/2014/main" id="{72AFBD17-6A13-49DE-81A5-E3806AA5E41C}"/>
+                <a16:creationId xmlns:a16="http://schemas.microsoft.com/office/drawing/2014/main" id="{6FA9AEBE-09B7-4026-AC3D-6279930625B5}"/>
               </a:ext>
             </a:extLst>
           </p:cNvPr>
@@ -15687,7 +15687,7 @@
           <p:cNvPr id="7" name="Maaltijdpakketten: Qv groeit procentueel sterker dan Y.&#10;Budg">
             <a:extLst xmlns:a="http://schemas.openxmlformats.org/drawingml/2006/main">
               <a:ext uri="{FF2B5EF4-FFF2-40B4-BE49-F238E27FC236}">
-                <a16:creationId xmlns:a16="http://schemas.microsoft.com/office/drawing/2014/main" id="{06F50D1A-15F4-4B75-85B1-CE5BDCAE8C87}"/>
+                <a16:creationId xmlns:a16="http://schemas.microsoft.com/office/drawing/2014/main" id="{679E13BF-88E0-4C11-AC8D-E747AE970EAD}"/>
               </a:ext>
             </a:extLst>
           </p:cNvPr>
@@ -15765,7 +15765,7 @@
     </p:spTree>
     <p:extLst>
       <p:ext uri="{BB962C8B-B14F-4D97-AF65-F5344CB8AC3E}">
-        <p14:creationId xmlns:p14="http://schemas.microsoft.com/office/powerpoint/2010/main" val="307362094"/>
+        <p14:creationId xmlns:p14="http://schemas.microsoft.com/office/powerpoint/2010/main" val="407273624"/>
       </p:ext>
     </p:extLst>
   </p:cSld>
@@ -15796,7 +15796,7 @@
           <p:cNvPr id="9" name="Opgave 8c · Thee ten opzichte van koffie">
             <a:extLst xmlns:a="http://schemas.openxmlformats.org/drawingml/2006/main">
               <a:ext uri="{FF2B5EF4-FFF2-40B4-BE49-F238E27FC236}">
-                <a16:creationId xmlns:a16="http://schemas.microsoft.com/office/drawing/2014/main" id="{01AEC64A-AEBA-4A47-B50F-70FFB2B02B1A}"/>
+                <a16:creationId xmlns:a16="http://schemas.microsoft.com/office/drawing/2014/main" id="{332951ED-E4C5-45D9-8330-79EB130F9A5C}"/>
               </a:ext>
             </a:extLst>
           </p:cNvPr>
@@ -15853,7 +15853,7 @@
           <p:cNvPr id="2" name="">
             <a:extLst xmlns:a="http://schemas.openxmlformats.org/drawingml/2006/main">
               <a:ext uri="{FF2B5EF4-FFF2-40B4-BE49-F238E27FC236}">
-                <a16:creationId xmlns:a16="http://schemas.microsoft.com/office/drawing/2014/main" id="{660E9DBE-FBB5-4A6C-886F-52E5997EE720}"/>
+                <a16:creationId xmlns:a16="http://schemas.microsoft.com/office/drawing/2014/main" id="{73BBD02F-BCC9-4B67-99AC-FDAD610F5660}"/>
               </a:ext>
             </a:extLst>
           </p:cNvPr>
@@ -15882,7 +15882,7 @@
           <p:cNvPr id="3" name="footer">
             <a:extLst xmlns:a="http://schemas.openxmlformats.org/drawingml/2006/main">
               <a:ext uri="{FF2B5EF4-FFF2-40B4-BE49-F238E27FC236}">
-                <a16:creationId xmlns:a16="http://schemas.microsoft.com/office/drawing/2014/main" id="{17CE4414-EA4F-426A-B420-DCDC4B5B1056}"/>
+                <a16:creationId xmlns:a16="http://schemas.microsoft.com/office/drawing/2014/main" id="{6C79B62A-5DD3-4AAA-BC3D-C23536E7BBEA}"/>
               </a:ext>
             </a:extLst>
           </p:cNvPr>
@@ -15929,7 +15929,7 @@
                 <a:ea typeface="Arial"/>
                 <a:cs typeface="Arial"/>
               </a:rPr>
-              <a:t>§2.2.3 · Opgave 8c · Boekpagina 62</a:t>
+              <a:t>§2.2.3 · Opgave 8c · Boekpagina 63</a:t>
             </a:r>
           </a:p>
         </p:txBody>
@@ -15939,7 +15939,7 @@
           <p:cNvPr id="4" name="slide-number">
             <a:extLst xmlns:a="http://schemas.openxmlformats.org/drawingml/2006/main">
               <a:ext uri="{FF2B5EF4-FFF2-40B4-BE49-F238E27FC236}">
-                <a16:creationId xmlns:a16="http://schemas.microsoft.com/office/drawing/2014/main" id="{A589DF5D-EC29-4DEA-B9A7-1D0527456DE3}"/>
+                <a16:creationId xmlns:a16="http://schemas.microsoft.com/office/drawing/2014/main" id="{37D922D2-A920-4C44-9DC4-D1C244F245E3}"/>
               </a:ext>
             </a:extLst>
           </p:cNvPr>
@@ -16118,7 +16118,7 @@
           <p:cNvPr id="6" name="Ek = %ΔQ thee / %ΔP koffie">
             <a:extLst xmlns:a="http://schemas.openxmlformats.org/drawingml/2006/main">
               <a:ext uri="{FF2B5EF4-FFF2-40B4-BE49-F238E27FC236}">
-                <a16:creationId xmlns:a16="http://schemas.microsoft.com/office/drawing/2014/main" id="{41EA10B2-E768-411C-9B00-BAE9366F1B14}"/>
+                <a16:creationId xmlns:a16="http://schemas.microsoft.com/office/drawing/2014/main" id="{BF79FE1E-4810-41BB-A049-08F72F383A98}"/>
               </a:ext>
             </a:extLst>
           </p:cNvPr>
@@ -16175,7 +16175,7 @@
           <p:cNvPr id="7" name="Ek = +4% / +10% = +0,4">
             <a:extLst xmlns:a="http://schemas.openxmlformats.org/drawingml/2006/main">
               <a:ext uri="{FF2B5EF4-FFF2-40B4-BE49-F238E27FC236}">
-                <a16:creationId xmlns:a16="http://schemas.microsoft.com/office/drawing/2014/main" id="{09E9E446-288E-41D9-A62F-D78590EF38F0}"/>
+                <a16:creationId xmlns:a16="http://schemas.microsoft.com/office/drawing/2014/main" id="{4579D7B7-4AE4-4621-9332-D05E4A2449C0}"/>
               </a:ext>
             </a:extLst>
           </p:cNvPr>
@@ -16232,7 +16232,7 @@
           <p:cNvPr id="8" name="Substituten: duurdere koffie → meer vraag naar thee.">
             <a:extLst xmlns:a="http://schemas.openxmlformats.org/drawingml/2006/main">
               <a:ext uri="{FF2B5EF4-FFF2-40B4-BE49-F238E27FC236}">
-                <a16:creationId xmlns:a16="http://schemas.microsoft.com/office/drawing/2014/main" id="{04267B52-9985-45A2-B068-8B8530020770}"/>
+                <a16:creationId xmlns:a16="http://schemas.microsoft.com/office/drawing/2014/main" id="{00921178-4A3B-49AB-9F1D-7B91239C73B9}"/>
               </a:ext>
             </a:extLst>
           </p:cNvPr>
@@ -16287,7 +16287,7 @@
     </p:spTree>
     <p:extLst>
       <p:ext uri="{BB962C8B-B14F-4D97-AF65-F5344CB8AC3E}">
-        <p14:creationId xmlns:p14="http://schemas.microsoft.com/office/powerpoint/2010/main" val="896868215"/>
+        <p14:creationId xmlns:p14="http://schemas.microsoft.com/office/powerpoint/2010/main" val="1543264192"/>
       </p:ext>
     </p:extLst>
   </p:cSld>
@@ -16318,7 +16318,7 @@
           <p:cNvPr id="9" name="Opgave 8c · Koffiefilters ten opzichte van koffie">
             <a:extLst xmlns:a="http://schemas.openxmlformats.org/drawingml/2006/main">
               <a:ext uri="{FF2B5EF4-FFF2-40B4-BE49-F238E27FC236}">
-                <a16:creationId xmlns:a16="http://schemas.microsoft.com/office/drawing/2014/main" id="{1BFDBDBD-5BE7-422C-A722-754FBDDD91E7}"/>
+                <a16:creationId xmlns:a16="http://schemas.microsoft.com/office/drawing/2014/main" id="{A669A1A0-FC6A-4F6E-B8D9-090CE67375DE}"/>
               </a:ext>
             </a:extLst>
           </p:cNvPr>
@@ -16375,7 +16375,7 @@
           <p:cNvPr id="2" name="">
             <a:extLst xmlns:a="http://schemas.openxmlformats.org/drawingml/2006/main">
               <a:ext uri="{FF2B5EF4-FFF2-40B4-BE49-F238E27FC236}">
-                <a16:creationId xmlns:a16="http://schemas.microsoft.com/office/drawing/2014/main" id="{7FD9362C-AC79-47C4-9B27-A49B02D14AC6}"/>
+                <a16:creationId xmlns:a16="http://schemas.microsoft.com/office/drawing/2014/main" id="{28A74491-59A1-4FA2-8ECC-32DCBDCF0FF7}"/>
               </a:ext>
             </a:extLst>
           </p:cNvPr>
@@ -16404,7 +16404,7 @@
           <p:cNvPr id="3" name="footer">
             <a:extLst xmlns:a="http://schemas.openxmlformats.org/drawingml/2006/main">
               <a:ext uri="{FF2B5EF4-FFF2-40B4-BE49-F238E27FC236}">
-                <a16:creationId xmlns:a16="http://schemas.microsoft.com/office/drawing/2014/main" id="{00E7ED5E-F5BB-4646-B782-F7CD332C2C6A}"/>
+                <a16:creationId xmlns:a16="http://schemas.microsoft.com/office/drawing/2014/main" id="{C95C5C9C-5935-4A11-92C7-8864DD55571E}"/>
               </a:ext>
             </a:extLst>
           </p:cNvPr>
@@ -16451,7 +16451,7 @@
                 <a:ea typeface="Arial"/>
                 <a:cs typeface="Arial"/>
               </a:rPr>
-              <a:t>§2.2.3 · Opgave 8c · Boekpagina 62</a:t>
+              <a:t>§2.2.3 · Opgave 8c · Boekpagina 63</a:t>
             </a:r>
           </a:p>
         </p:txBody>
@@ -16461,7 +16461,7 @@
           <p:cNvPr id="4" name="slide-number">
             <a:extLst xmlns:a="http://schemas.openxmlformats.org/drawingml/2006/main">
               <a:ext uri="{FF2B5EF4-FFF2-40B4-BE49-F238E27FC236}">
-                <a16:creationId xmlns:a16="http://schemas.microsoft.com/office/drawing/2014/main" id="{20A97EDA-F83E-4993-8CD0-45A9F7350DAF}"/>
+                <a16:creationId xmlns:a16="http://schemas.microsoft.com/office/drawing/2014/main" id="{0CE3A2F3-0A54-48EF-9AC5-CAFA813181FB}"/>
               </a:ext>
             </a:extLst>
           </p:cNvPr>
@@ -16640,7 +16640,7 @@
           <p:cNvPr id="6" name="Ek = %ΔQ koffiefilters / %ΔP koffie">
             <a:extLst xmlns:a="http://schemas.openxmlformats.org/drawingml/2006/main">
               <a:ext uri="{FF2B5EF4-FFF2-40B4-BE49-F238E27FC236}">
-                <a16:creationId xmlns:a16="http://schemas.microsoft.com/office/drawing/2014/main" id="{1E8B4FB9-BFAD-4037-9763-3790715F53BE}"/>
+                <a16:creationId xmlns:a16="http://schemas.microsoft.com/office/drawing/2014/main" id="{94F91E5B-6792-4E7F-B370-8B82A5F6677A}"/>
               </a:ext>
             </a:extLst>
           </p:cNvPr>
@@ -16697,7 +16697,7 @@
           <p:cNvPr id="7" name="Ek = −6% / +10% = −0,6">
             <a:extLst xmlns:a="http://schemas.openxmlformats.org/drawingml/2006/main">
               <a:ext uri="{FF2B5EF4-FFF2-40B4-BE49-F238E27FC236}">
-                <a16:creationId xmlns:a16="http://schemas.microsoft.com/office/drawing/2014/main" id="{B4755224-6895-4CB0-8EBC-BD0142E32834}"/>
+                <a16:creationId xmlns:a16="http://schemas.microsoft.com/office/drawing/2014/main" id="{5CC7D245-A5BC-4A56-AF89-9FB2BA406547}"/>
               </a:ext>
             </a:extLst>
           </p:cNvPr>
@@ -16754,7 +16754,7 @@
           <p:cNvPr id="8" name="Complementen: duurdere koffie → minder vraag naar filters.">
             <a:extLst xmlns:a="http://schemas.openxmlformats.org/drawingml/2006/main">
               <a:ext uri="{FF2B5EF4-FFF2-40B4-BE49-F238E27FC236}">
-                <a16:creationId xmlns:a16="http://schemas.microsoft.com/office/drawing/2014/main" id="{9742D815-EC62-4080-9158-27066859CA74}"/>
+                <a16:creationId xmlns:a16="http://schemas.microsoft.com/office/drawing/2014/main" id="{BB141F17-B26C-4E16-9A21-4B202A7C6557}"/>
               </a:ext>
             </a:extLst>
           </p:cNvPr>
@@ -16809,7 +16809,7 @@
     </p:spTree>
     <p:extLst>
       <p:ext uri="{BB962C8B-B14F-4D97-AF65-F5344CB8AC3E}">
-        <p14:creationId xmlns:p14="http://schemas.microsoft.com/office/powerpoint/2010/main" val="1676191368"/>
+        <p14:creationId xmlns:p14="http://schemas.microsoft.com/office/powerpoint/2010/main" val="1858022489"/>
       </p:ext>
     </p:extLst>
   </p:cSld>
@@ -16840,7 +16840,7 @@
           <p:cNvPr id="10" name="Opgave 8d · Fitness in de beginsituatie">
             <a:extLst xmlns:a="http://schemas.openxmlformats.org/drawingml/2006/main">
               <a:ext uri="{FF2B5EF4-FFF2-40B4-BE49-F238E27FC236}">
-                <a16:creationId xmlns:a16="http://schemas.microsoft.com/office/drawing/2014/main" id="{A3837146-8F2B-4695-8B2F-C676CC575FDA}"/>
+                <a16:creationId xmlns:a16="http://schemas.microsoft.com/office/drawing/2014/main" id="{2072AFCD-0FE2-4350-8C2C-F7A722EF2A7B}"/>
               </a:ext>
             </a:extLst>
           </p:cNvPr>
@@ -16897,7 +16897,7 @@
           <p:cNvPr id="2" name="">
             <a:extLst xmlns:a="http://schemas.openxmlformats.org/drawingml/2006/main">
               <a:ext uri="{FF2B5EF4-FFF2-40B4-BE49-F238E27FC236}">
-                <a16:creationId xmlns:a16="http://schemas.microsoft.com/office/drawing/2014/main" id="{5B57AF87-ADD7-4FBE-AEB4-0C1199735997}"/>
+                <a16:creationId xmlns:a16="http://schemas.microsoft.com/office/drawing/2014/main" id="{A8882CC9-C529-4FAC-A1AF-4A358B0A0AFB}"/>
               </a:ext>
             </a:extLst>
           </p:cNvPr>
@@ -16926,7 +16926,7 @@
           <p:cNvPr id="3" name="footer">
             <a:extLst xmlns:a="http://schemas.openxmlformats.org/drawingml/2006/main">
               <a:ext uri="{FF2B5EF4-FFF2-40B4-BE49-F238E27FC236}">
-                <a16:creationId xmlns:a16="http://schemas.microsoft.com/office/drawing/2014/main" id="{B38597E1-002A-4A84-853B-5F4DB2A96026}"/>
+                <a16:creationId xmlns:a16="http://schemas.microsoft.com/office/drawing/2014/main" id="{F09E5F00-200E-4634-8342-1CE323B3442A}"/>
               </a:ext>
             </a:extLst>
           </p:cNvPr>
@@ -16973,7 +16973,7 @@
                 <a:ea typeface="Arial"/>
                 <a:cs typeface="Arial"/>
               </a:rPr>
-              <a:t>§2.2.3 · Opgave 8d · Boekpagina 62</a:t>
+              <a:t>§2.2.3 · Opgave 8d · Boekpagina 63</a:t>
             </a:r>
           </a:p>
         </p:txBody>
@@ -16983,7 +16983,7 @@
           <p:cNvPr id="4" name="slide-number">
             <a:extLst xmlns:a="http://schemas.openxmlformats.org/drawingml/2006/main">
               <a:ext uri="{FF2B5EF4-FFF2-40B4-BE49-F238E27FC236}">
-                <a16:creationId xmlns:a16="http://schemas.microsoft.com/office/drawing/2014/main" id="{55D6FAC9-49E5-4F66-958C-76F2D643B643}"/>
+                <a16:creationId xmlns:a16="http://schemas.microsoft.com/office/drawing/2014/main" id="{03318F5E-643D-4497-9E07-B3EF8EE8DF43}"/>
               </a:ext>
             </a:extLst>
           </p:cNvPr>
@@ -17040,7 +17040,7 @@
           <p:cNvPr id="5" name="Qx = 100 − 2Px + 0,5Pz + 0,01Y">
             <a:extLst xmlns:a="http://schemas.openxmlformats.org/drawingml/2006/main">
               <a:ext uri="{FF2B5EF4-FFF2-40B4-BE49-F238E27FC236}">
-                <a16:creationId xmlns:a16="http://schemas.microsoft.com/office/drawing/2014/main" id="{EDEE66BA-DE8B-4EB7-906D-5DC7C34EBAED}"/>
+                <a16:creationId xmlns:a16="http://schemas.microsoft.com/office/drawing/2014/main" id="{F535D284-19AE-4F5D-9CB7-5099F3E7C5E0}"/>
               </a:ext>
             </a:extLst>
           </p:cNvPr>
@@ -17097,7 +17097,7 @@
           <p:cNvPr id="6" name="Px = 10 · Pz = 20 · Y = 30.000">
             <a:extLst xmlns:a="http://schemas.openxmlformats.org/drawingml/2006/main">
               <a:ext uri="{FF2B5EF4-FFF2-40B4-BE49-F238E27FC236}">
-                <a16:creationId xmlns:a16="http://schemas.microsoft.com/office/drawing/2014/main" id="{7760ED01-E114-49A0-9731-EBF7C350A738}"/>
+                <a16:creationId xmlns:a16="http://schemas.microsoft.com/office/drawing/2014/main" id="{DD94078C-8A5F-4A6F-A63A-DBF1A060E371}"/>
               </a:ext>
             </a:extLst>
           </p:cNvPr>
@@ -17154,7 +17154,7 @@
           <p:cNvPr id="7" name="Qx oud = 100 − 2 × 10 + 0,5 × 20 + 0,01 × 30.000">
             <a:extLst xmlns:a="http://schemas.openxmlformats.org/drawingml/2006/main">
               <a:ext uri="{FF2B5EF4-FFF2-40B4-BE49-F238E27FC236}">
-                <a16:creationId xmlns:a16="http://schemas.microsoft.com/office/drawing/2014/main" id="{642361B0-715F-46F9-9C00-FEF63CF2F823}"/>
+                <a16:creationId xmlns:a16="http://schemas.microsoft.com/office/drawing/2014/main" id="{5EF1B421-16F1-4262-AEA0-938490AB0E1C}"/>
               </a:ext>
             </a:extLst>
           </p:cNvPr>
@@ -17211,7 +17211,7 @@
           <p:cNvPr id="8" name="= 100 − 20 + 10 + 300">
             <a:extLst xmlns:a="http://schemas.openxmlformats.org/drawingml/2006/main">
               <a:ext uri="{FF2B5EF4-FFF2-40B4-BE49-F238E27FC236}">
-                <a16:creationId xmlns:a16="http://schemas.microsoft.com/office/drawing/2014/main" id="{B57A8D47-C0F3-49FF-AADC-99FBB0A56D66}"/>
+                <a16:creationId xmlns:a16="http://schemas.microsoft.com/office/drawing/2014/main" id="{81C6ED93-E707-4FAC-A96D-16F88D57919E}"/>
               </a:ext>
             </a:extLst>
           </p:cNvPr>
@@ -17268,7 +17268,7 @@
           <p:cNvPr id="9" name="= 390 abonnementen per maand">
             <a:extLst xmlns:a="http://schemas.openxmlformats.org/drawingml/2006/main">
               <a:ext uri="{FF2B5EF4-FFF2-40B4-BE49-F238E27FC236}">
-                <a16:creationId xmlns:a16="http://schemas.microsoft.com/office/drawing/2014/main" id="{012D9547-991A-4D41-BAEB-90B0C2BA3064}"/>
+                <a16:creationId xmlns:a16="http://schemas.microsoft.com/office/drawing/2014/main" id="{D61EEB09-BF99-48CB-B036-2F8A64AEA07E}"/>
               </a:ext>
             </a:extLst>
           </p:cNvPr>
@@ -17323,7 +17323,7 @@
     </p:spTree>
     <p:extLst>
       <p:ext uri="{BB962C8B-B14F-4D97-AF65-F5344CB8AC3E}">
-        <p14:creationId xmlns:p14="http://schemas.microsoft.com/office/powerpoint/2010/main" val="1616805740"/>
+        <p14:creationId xmlns:p14="http://schemas.microsoft.com/office/powerpoint/2010/main" val="2143180436"/>
       </p:ext>
     </p:extLst>
   </p:cSld>
@@ -17354,7 +17354,7 @@
           <p:cNvPr id="10" name="Opgave 8d · Alleen Y stijgt naar 33.000">
             <a:extLst xmlns:a="http://schemas.openxmlformats.org/drawingml/2006/main">
               <a:ext uri="{FF2B5EF4-FFF2-40B4-BE49-F238E27FC236}">
-                <a16:creationId xmlns:a16="http://schemas.microsoft.com/office/drawing/2014/main" id="{C26FE2C6-19AE-4C98-8FE0-5EB49E3B3765}"/>
+                <a16:creationId xmlns:a16="http://schemas.microsoft.com/office/drawing/2014/main" id="{AD33F8CB-BF22-4D8E-9ED0-CE085BDFBAF8}"/>
               </a:ext>
             </a:extLst>
           </p:cNvPr>
@@ -17411,7 +17411,7 @@
           <p:cNvPr id="2" name="">
             <a:extLst xmlns:a="http://schemas.openxmlformats.org/drawingml/2006/main">
               <a:ext uri="{FF2B5EF4-FFF2-40B4-BE49-F238E27FC236}">
-                <a16:creationId xmlns:a16="http://schemas.microsoft.com/office/drawing/2014/main" id="{65C1E766-F9CB-43C7-8FA0-EC70B020B19E}"/>
+                <a16:creationId xmlns:a16="http://schemas.microsoft.com/office/drawing/2014/main" id="{3D222719-1233-4D4B-A224-7BECF92F2874}"/>
               </a:ext>
             </a:extLst>
           </p:cNvPr>
@@ -17440,7 +17440,7 @@
           <p:cNvPr id="3" name="footer">
             <a:extLst xmlns:a="http://schemas.openxmlformats.org/drawingml/2006/main">
               <a:ext uri="{FF2B5EF4-FFF2-40B4-BE49-F238E27FC236}">
-                <a16:creationId xmlns:a16="http://schemas.microsoft.com/office/drawing/2014/main" id="{C522FA83-5A27-4E8B-9217-F9DB3852A31B}"/>
+                <a16:creationId xmlns:a16="http://schemas.microsoft.com/office/drawing/2014/main" id="{541C6AD5-F5D4-4B95-90F4-0C7B6F8EFF5F}"/>
               </a:ext>
             </a:extLst>
           </p:cNvPr>
@@ -17487,7 +17487,7 @@
                 <a:ea typeface="Arial"/>
                 <a:cs typeface="Arial"/>
               </a:rPr>
-              <a:t>§2.2.3 · Opgave 8d · Boekpagina 62</a:t>
+              <a:t>§2.2.3 · Opgave 8d · Boekpagina 63</a:t>
             </a:r>
           </a:p>
         </p:txBody>
@@ -17497,7 +17497,7 @@
           <p:cNvPr id="4" name="slide-number">
             <a:extLst xmlns:a="http://schemas.openxmlformats.org/drawingml/2006/main">
               <a:ext uri="{FF2B5EF4-FFF2-40B4-BE49-F238E27FC236}">
-                <a16:creationId xmlns:a16="http://schemas.microsoft.com/office/drawing/2014/main" id="{AFE1399A-3E74-4800-AD65-E2C2AD48E18A}"/>
+                <a16:creationId xmlns:a16="http://schemas.microsoft.com/office/drawing/2014/main" id="{A08F746D-0B54-4FAD-9DEA-ADDF6E20FCA6}"/>
               </a:ext>
             </a:extLst>
           </p:cNvPr>
@@ -17554,7 +17554,7 @@
           <p:cNvPr id="5" name="Px = 10 en Pz = 20 blijven gelijk.">
             <a:extLst xmlns:a="http://schemas.openxmlformats.org/drawingml/2006/main">
               <a:ext uri="{FF2B5EF4-FFF2-40B4-BE49-F238E27FC236}">
-                <a16:creationId xmlns:a16="http://schemas.microsoft.com/office/drawing/2014/main" id="{271CA4E1-4A00-449E-BA7F-BBBECEB9C691}"/>
+                <a16:creationId xmlns:a16="http://schemas.microsoft.com/office/drawing/2014/main" id="{822A2A92-1FCF-4BA5-85E4-175E70802B42}"/>
               </a:ext>
             </a:extLst>
           </p:cNvPr>
@@ -17611,7 +17611,7 @@
           <p:cNvPr id="6" name="Qx nieuw = 100 − 2 × 10 + 0,5 × 20 + 0,01 × 33.000">
             <a:extLst xmlns:a="http://schemas.openxmlformats.org/drawingml/2006/main">
               <a:ext uri="{FF2B5EF4-FFF2-40B4-BE49-F238E27FC236}">
-                <a16:creationId xmlns:a16="http://schemas.microsoft.com/office/drawing/2014/main" id="{8F699141-407C-4B75-85D2-1C715C008324}"/>
+                <a16:creationId xmlns:a16="http://schemas.microsoft.com/office/drawing/2014/main" id="{B6FA87F1-D757-4309-9A92-3208DF7FF55D}"/>
               </a:ext>
             </a:extLst>
           </p:cNvPr>
@@ -17668,7 +17668,7 @@
           <p:cNvPr id="7" name="= 100 − 20 + 10 + 330">
             <a:extLst xmlns:a="http://schemas.openxmlformats.org/drawingml/2006/main">
               <a:ext uri="{FF2B5EF4-FFF2-40B4-BE49-F238E27FC236}">
-                <a16:creationId xmlns:a16="http://schemas.microsoft.com/office/drawing/2014/main" id="{AB779298-F6C6-41F6-B894-9DECB4D266C9}"/>
+                <a16:creationId xmlns:a16="http://schemas.microsoft.com/office/drawing/2014/main" id="{FB4EC972-0F2F-41C0-B430-E7E0E463E641}"/>
               </a:ext>
             </a:extLst>
           </p:cNvPr>
@@ -17725,7 +17725,7 @@
           <p:cNvPr id="8" name="= 420 abonnementen per maand">
             <a:extLst xmlns:a="http://schemas.openxmlformats.org/drawingml/2006/main">
               <a:ext uri="{FF2B5EF4-FFF2-40B4-BE49-F238E27FC236}">
-                <a16:creationId xmlns:a16="http://schemas.microsoft.com/office/drawing/2014/main" id="{23272ED7-4A22-4E31-8D4F-219B13F8648C}"/>
+                <a16:creationId xmlns:a16="http://schemas.microsoft.com/office/drawing/2014/main" id="{95025800-4EFF-4EE1-BC1E-C14FAB3D6781}"/>
               </a:ext>
             </a:extLst>
           </p:cNvPr>
@@ -17782,7 +17782,7 @@
           <p:cNvPr id="9" name="Qx stijgt met 420 − 390 = 30 abonnementen per maand.">
             <a:extLst xmlns:a="http://schemas.openxmlformats.org/drawingml/2006/main">
               <a:ext uri="{FF2B5EF4-FFF2-40B4-BE49-F238E27FC236}">
-                <a16:creationId xmlns:a16="http://schemas.microsoft.com/office/drawing/2014/main" id="{B920D82C-11A9-4440-B851-691D3549539F}"/>
+                <a16:creationId xmlns:a16="http://schemas.microsoft.com/office/drawing/2014/main" id="{64898B90-F1B9-466F-A086-D086C99C2B53}"/>
               </a:ext>
             </a:extLst>
           </p:cNvPr>
@@ -17837,7 +17837,7 @@
     </p:spTree>
     <p:extLst>
       <p:ext uri="{BB962C8B-B14F-4D97-AF65-F5344CB8AC3E}">
-        <p14:creationId xmlns:p14="http://schemas.microsoft.com/office/powerpoint/2010/main" val="1327308952"/>
+        <p14:creationId xmlns:p14="http://schemas.microsoft.com/office/powerpoint/2010/main" val="2059387350"/>
       </p:ext>
     </p:extLst>
   </p:cSld>
@@ -17868,7 +17868,7 @@
           <p:cNvPr id="9" name="Opgave 8d · Procenten, Ei en betekenis">
             <a:extLst xmlns:a="http://schemas.openxmlformats.org/drawingml/2006/main">
               <a:ext uri="{FF2B5EF4-FFF2-40B4-BE49-F238E27FC236}">
-                <a16:creationId xmlns:a16="http://schemas.microsoft.com/office/drawing/2014/main" id="{3CDDDC1C-8273-4292-80B1-4E8DFBA8B0CC}"/>
+                <a16:creationId xmlns:a16="http://schemas.microsoft.com/office/drawing/2014/main" id="{69BE69DA-BA6A-45B6-B091-A08FBFC293B0}"/>
               </a:ext>
             </a:extLst>
           </p:cNvPr>
@@ -17925,7 +17925,7 @@
           <p:cNvPr id="2" name="">
             <a:extLst xmlns:a="http://schemas.openxmlformats.org/drawingml/2006/main">
               <a:ext uri="{FF2B5EF4-FFF2-40B4-BE49-F238E27FC236}">
-                <a16:creationId xmlns:a16="http://schemas.microsoft.com/office/drawing/2014/main" id="{D09A6CA6-2C62-4F61-A6E0-1CFE27071973}"/>
+                <a16:creationId xmlns:a16="http://schemas.microsoft.com/office/drawing/2014/main" id="{78C9D575-CC62-41D0-8627-C43076A00F73}"/>
               </a:ext>
             </a:extLst>
           </p:cNvPr>
@@ -17954,7 +17954,7 @@
           <p:cNvPr id="3" name="footer">
             <a:extLst xmlns:a="http://schemas.openxmlformats.org/drawingml/2006/main">
               <a:ext uri="{FF2B5EF4-FFF2-40B4-BE49-F238E27FC236}">
-                <a16:creationId xmlns:a16="http://schemas.microsoft.com/office/drawing/2014/main" id="{C3219022-9E74-4FED-90F4-F1DD24DF4572}"/>
+                <a16:creationId xmlns:a16="http://schemas.microsoft.com/office/drawing/2014/main" id="{2018E90D-2099-4A19-BBC3-642CEE8BFBD4}"/>
               </a:ext>
             </a:extLst>
           </p:cNvPr>
@@ -18001,7 +18001,7 @@
                 <a:ea typeface="Arial"/>
                 <a:cs typeface="Arial"/>
               </a:rPr>
-              <a:t>§2.2.3 · Opgave 8d · Boekpagina 62</a:t>
+              <a:t>§2.2.3 · Opgave 8d · Boekpagina 63</a:t>
             </a:r>
           </a:p>
         </p:txBody>
@@ -18011,7 +18011,7 @@
           <p:cNvPr id="4" name="slide-number">
             <a:extLst xmlns:a="http://schemas.openxmlformats.org/drawingml/2006/main">
               <a:ext uri="{FF2B5EF4-FFF2-40B4-BE49-F238E27FC236}">
-                <a16:creationId xmlns:a16="http://schemas.microsoft.com/office/drawing/2014/main" id="{4BA287B8-95D7-4E8E-8ECA-A792D8872A41}"/>
+                <a16:creationId xmlns:a16="http://schemas.microsoft.com/office/drawing/2014/main" id="{3A327281-14ED-4943-8902-DD175B68D33B}"/>
               </a:ext>
             </a:extLst>
           </p:cNvPr>
@@ -18068,7 +18068,7 @@
           <p:cNvPr id="5" name="%ΔQx = (420 − 390) / 390 × 100% = 7,692307…%">
             <a:extLst xmlns:a="http://schemas.openxmlformats.org/drawingml/2006/main">
               <a:ext uri="{FF2B5EF4-FFF2-40B4-BE49-F238E27FC236}">
-                <a16:creationId xmlns:a16="http://schemas.microsoft.com/office/drawing/2014/main" id="{9467B0E5-A975-42A2-A7AB-F45A47D28F79}"/>
+                <a16:creationId xmlns:a16="http://schemas.microsoft.com/office/drawing/2014/main" id="{4BCE34A0-7E41-45B3-B92C-0EB653E95B42}"/>
               </a:ext>
             </a:extLst>
           </p:cNvPr>
@@ -18125,7 +18125,7 @@
           <p:cNvPr id="6" name="%ΔY = (33.000 − 30.000) / 30.000 × 100% = +10%">
             <a:extLst xmlns:a="http://schemas.openxmlformats.org/drawingml/2006/main">
               <a:ext uri="{FF2B5EF4-FFF2-40B4-BE49-F238E27FC236}">
-                <a16:creationId xmlns:a16="http://schemas.microsoft.com/office/drawing/2014/main" id="{018BC5CD-DE48-4867-B984-55CDD0497736}"/>
+                <a16:creationId xmlns:a16="http://schemas.microsoft.com/office/drawing/2014/main" id="{514C52A6-E711-46DE-9661-8206AB4AAF05}"/>
               </a:ext>
             </a:extLst>
           </p:cNvPr>
@@ -18182,7 +18182,7 @@
           <p:cNvPr id="7" name="Ei = 7,692307…% / 10% ≈ +0,77">
             <a:extLst xmlns:a="http://schemas.openxmlformats.org/drawingml/2006/main">
               <a:ext uri="{FF2B5EF4-FFF2-40B4-BE49-F238E27FC236}">
-                <a16:creationId xmlns:a16="http://schemas.microsoft.com/office/drawing/2014/main" id="{14621BB8-BABA-4B5A-A59D-93310238B39F}"/>
+                <a16:creationId xmlns:a16="http://schemas.microsoft.com/office/drawing/2014/main" id="{CC7EFDEE-7E0D-40B8-B07B-BEAE729ECB9E}"/>
               </a:ext>
             </a:extLst>
           </p:cNvPr>
@@ -18239,7 +18239,7 @@
           <p:cNvPr id="8" name="0 &lt; Ei &lt; 1 → normaal goed in deze situatie.&#10;Qx stijgt procen">
             <a:extLst xmlns:a="http://schemas.openxmlformats.org/drawingml/2006/main">
               <a:ext uri="{FF2B5EF4-FFF2-40B4-BE49-F238E27FC236}">
-                <a16:creationId xmlns:a16="http://schemas.microsoft.com/office/drawing/2014/main" id="{F5110F4F-8BA9-48D6-B821-3DBCFE565EB6}"/>
+                <a16:creationId xmlns:a16="http://schemas.microsoft.com/office/drawing/2014/main" id="{0212883F-86E1-4A96-A734-FDF896D21BD8}"/>
               </a:ext>
             </a:extLst>
           </p:cNvPr>
@@ -18317,7 +18317,7 @@
     </p:spTree>
     <p:extLst>
       <p:ext uri="{BB962C8B-B14F-4D97-AF65-F5344CB8AC3E}">
-        <p14:creationId xmlns:p14="http://schemas.microsoft.com/office/powerpoint/2010/main" val="1774233740"/>
+        <p14:creationId xmlns:p14="http://schemas.microsoft.com/office/powerpoint/2010/main" val="1942347500"/>
       </p:ext>
     </p:extLst>
   </p:cSld>
@@ -18348,7 +18348,7 @@
           <p:cNvPr id="9" name="Opgave 8e · Y terug, alleen Pz omhoog">
             <a:extLst xmlns:a="http://schemas.openxmlformats.org/drawingml/2006/main">
               <a:ext uri="{FF2B5EF4-FFF2-40B4-BE49-F238E27FC236}">
-                <a16:creationId xmlns:a16="http://schemas.microsoft.com/office/drawing/2014/main" id="{181D4747-8BDC-4FB8-B5FD-FBF66D055E06}"/>
+                <a16:creationId xmlns:a16="http://schemas.microsoft.com/office/drawing/2014/main" id="{71D65E6F-3515-4041-B59D-28985D9447F8}"/>
               </a:ext>
             </a:extLst>
           </p:cNvPr>
@@ -18405,7 +18405,7 @@
           <p:cNvPr id="2" name="">
             <a:extLst xmlns:a="http://schemas.openxmlformats.org/drawingml/2006/main">
               <a:ext uri="{FF2B5EF4-FFF2-40B4-BE49-F238E27FC236}">
-                <a16:creationId xmlns:a16="http://schemas.microsoft.com/office/drawing/2014/main" id="{6C8FF602-216F-4707-81A8-2E6070B3B6C6}"/>
+                <a16:creationId xmlns:a16="http://schemas.microsoft.com/office/drawing/2014/main" id="{128BED8E-EB22-44AB-A3DE-34814F4A7279}"/>
               </a:ext>
             </a:extLst>
           </p:cNvPr>
@@ -18434,7 +18434,7 @@
           <p:cNvPr id="3" name="footer">
             <a:extLst xmlns:a="http://schemas.openxmlformats.org/drawingml/2006/main">
               <a:ext uri="{FF2B5EF4-FFF2-40B4-BE49-F238E27FC236}">
-                <a16:creationId xmlns:a16="http://schemas.microsoft.com/office/drawing/2014/main" id="{22141CDD-F77F-427B-8A5E-CD0C7EC27ABF}"/>
+                <a16:creationId xmlns:a16="http://schemas.microsoft.com/office/drawing/2014/main" id="{6BDD3675-9056-4213-90D9-49CC831BE4A2}"/>
               </a:ext>
             </a:extLst>
           </p:cNvPr>
@@ -18481,7 +18481,7 @@
                 <a:ea typeface="Arial"/>
                 <a:cs typeface="Arial"/>
               </a:rPr>
-              <a:t>§2.2.3 · Opgave 8e · Boekpagina 62</a:t>
+              <a:t>§2.2.3 · Opgave 8e · Boekpagina 63</a:t>
             </a:r>
           </a:p>
         </p:txBody>
@@ -18491,7 +18491,7 @@
           <p:cNvPr id="4" name="slide-number">
             <a:extLst xmlns:a="http://schemas.openxmlformats.org/drawingml/2006/main">
               <a:ext uri="{FF2B5EF4-FFF2-40B4-BE49-F238E27FC236}">
-                <a16:creationId xmlns:a16="http://schemas.microsoft.com/office/drawing/2014/main" id="{643B8E49-CF47-4CB8-8DC7-3403C557F9CF}"/>
+                <a16:creationId xmlns:a16="http://schemas.microsoft.com/office/drawing/2014/main" id="{328E23E6-CF53-41BE-9683-331F08B80227}"/>
               </a:ext>
             </a:extLst>
           </p:cNvPr>
@@ -19061,7 +19061,7 @@
           <p:cNvPr id="6" name="Qx = 100 − 2 × 10 + 0,5 × 24 + 0,01 × 30.000">
             <a:extLst xmlns:a="http://schemas.openxmlformats.org/drawingml/2006/main">
               <a:ext uri="{FF2B5EF4-FFF2-40B4-BE49-F238E27FC236}">
-                <a16:creationId xmlns:a16="http://schemas.microsoft.com/office/drawing/2014/main" id="{E682770C-3F5A-4B62-9AE2-ED94B7A4441B}"/>
+                <a16:creationId xmlns:a16="http://schemas.microsoft.com/office/drawing/2014/main" id="{4AAE7DA2-7450-4CE0-B421-AF65AFAD40D6}"/>
               </a:ext>
             </a:extLst>
           </p:cNvPr>
@@ -19118,7 +19118,7 @@
           <p:cNvPr id="7" name="= 100 − 20 + 12 + 300 = 392 abonnementen per maand">
             <a:extLst xmlns:a="http://schemas.openxmlformats.org/drawingml/2006/main">
               <a:ext uri="{FF2B5EF4-FFF2-40B4-BE49-F238E27FC236}">
-                <a16:creationId xmlns:a16="http://schemas.microsoft.com/office/drawing/2014/main" id="{D1A9CAA0-50AE-46DC-8CFE-E85B2EA8A85D}"/>
+                <a16:creationId xmlns:a16="http://schemas.microsoft.com/office/drawing/2014/main" id="{4EADB80C-AC4A-4D18-B6D3-5D75BB1163D1}"/>
               </a:ext>
             </a:extLst>
           </p:cNvPr>
@@ -19175,7 +19175,7 @@
           <p:cNvPr id="8" name="Pz ↑ → Qx ↑ (390 → 392). Px = 10 en Y = 30.000 blijven gelij">
             <a:extLst xmlns:a="http://schemas.openxmlformats.org/drawingml/2006/main">
               <a:ext uri="{FF2B5EF4-FFF2-40B4-BE49-F238E27FC236}">
-                <a16:creationId xmlns:a16="http://schemas.microsoft.com/office/drawing/2014/main" id="{0CF5C0AA-3410-4E68-B807-9C82A05E9DBA}"/>
+                <a16:creationId xmlns:a16="http://schemas.microsoft.com/office/drawing/2014/main" id="{3D2985EC-D38D-4F71-88F8-BD3A7715C8EC}"/>
               </a:ext>
             </a:extLst>
           </p:cNvPr>
@@ -19230,7 +19230,7 @@
     </p:spTree>
     <p:extLst>
       <p:ext uri="{BB962C8B-B14F-4D97-AF65-F5344CB8AC3E}">
-        <p14:creationId xmlns:p14="http://schemas.microsoft.com/office/powerpoint/2010/main" val="957197887"/>
+        <p14:creationId xmlns:p14="http://schemas.microsoft.com/office/powerpoint/2010/main" val="274144818"/>
       </p:ext>
     </p:extLst>
   </p:cSld>
@@ -19261,7 +19261,7 @@
           <p:cNvPr id="17" name="Controle van je antwoord op opgave 8">
             <a:extLst xmlns:a="http://schemas.openxmlformats.org/drawingml/2006/main">
               <a:ext uri="{FF2B5EF4-FFF2-40B4-BE49-F238E27FC236}">
-                <a16:creationId xmlns:a16="http://schemas.microsoft.com/office/drawing/2014/main" id="{92C4A4A8-D44D-4C0B-8917-FA3EA3C663CF}"/>
+                <a16:creationId xmlns:a16="http://schemas.microsoft.com/office/drawing/2014/main" id="{4CB3D772-A846-4F83-8E1F-4BCDFACAA2ED}"/>
               </a:ext>
             </a:extLst>
           </p:cNvPr>
@@ -19318,7 +19318,7 @@
           <p:cNvPr id="2" name="">
             <a:extLst xmlns:a="http://schemas.openxmlformats.org/drawingml/2006/main">
               <a:ext uri="{FF2B5EF4-FFF2-40B4-BE49-F238E27FC236}">
-                <a16:creationId xmlns:a16="http://schemas.microsoft.com/office/drawing/2014/main" id="{39B5175E-FAB2-45BC-9377-80C39749F844}"/>
+                <a16:creationId xmlns:a16="http://schemas.microsoft.com/office/drawing/2014/main" id="{B3957169-A956-43DB-9B6C-1D0BC462CD2F}"/>
               </a:ext>
             </a:extLst>
           </p:cNvPr>
@@ -19347,7 +19347,7 @@
           <p:cNvPr id="3" name="footer">
             <a:extLst xmlns:a="http://schemas.openxmlformats.org/drawingml/2006/main">
               <a:ext uri="{FF2B5EF4-FFF2-40B4-BE49-F238E27FC236}">
-                <a16:creationId xmlns:a16="http://schemas.microsoft.com/office/drawing/2014/main" id="{45A1DAD8-4E41-4D5E-BA6B-5AABB17D99F3}"/>
+                <a16:creationId xmlns:a16="http://schemas.microsoft.com/office/drawing/2014/main" id="{04F7CB7B-DED9-4E23-B8EB-CA8F523AD7FD}"/>
               </a:ext>
             </a:extLst>
           </p:cNvPr>
@@ -19404,7 +19404,7 @@
           <p:cNvPr id="4" name="slide-number">
             <a:extLst xmlns:a="http://schemas.openxmlformats.org/drawingml/2006/main">
               <a:ext uri="{FF2B5EF4-FFF2-40B4-BE49-F238E27FC236}">
-                <a16:creationId xmlns:a16="http://schemas.microsoft.com/office/drawing/2014/main" id="{95CA01B3-E66C-4508-B461-AC4F1FC1D7BD}"/>
+                <a16:creationId xmlns:a16="http://schemas.microsoft.com/office/drawing/2014/main" id="{28179314-E4C3-42A7-9D24-206B75E924F6}"/>
               </a:ext>
             </a:extLst>
           </p:cNvPr>
@@ -19461,7 +19461,7 @@
           <p:cNvPr id="5" name="a–b · Inkomen">
             <a:extLst xmlns:a="http://schemas.openxmlformats.org/drawingml/2006/main">
               <a:ext uri="{FF2B5EF4-FFF2-40B4-BE49-F238E27FC236}">
-                <a16:creationId xmlns:a16="http://schemas.microsoft.com/office/drawing/2014/main" id="{FD2AFE47-B6FD-45A1-901B-251BCD1D0A2B}"/>
+                <a16:creationId xmlns:a16="http://schemas.microsoft.com/office/drawing/2014/main" id="{0C7EF0BB-6405-4999-80EC-C97A1B24BA7A}"/>
               </a:ext>
             </a:extLst>
           </p:cNvPr>
@@ -19518,7 +19518,7 @@
           <p:cNvPr id="6" name="Ei mét teken, categorie en betekenis in deze situatie.">
             <a:extLst xmlns:a="http://schemas.openxmlformats.org/drawingml/2006/main">
               <a:ext uri="{FF2B5EF4-FFF2-40B4-BE49-F238E27FC236}">
-                <a16:creationId xmlns:a16="http://schemas.microsoft.com/office/drawing/2014/main" id="{DA7E4315-53AE-40F5-9958-FD7CD0D7DB5F}"/>
+                <a16:creationId xmlns:a16="http://schemas.microsoft.com/office/drawing/2014/main" id="{46FC22AC-6931-401A-8E4F-49A17BF52979}"/>
               </a:ext>
             </a:extLst>
           </p:cNvPr>
@@ -19575,7 +19575,7 @@
           <p:cNvPr id="7" name="">
             <a:extLst xmlns:a="http://schemas.openxmlformats.org/drawingml/2006/main">
               <a:ext uri="{FF2B5EF4-FFF2-40B4-BE49-F238E27FC236}">
-                <a16:creationId xmlns:a16="http://schemas.microsoft.com/office/drawing/2014/main" id="{8C66C7D1-B2E8-46F0-95F7-828DEC5FD808}"/>
+                <a16:creationId xmlns:a16="http://schemas.microsoft.com/office/drawing/2014/main" id="{036AEB07-0074-4CCE-8709-396647C52C6C}"/>
               </a:ext>
             </a:extLst>
           </p:cNvPr>
@@ -19604,7 +19604,7 @@
           <p:cNvPr id="8" name="c · Andere prijs">
             <a:extLst xmlns:a="http://schemas.openxmlformats.org/drawingml/2006/main">
               <a:ext uri="{FF2B5EF4-FFF2-40B4-BE49-F238E27FC236}">
-                <a16:creationId xmlns:a16="http://schemas.microsoft.com/office/drawing/2014/main" id="{83F93CF3-2521-44BA-8CF9-6ABAA1F178B5}"/>
+                <a16:creationId xmlns:a16="http://schemas.microsoft.com/office/drawing/2014/main" id="{EBE381B2-6891-4ECE-B07F-ACFC0A350DA9}"/>
               </a:ext>
             </a:extLst>
           </p:cNvPr>
@@ -19661,7 +19661,7 @@
           <p:cNvPr id="9" name="Beide Ek’s, beide goederen en beide relaties.">
             <a:extLst xmlns:a="http://schemas.openxmlformats.org/drawingml/2006/main">
               <a:ext uri="{FF2B5EF4-FFF2-40B4-BE49-F238E27FC236}">
-                <a16:creationId xmlns:a16="http://schemas.microsoft.com/office/drawing/2014/main" id="{6C856C70-E58B-4C95-BCE3-08553A045067}"/>
+                <a16:creationId xmlns:a16="http://schemas.microsoft.com/office/drawing/2014/main" id="{195D8A54-AF42-4DAA-BDC6-26715BADA8D4}"/>
               </a:ext>
             </a:extLst>
           </p:cNvPr>
@@ -19718,7 +19718,7 @@
           <p:cNvPr id="10" name="">
             <a:extLst xmlns:a="http://schemas.openxmlformats.org/drawingml/2006/main">
               <a:ext uri="{FF2B5EF4-FFF2-40B4-BE49-F238E27FC236}">
-                <a16:creationId xmlns:a16="http://schemas.microsoft.com/office/drawing/2014/main" id="{9F6E841F-C83E-4786-AE66-8965A89AE390}"/>
+                <a16:creationId xmlns:a16="http://schemas.microsoft.com/office/drawing/2014/main" id="{50D6C6FC-36E6-45C3-B908-F456E8276EBF}"/>
               </a:ext>
             </a:extLst>
           </p:cNvPr>
@@ -19747,7 +19747,7 @@
           <p:cNvPr id="11" name="d · Hoger Y">
             <a:extLst xmlns:a="http://schemas.openxmlformats.org/drawingml/2006/main">
               <a:ext uri="{FF2B5EF4-FFF2-40B4-BE49-F238E27FC236}">
-                <a16:creationId xmlns:a16="http://schemas.microsoft.com/office/drawing/2014/main" id="{45CAE09B-9712-454D-9BDC-7122EFCBF1F4}"/>
+                <a16:creationId xmlns:a16="http://schemas.microsoft.com/office/drawing/2014/main" id="{BBECA915-C011-4B04-915C-FC6C55462365}"/>
               </a:ext>
             </a:extLst>
           </p:cNvPr>
@@ -19804,7 +19804,7 @@
           <p:cNvPr id="12" name="Oud/nieuw Qx, procenten, Ei; Px en Pz gelijk.">
             <a:extLst xmlns:a="http://schemas.openxmlformats.org/drawingml/2006/main">
               <a:ext uri="{FF2B5EF4-FFF2-40B4-BE49-F238E27FC236}">
-                <a16:creationId xmlns:a16="http://schemas.microsoft.com/office/drawing/2014/main" id="{797C8CD1-2180-4630-B3E2-788EC24CA8CA}"/>
+                <a16:creationId xmlns:a16="http://schemas.microsoft.com/office/drawing/2014/main" id="{B9C47B26-8120-4F1A-99D8-C1D69DC6C14C}"/>
               </a:ext>
             </a:extLst>
           </p:cNvPr>
@@ -19861,7 +19861,7 @@
           <p:cNvPr id="13" name="">
             <a:extLst xmlns:a="http://schemas.openxmlformats.org/drawingml/2006/main">
               <a:ext uri="{FF2B5EF4-FFF2-40B4-BE49-F238E27FC236}">
-                <a16:creationId xmlns:a16="http://schemas.microsoft.com/office/drawing/2014/main" id="{2A372E64-824A-4667-B580-9E23488CD894}"/>
+                <a16:creationId xmlns:a16="http://schemas.microsoft.com/office/drawing/2014/main" id="{9361E9B5-DD10-48FE-8F39-467B71F2B7F7}"/>
               </a:ext>
             </a:extLst>
           </p:cNvPr>
@@ -19890,7 +19890,7 @@
           <p:cNvPr id="14" name="e · Hoger Pz">
             <a:extLst xmlns:a="http://schemas.openxmlformats.org/drawingml/2006/main">
               <a:ext uri="{FF2B5EF4-FFF2-40B4-BE49-F238E27FC236}">
-                <a16:creationId xmlns:a16="http://schemas.microsoft.com/office/drawing/2014/main" id="{FE1A1351-5B06-40BB-A094-CAC3FE3DDB93}"/>
+                <a16:creationId xmlns:a16="http://schemas.microsoft.com/office/drawing/2014/main" id="{88B1F418-6547-4C0A-9EE9-1F860E9EF732}"/>
               </a:ext>
             </a:extLst>
           </p:cNvPr>
@@ -19947,7 +19947,7 @@
           <p:cNvPr id="15" name="Y teruggezet; nieuwe Qx, richting en vaste variabelen.">
             <a:extLst xmlns:a="http://schemas.openxmlformats.org/drawingml/2006/main">
               <a:ext uri="{FF2B5EF4-FFF2-40B4-BE49-F238E27FC236}">
-                <a16:creationId xmlns:a16="http://schemas.microsoft.com/office/drawing/2014/main" id="{BE94B333-EE8C-40AC-A26B-CE43B9789D0E}"/>
+                <a16:creationId xmlns:a16="http://schemas.microsoft.com/office/drawing/2014/main" id="{FBC253DD-3A1E-4A80-80ED-5BF37F661016}"/>
               </a:ext>
             </a:extLst>
           </p:cNvPr>
@@ -20004,7 +20004,7 @@
           <p:cNvPr id="16" name="Verbeter één ontbrekende berekening of uitleg in je schrift.">
             <a:extLst xmlns:a="http://schemas.openxmlformats.org/drawingml/2006/main">
               <a:ext uri="{FF2B5EF4-FFF2-40B4-BE49-F238E27FC236}">
-                <a16:creationId xmlns:a16="http://schemas.microsoft.com/office/drawing/2014/main" id="{3EFC8C06-B39F-4412-B2C3-166EA5BDE537}"/>
+                <a16:creationId xmlns:a16="http://schemas.microsoft.com/office/drawing/2014/main" id="{3E1E7873-C266-44B4-993D-8597AA20CD4F}"/>
               </a:ext>
             </a:extLst>
           </p:cNvPr>
@@ -20059,7 +20059,7 @@
     </p:spTree>
     <p:extLst>
       <p:ext uri="{BB962C8B-B14F-4D97-AF65-F5344CB8AC3E}">
-        <p14:creationId xmlns:p14="http://schemas.microsoft.com/office/powerpoint/2010/main" val="1510471700"/>
+        <p14:creationId xmlns:p14="http://schemas.microsoft.com/office/powerpoint/2010/main" val="302921955"/>
       </p:ext>
     </p:extLst>
   </p:cSld>
@@ -20090,7 +20090,7 @@
           <p:cNvPr id="10" name="Procenten · De oude waarde is de basis">
             <a:extLst xmlns:a="http://schemas.openxmlformats.org/drawingml/2006/main">
               <a:ext uri="{FF2B5EF4-FFF2-40B4-BE49-F238E27FC236}">
-                <a16:creationId xmlns:a16="http://schemas.microsoft.com/office/drawing/2014/main" id="{3163B0C4-A2D3-482C-8FDE-8C5EDF214E50}"/>
+                <a16:creationId xmlns:a16="http://schemas.microsoft.com/office/drawing/2014/main" id="{D410F220-0496-47EA-86E7-19448A6DFBBA}"/>
               </a:ext>
             </a:extLst>
           </p:cNvPr>
@@ -20147,7 +20147,7 @@
           <p:cNvPr id="2" name="">
             <a:extLst xmlns:a="http://schemas.openxmlformats.org/drawingml/2006/main">
               <a:ext uri="{FF2B5EF4-FFF2-40B4-BE49-F238E27FC236}">
-                <a16:creationId xmlns:a16="http://schemas.microsoft.com/office/drawing/2014/main" id="{5F58F77D-0700-46AF-AED9-741564D6916C}"/>
+                <a16:creationId xmlns:a16="http://schemas.microsoft.com/office/drawing/2014/main" id="{BEEA5712-85D5-4F5E-93A5-DE0E5A006346}"/>
               </a:ext>
             </a:extLst>
           </p:cNvPr>
@@ -20176,7 +20176,7 @@
           <p:cNvPr id="3" name="footer">
             <a:extLst xmlns:a="http://schemas.openxmlformats.org/drawingml/2006/main">
               <a:ext uri="{FF2B5EF4-FFF2-40B4-BE49-F238E27FC236}">
-                <a16:creationId xmlns:a16="http://schemas.microsoft.com/office/drawing/2014/main" id="{C9FCC7FE-D3FF-4672-AF84-996180C64358}"/>
+                <a16:creationId xmlns:a16="http://schemas.microsoft.com/office/drawing/2014/main" id="{6CD4671A-C96D-4439-82AB-D7E908E93C85}"/>
               </a:ext>
             </a:extLst>
           </p:cNvPr>
@@ -20233,7 +20233,7 @@
           <p:cNvPr id="4" name="slide-number">
             <a:extLst xmlns:a="http://schemas.openxmlformats.org/drawingml/2006/main">
               <a:ext uri="{FF2B5EF4-FFF2-40B4-BE49-F238E27FC236}">
-                <a16:creationId xmlns:a16="http://schemas.microsoft.com/office/drawing/2014/main" id="{D8A9EBCC-C306-41B6-8A20-A26E5DAEAE29}"/>
+                <a16:creationId xmlns:a16="http://schemas.microsoft.com/office/drawing/2014/main" id="{B234DDBE-FFA5-4723-ADDE-D8146E722B8E}"/>
               </a:ext>
             </a:extLst>
           </p:cNvPr>
@@ -20290,7 +20290,7 @@
           <p:cNvPr id="5" name="Uitlegvoorbeeld — niet uit het boek">
             <a:extLst xmlns:a="http://schemas.openxmlformats.org/drawingml/2006/main">
               <a:ext uri="{FF2B5EF4-FFF2-40B4-BE49-F238E27FC236}">
-                <a16:creationId xmlns:a16="http://schemas.microsoft.com/office/drawing/2014/main" id="{87EC50DA-C4FD-4173-ADD6-28CDC36F5DB0}"/>
+                <a16:creationId xmlns:a16="http://schemas.microsoft.com/office/drawing/2014/main" id="{A0D3A587-E60B-46CB-9B03-F958315B471C}"/>
               </a:ext>
             </a:extLst>
           </p:cNvPr>
@@ -20347,7 +20347,7 @@
           <p:cNvPr id="6" name="Jaarinkomen: € 24.000 → € 25.200">
             <a:extLst xmlns:a="http://schemas.openxmlformats.org/drawingml/2006/main">
               <a:ext uri="{FF2B5EF4-FFF2-40B4-BE49-F238E27FC236}">
-                <a16:creationId xmlns:a16="http://schemas.microsoft.com/office/drawing/2014/main" id="{B7B097AF-0A3D-488D-B587-F215594A0FF1}"/>
+                <a16:creationId xmlns:a16="http://schemas.microsoft.com/office/drawing/2014/main" id="{5EC9F57B-6F38-4E3A-A773-A3D359C1FFEE}"/>
               </a:ext>
             </a:extLst>
           </p:cNvPr>
@@ -20404,7 +20404,7 @@
           <p:cNvPr id="7" name="%ΔY = (nieuw − oud) / oud × 100%">
             <a:extLst xmlns:a="http://schemas.openxmlformats.org/drawingml/2006/main">
               <a:ext uri="{FF2B5EF4-FFF2-40B4-BE49-F238E27FC236}">
-                <a16:creationId xmlns:a16="http://schemas.microsoft.com/office/drawing/2014/main" id="{90CA8BCB-8F51-478F-8793-3359F2E7E7C6}"/>
+                <a16:creationId xmlns:a16="http://schemas.microsoft.com/office/drawing/2014/main" id="{C7EFAF34-1E70-486B-8A23-28A581640760}"/>
               </a:ext>
             </a:extLst>
           </p:cNvPr>
@@ -20461,7 +20461,7 @@
           <p:cNvPr id="8" name="%ΔY = (25.200 − 24.000) / 24.000 × 100%">
             <a:extLst xmlns:a="http://schemas.openxmlformats.org/drawingml/2006/main">
               <a:ext uri="{FF2B5EF4-FFF2-40B4-BE49-F238E27FC236}">
-                <a16:creationId xmlns:a16="http://schemas.microsoft.com/office/drawing/2014/main" id="{6F5A917A-35FA-48AB-AEF3-1F89C19545BF}"/>
+                <a16:creationId xmlns:a16="http://schemas.microsoft.com/office/drawing/2014/main" id="{99DB0705-4215-46EE-A212-E5AC99350D7C}"/>
               </a:ext>
             </a:extLst>
           </p:cNvPr>
@@ -20518,7 +20518,7 @@
           <p:cNvPr id="9" name="= +5%">
             <a:extLst xmlns:a="http://schemas.openxmlformats.org/drawingml/2006/main">
               <a:ext uri="{FF2B5EF4-FFF2-40B4-BE49-F238E27FC236}">
-                <a16:creationId xmlns:a16="http://schemas.microsoft.com/office/drawing/2014/main" id="{45D179E6-24C8-4A4C-87C8-E065FC1E79FC}"/>
+                <a16:creationId xmlns:a16="http://schemas.microsoft.com/office/drawing/2014/main" id="{6CB0CB10-8F17-4AB8-88E7-28CE85208A43}"/>
               </a:ext>
             </a:extLst>
           </p:cNvPr>
@@ -20573,7 +20573,7 @@
     </p:spTree>
     <p:extLst>
       <p:ext uri="{BB962C8B-B14F-4D97-AF65-F5344CB8AC3E}">
-        <p14:creationId xmlns:p14="http://schemas.microsoft.com/office/powerpoint/2010/main" val="1979896278"/>
+        <p14:creationId xmlns:p14="http://schemas.microsoft.com/office/powerpoint/2010/main" val="1642847937"/>
       </p:ext>
     </p:extLst>
   </p:cSld>
@@ -20604,7 +20604,7 @@
           <p:cNvPr id="29" name="overview-title">
             <a:extLst xmlns:a="http://schemas.openxmlformats.org/drawingml/2006/main">
               <a:ext uri="{FF2B5EF4-FFF2-40B4-BE49-F238E27FC236}">
-                <a16:creationId xmlns:a16="http://schemas.microsoft.com/office/drawing/2014/main" id="{FD43B0C5-31E6-49FA-AB1D-F2000F8FFF9D}"/>
+                <a16:creationId xmlns:a16="http://schemas.microsoft.com/office/drawing/2014/main" id="{3CEEC656-533A-4065-8184-1B24E8951B85}"/>
               </a:ext>
             </a:extLst>
           </p:cNvPr>
@@ -20684,7 +20684,7 @@
           <p:cNvPr id="2" name="phase">
             <a:extLst xmlns:a="http://schemas.openxmlformats.org/drawingml/2006/main">
               <a:ext uri="{FF2B5EF4-FFF2-40B4-BE49-F238E27FC236}">
-                <a16:creationId xmlns:a16="http://schemas.microsoft.com/office/drawing/2014/main" id="{10029588-7162-42FC-ABB4-FFE5B9C1CFD0}"/>
+                <a16:creationId xmlns:a16="http://schemas.microsoft.com/office/drawing/2014/main" id="{FB5E135C-195D-4F75-B1B9-D70F185A3051}"/>
               </a:ext>
             </a:extLst>
           </p:cNvPr>
@@ -20741,7 +20741,7 @@
           <p:cNvPr id="3" name="">
             <a:extLst xmlns:a="http://schemas.openxmlformats.org/drawingml/2006/main">
               <a:ext uri="{FF2B5EF4-FFF2-40B4-BE49-F238E27FC236}">
-                <a16:creationId xmlns:a16="http://schemas.microsoft.com/office/drawing/2014/main" id="{3A286823-09CA-4D78-9CFA-2E025AFB866B}"/>
+                <a16:creationId xmlns:a16="http://schemas.microsoft.com/office/drawing/2014/main" id="{4B35F294-B6CB-4494-83FF-272BCC916439}"/>
               </a:ext>
             </a:extLst>
           </p:cNvPr>
@@ -20770,7 +20770,7 @@
           <p:cNvPr id="4" name="Lesroute">
             <a:extLst xmlns:a="http://schemas.openxmlformats.org/drawingml/2006/main">
               <a:ext uri="{FF2B5EF4-FFF2-40B4-BE49-F238E27FC236}">
-                <a16:creationId xmlns:a16="http://schemas.microsoft.com/office/drawing/2014/main" id="{AD88C899-B245-4EBF-B639-1A6B39716C42}"/>
+                <a16:creationId xmlns:a16="http://schemas.microsoft.com/office/drawing/2014/main" id="{E98098BB-4639-4ED2-95F7-6B87D032739F}"/>
               </a:ext>
             </a:extLst>
           </p:cNvPr>
@@ -20827,7 +20827,7 @@
           <p:cNvPr id="5" name="route-number-1">
             <a:extLst xmlns:a="http://schemas.openxmlformats.org/drawingml/2006/main">
               <a:ext uri="{FF2B5EF4-FFF2-40B4-BE49-F238E27FC236}">
-                <a16:creationId xmlns:a16="http://schemas.microsoft.com/office/drawing/2014/main" id="{7F8EFFF4-4085-4F71-B2D8-41188467EBC4}"/>
+                <a16:creationId xmlns:a16="http://schemas.microsoft.com/office/drawing/2014/main" id="{9D918AB1-21A3-4468-BDB0-4CC07389AC12}"/>
               </a:ext>
             </a:extLst>
           </p:cNvPr>
@@ -20884,7 +20884,7 @@
           <p:cNvPr id="6" name="route-1">
             <a:extLst xmlns:a="http://schemas.openxmlformats.org/drawingml/2006/main">
               <a:ext uri="{FF2B5EF4-FFF2-40B4-BE49-F238E27FC236}">
-                <a16:creationId xmlns:a16="http://schemas.microsoft.com/office/drawing/2014/main" id="{92526B1E-BEB0-4D79-A303-BAD9E49E8E5F}"/>
+                <a16:creationId xmlns:a16="http://schemas.microsoft.com/office/drawing/2014/main" id="{FFC69A67-9CA9-4E40-936B-CED681935CE2}"/>
               </a:ext>
             </a:extLst>
           </p:cNvPr>
@@ -20941,7 +20941,7 @@
           <p:cNvPr id="7" name="route-number-2">
             <a:extLst xmlns:a="http://schemas.openxmlformats.org/drawingml/2006/main">
               <a:ext uri="{FF2B5EF4-FFF2-40B4-BE49-F238E27FC236}">
-                <a16:creationId xmlns:a16="http://schemas.microsoft.com/office/drawing/2014/main" id="{1E093445-792B-49BA-BA8B-387A670D63A5}"/>
+                <a16:creationId xmlns:a16="http://schemas.microsoft.com/office/drawing/2014/main" id="{B9F933C6-8D6F-4F51-BF9C-3BDD3E12FADF}"/>
               </a:ext>
             </a:extLst>
           </p:cNvPr>
@@ -20998,7 +20998,7 @@
           <p:cNvPr id="8" name="route-2">
             <a:extLst xmlns:a="http://schemas.openxmlformats.org/drawingml/2006/main">
               <a:ext uri="{FF2B5EF4-FFF2-40B4-BE49-F238E27FC236}">
-                <a16:creationId xmlns:a16="http://schemas.microsoft.com/office/drawing/2014/main" id="{5CD19ECA-DF14-49F8-B88F-34042AE4D347}"/>
+                <a16:creationId xmlns:a16="http://schemas.microsoft.com/office/drawing/2014/main" id="{1A690DEB-BCC9-4725-A270-1D433CC2D4BF}"/>
               </a:ext>
             </a:extLst>
           </p:cNvPr>
@@ -21055,7 +21055,7 @@
           <p:cNvPr id="9" name="route-number-3">
             <a:extLst xmlns:a="http://schemas.openxmlformats.org/drawingml/2006/main">
               <a:ext uri="{FF2B5EF4-FFF2-40B4-BE49-F238E27FC236}">
-                <a16:creationId xmlns:a16="http://schemas.microsoft.com/office/drawing/2014/main" id="{7DF51C6D-0701-41DF-84A5-EE6B254AF7C1}"/>
+                <a16:creationId xmlns:a16="http://schemas.microsoft.com/office/drawing/2014/main" id="{81826374-58B0-4DEE-9323-2DF56DFF1BAE}"/>
               </a:ext>
             </a:extLst>
           </p:cNvPr>
@@ -21112,7 +21112,7 @@
           <p:cNvPr id="10" name="route-3">
             <a:extLst xmlns:a="http://schemas.openxmlformats.org/drawingml/2006/main">
               <a:ext uri="{FF2B5EF4-FFF2-40B4-BE49-F238E27FC236}">
-                <a16:creationId xmlns:a16="http://schemas.microsoft.com/office/drawing/2014/main" id="{6DC9F3B1-E718-4933-8667-CF757F750722}"/>
+                <a16:creationId xmlns:a16="http://schemas.microsoft.com/office/drawing/2014/main" id="{CF8013C6-4D34-4E1A-AB43-D4ECAC7008A5}"/>
               </a:ext>
             </a:extLst>
           </p:cNvPr>
@@ -21169,7 +21169,7 @@
           <p:cNvPr id="11" name="route-number-4">
             <a:extLst xmlns:a="http://schemas.openxmlformats.org/drawingml/2006/main">
               <a:ext uri="{FF2B5EF4-FFF2-40B4-BE49-F238E27FC236}">
-                <a16:creationId xmlns:a16="http://schemas.microsoft.com/office/drawing/2014/main" id="{C841E168-4CC3-46DE-A1B7-48E11859B1E8}"/>
+                <a16:creationId xmlns:a16="http://schemas.microsoft.com/office/drawing/2014/main" id="{0867201D-F957-4396-AD67-AEFF4AD149D5}"/>
               </a:ext>
             </a:extLst>
           </p:cNvPr>
@@ -21226,7 +21226,7 @@
           <p:cNvPr id="12" name="route-4">
             <a:extLst xmlns:a="http://schemas.openxmlformats.org/drawingml/2006/main">
               <a:ext uri="{FF2B5EF4-FFF2-40B4-BE49-F238E27FC236}">
-                <a16:creationId xmlns:a16="http://schemas.microsoft.com/office/drawing/2014/main" id="{B07007AA-5C32-4373-A791-1F396A321CB9}"/>
+                <a16:creationId xmlns:a16="http://schemas.microsoft.com/office/drawing/2014/main" id="{9AE7E7BD-7E6D-42C3-9F65-041372D615D9}"/>
               </a:ext>
             </a:extLst>
           </p:cNvPr>
@@ -21283,7 +21283,7 @@
           <p:cNvPr id="13" name="route-number-5">
             <a:extLst xmlns:a="http://schemas.openxmlformats.org/drawingml/2006/main">
               <a:ext uri="{FF2B5EF4-FFF2-40B4-BE49-F238E27FC236}">
-                <a16:creationId xmlns:a16="http://schemas.microsoft.com/office/drawing/2014/main" id="{5CAC97AE-CD64-407B-B09F-5AD398449479}"/>
+                <a16:creationId xmlns:a16="http://schemas.microsoft.com/office/drawing/2014/main" id="{C5F72DD9-D63B-47A4-9E7A-51B29602EAE8}"/>
               </a:ext>
             </a:extLst>
           </p:cNvPr>
@@ -21340,7 +21340,7 @@
           <p:cNvPr id="14" name="route-5">
             <a:extLst xmlns:a="http://schemas.openxmlformats.org/drawingml/2006/main">
               <a:ext uri="{FF2B5EF4-FFF2-40B4-BE49-F238E27FC236}">
-                <a16:creationId xmlns:a16="http://schemas.microsoft.com/office/drawing/2014/main" id="{FF9FBEBD-4434-4D71-94E7-1C0F6F64BA44}"/>
+                <a16:creationId xmlns:a16="http://schemas.microsoft.com/office/drawing/2014/main" id="{817A71DD-DF03-4068-99B2-EA11A27E8D9A}"/>
               </a:ext>
             </a:extLst>
           </p:cNvPr>
@@ -21397,7 +21397,7 @@
           <p:cNvPr id="15" name="route-number-6">
             <a:extLst xmlns:a="http://schemas.openxmlformats.org/drawingml/2006/main">
               <a:ext uri="{FF2B5EF4-FFF2-40B4-BE49-F238E27FC236}">
-                <a16:creationId xmlns:a16="http://schemas.microsoft.com/office/drawing/2014/main" id="{1A0AF2C9-A494-4342-A532-51CD7A393137}"/>
+                <a16:creationId xmlns:a16="http://schemas.microsoft.com/office/drawing/2014/main" id="{424B2458-04B6-401A-9221-1D513FF6DC08}"/>
               </a:ext>
             </a:extLst>
           </p:cNvPr>
@@ -21454,7 +21454,7 @@
           <p:cNvPr id="16" name="route-6">
             <a:extLst xmlns:a="http://schemas.openxmlformats.org/drawingml/2006/main">
               <a:ext uri="{FF2B5EF4-FFF2-40B4-BE49-F238E27FC236}">
-                <a16:creationId xmlns:a16="http://schemas.microsoft.com/office/drawing/2014/main" id="{C31B4DAD-F43E-4942-A086-9DAF5DDD4EAF}"/>
+                <a16:creationId xmlns:a16="http://schemas.microsoft.com/office/drawing/2014/main" id="{F5DBA845-71B1-471D-819E-193B53022355}"/>
               </a:ext>
             </a:extLst>
           </p:cNvPr>
@@ -21511,7 +21511,7 @@
           <p:cNvPr id="17" name="route-number-7">
             <a:extLst xmlns:a="http://schemas.openxmlformats.org/drawingml/2006/main">
               <a:ext uri="{FF2B5EF4-FFF2-40B4-BE49-F238E27FC236}">
-                <a16:creationId xmlns:a16="http://schemas.microsoft.com/office/drawing/2014/main" id="{BCCF1F26-DEFA-4753-92A0-31CD045B098E}"/>
+                <a16:creationId xmlns:a16="http://schemas.microsoft.com/office/drawing/2014/main" id="{5935E10D-A164-4C03-8BF9-70A38E4AC8E1}"/>
               </a:ext>
             </a:extLst>
           </p:cNvPr>
@@ -21568,7 +21568,7 @@
           <p:cNvPr id="18" name="route-7">
             <a:extLst xmlns:a="http://schemas.openxmlformats.org/drawingml/2006/main">
               <a:ext uri="{FF2B5EF4-FFF2-40B4-BE49-F238E27FC236}">
-                <a16:creationId xmlns:a16="http://schemas.microsoft.com/office/drawing/2014/main" id="{DEA42655-A1AE-4964-BD96-C9F881F7554D}"/>
+                <a16:creationId xmlns:a16="http://schemas.microsoft.com/office/drawing/2014/main" id="{12683C0C-3EB8-401C-B8CF-F9E3DF2D9D30}"/>
               </a:ext>
             </a:extLst>
           </p:cNvPr>
@@ -21625,7 +21625,7 @@
           <p:cNvPr id="19" name="Lesdoelen">
             <a:extLst xmlns:a="http://schemas.openxmlformats.org/drawingml/2006/main">
               <a:ext uri="{FF2B5EF4-FFF2-40B4-BE49-F238E27FC236}">
-                <a16:creationId xmlns:a16="http://schemas.microsoft.com/office/drawing/2014/main" id="{12ED351C-D9A2-4137-8164-5DB6EC71F0F8}"/>
+                <a16:creationId xmlns:a16="http://schemas.microsoft.com/office/drawing/2014/main" id="{BCB129F0-1167-4E1A-B28A-314D3DD311DD}"/>
               </a:ext>
             </a:extLst>
           </p:cNvPr>
@@ -21682,7 +21682,7 @@
           <p:cNvPr id="20" name="overview-goals">
             <a:extLst xmlns:a="http://schemas.openxmlformats.org/drawingml/2006/main">
               <a:ext uri="{FF2B5EF4-FFF2-40B4-BE49-F238E27FC236}">
-                <a16:creationId xmlns:a16="http://schemas.microsoft.com/office/drawing/2014/main" id="{AD3C8775-FC88-433D-98B1-EBC0751B2E4E}"/>
+                <a16:creationId xmlns:a16="http://schemas.microsoft.com/office/drawing/2014/main" id="{46FF4F83-15EC-4293-8A78-D8DB17D092E3}"/>
               </a:ext>
             </a:extLst>
           </p:cNvPr>
@@ -21785,7 +21785,7 @@
           <p:cNvPr id="21" name="">
             <a:extLst xmlns:a="http://schemas.openxmlformats.org/drawingml/2006/main">
               <a:ext uri="{FF2B5EF4-FFF2-40B4-BE49-F238E27FC236}">
-                <a16:creationId xmlns:a16="http://schemas.microsoft.com/office/drawing/2014/main" id="{6C406367-CCCA-4449-947B-27C301BDA691}"/>
+                <a16:creationId xmlns:a16="http://schemas.microsoft.com/office/drawing/2014/main" id="{E8F79E27-0C5E-4232-96A1-97724512987C}"/>
               </a:ext>
             </a:extLst>
           </p:cNvPr>
@@ -21811,10 +21811,10 @@
       </p:sp>
       <p:sp>
         <p:nvSpPr>
-          <p:cNvPr id="22" name="Startopdracht · pagina 59">
-            <a:extLst xmlns:a="http://schemas.openxmlformats.org/drawingml/2006/main">
-              <a:ext uri="{FF2B5EF4-FFF2-40B4-BE49-F238E27FC236}">
-                <a16:creationId xmlns:a16="http://schemas.microsoft.com/office/drawing/2014/main" id="{E184FDB3-1584-4E77-9AF0-C19888984031}"/>
+          <p:cNvPr id="22" name="Startopdracht · pagina 60">
+            <a:extLst xmlns:a="http://schemas.openxmlformats.org/drawingml/2006/main">
+              <a:ext uri="{FF2B5EF4-FFF2-40B4-BE49-F238E27FC236}">
+                <a16:creationId xmlns:a16="http://schemas.microsoft.com/office/drawing/2014/main" id="{B914C7DE-26F5-4EB2-971F-00205AFD4847}"/>
               </a:ext>
             </a:extLst>
           </p:cNvPr>
@@ -21861,7 +21861,7 @@
                 <a:ea typeface="Arial"/>
                 <a:cs typeface="Arial"/>
               </a:rPr>
-              <a:t>Startopdracht · pagina 59</a:t>
+              <a:t>Startopdracht · pagina 60</a:t>
             </a:r>
           </a:p>
         </p:txBody>
@@ -21871,7 +21871,7 @@
           <p:cNvPr id="23" name="overview-start">
             <a:extLst xmlns:a="http://schemas.openxmlformats.org/drawingml/2006/main">
               <a:ext uri="{FF2B5EF4-FFF2-40B4-BE49-F238E27FC236}">
-                <a16:creationId xmlns:a16="http://schemas.microsoft.com/office/drawing/2014/main" id="{DB9B6124-C58F-4F5F-B0B6-E3E35BE42987}"/>
+                <a16:creationId xmlns:a16="http://schemas.microsoft.com/office/drawing/2014/main" id="{3A1511DA-9153-4064-8E73-977AF606DF8F}"/>
               </a:ext>
             </a:extLst>
           </p:cNvPr>
@@ -21964,7 +21964,7 @@
                 <a:ea typeface="Arial"/>
                 <a:cs typeface="Arial"/>
               </a:rPr>
-              <a:t>de theorie, p. 53–56</a:t>
+              <a:t>de theorie, p. 54–57</a:t>
             </a:r>
           </a:p>
         </p:txBody>
@@ -21974,7 +21974,7 @@
           <p:cNvPr id="24" name="">
             <a:extLst xmlns:a="http://schemas.openxmlformats.org/drawingml/2006/main">
               <a:ext uri="{FF2B5EF4-FFF2-40B4-BE49-F238E27FC236}">
-                <a16:creationId xmlns:a16="http://schemas.microsoft.com/office/drawing/2014/main" id="{2102590F-657F-43DB-A0F3-1B0B1CC94E2B}"/>
+                <a16:creationId xmlns:a16="http://schemas.microsoft.com/office/drawing/2014/main" id="{42034BB1-70E8-49E7-B9DB-BC76DEDE9A70}"/>
               </a:ext>
             </a:extLst>
           </p:cNvPr>
@@ -22003,7 +22003,7 @@
           <p:cNvPr id="25" name="Huiswerk">
             <a:extLst xmlns:a="http://schemas.openxmlformats.org/drawingml/2006/main">
               <a:ext uri="{FF2B5EF4-FFF2-40B4-BE49-F238E27FC236}">
-                <a16:creationId xmlns:a16="http://schemas.microsoft.com/office/drawing/2014/main" id="{0F834512-A810-4FE7-9463-A219B3FB7F7D}"/>
+                <a16:creationId xmlns:a16="http://schemas.microsoft.com/office/drawing/2014/main" id="{51D3C1D0-4409-4956-A216-674F72DF434C}"/>
               </a:ext>
             </a:extLst>
           </p:cNvPr>
@@ -22060,7 +22060,7 @@
           <p:cNvPr id="26" name="overview-homework">
             <a:extLst xmlns:a="http://schemas.openxmlformats.org/drawingml/2006/main">
               <a:ext uri="{FF2B5EF4-FFF2-40B4-BE49-F238E27FC236}">
-                <a16:creationId xmlns:a16="http://schemas.microsoft.com/office/drawing/2014/main" id="{4F5FF21B-DBFD-4234-8B8A-0B25DF773832}"/>
+                <a16:creationId xmlns:a16="http://schemas.microsoft.com/office/drawing/2014/main" id="{2E1B03DF-A61F-4217-9DD2-BBE24660A5CB}"/>
               </a:ext>
             </a:extLst>
           </p:cNvPr>
@@ -22186,7 +22186,7 @@
           <p:cNvPr id="27" name="footer">
             <a:extLst xmlns:a="http://schemas.openxmlformats.org/drawingml/2006/main">
               <a:ext uri="{FF2B5EF4-FFF2-40B4-BE49-F238E27FC236}">
-                <a16:creationId xmlns:a16="http://schemas.microsoft.com/office/drawing/2014/main" id="{4D4D3106-717B-4CC9-AFBC-8FD3A19A9138}"/>
+                <a16:creationId xmlns:a16="http://schemas.microsoft.com/office/drawing/2014/main" id="{01D4D389-C63E-4C25-9571-EA65EABB07C6}"/>
               </a:ext>
             </a:extLst>
           </p:cNvPr>
@@ -22243,7 +22243,7 @@
           <p:cNvPr id="28" name="slide-number">
             <a:extLst xmlns:a="http://schemas.openxmlformats.org/drawingml/2006/main">
               <a:ext uri="{FF2B5EF4-FFF2-40B4-BE49-F238E27FC236}">
-                <a16:creationId xmlns:a16="http://schemas.microsoft.com/office/drawing/2014/main" id="{18650089-20FE-44A3-AF58-932EF08FC527}"/>
+                <a16:creationId xmlns:a16="http://schemas.microsoft.com/office/drawing/2014/main" id="{D17E816E-D02B-46D0-9EA5-3A1A8AC01A3C}"/>
               </a:ext>
             </a:extLst>
           </p:cNvPr>
@@ -22298,7 +22298,7 @@
     </p:spTree>
     <p:extLst>
       <p:ext uri="{BB962C8B-B14F-4D97-AF65-F5344CB8AC3E}">
-        <p14:creationId xmlns:p14="http://schemas.microsoft.com/office/powerpoint/2010/main" val="1178178889"/>
+        <p14:creationId xmlns:p14="http://schemas.microsoft.com/office/powerpoint/2010/main" val="1925485280"/>
       </p:ext>
     </p:extLst>
   </p:cSld>
@@ -22329,7 +22329,7 @@
           <p:cNvPr id="11" name="Een functie invullen">
             <a:extLst xmlns:a="http://schemas.openxmlformats.org/drawingml/2006/main">
               <a:ext uri="{FF2B5EF4-FFF2-40B4-BE49-F238E27FC236}">
-                <a16:creationId xmlns:a16="http://schemas.microsoft.com/office/drawing/2014/main" id="{A694B14C-65B1-4383-AD15-D3C4AA382610}"/>
+                <a16:creationId xmlns:a16="http://schemas.microsoft.com/office/drawing/2014/main" id="{56A7CEEB-357E-4B49-8BA3-8ECA31C8CBB3}"/>
               </a:ext>
             </a:extLst>
           </p:cNvPr>
@@ -22386,7 +22386,7 @@
           <p:cNvPr id="2" name="">
             <a:extLst xmlns:a="http://schemas.openxmlformats.org/drawingml/2006/main">
               <a:ext uri="{FF2B5EF4-FFF2-40B4-BE49-F238E27FC236}">
-                <a16:creationId xmlns:a16="http://schemas.microsoft.com/office/drawing/2014/main" id="{E852E1BF-0B41-46F8-96DA-EA76FBBBA54E}"/>
+                <a16:creationId xmlns:a16="http://schemas.microsoft.com/office/drawing/2014/main" id="{744167F2-906E-4AD6-BA56-AAC5D891C26F}"/>
               </a:ext>
             </a:extLst>
           </p:cNvPr>
@@ -22415,7 +22415,7 @@
           <p:cNvPr id="3" name="footer">
             <a:extLst xmlns:a="http://schemas.openxmlformats.org/drawingml/2006/main">
               <a:ext uri="{FF2B5EF4-FFF2-40B4-BE49-F238E27FC236}">
-                <a16:creationId xmlns:a16="http://schemas.microsoft.com/office/drawing/2014/main" id="{DFB44FB7-A123-49C6-A509-D16A042C413E}"/>
+                <a16:creationId xmlns:a16="http://schemas.microsoft.com/office/drawing/2014/main" id="{2948784E-1B4E-421E-83D0-45E94C9832C2}"/>
               </a:ext>
             </a:extLst>
           </p:cNvPr>
@@ -22472,7 +22472,7 @@
           <p:cNvPr id="4" name="slide-number">
             <a:extLst xmlns:a="http://schemas.openxmlformats.org/drawingml/2006/main">
               <a:ext uri="{FF2B5EF4-FFF2-40B4-BE49-F238E27FC236}">
-                <a16:creationId xmlns:a16="http://schemas.microsoft.com/office/drawing/2014/main" id="{F436A170-51DB-4632-A868-C67D5301A447}"/>
+                <a16:creationId xmlns:a16="http://schemas.microsoft.com/office/drawing/2014/main" id="{6A1381B9-6008-4E85-9194-C1F8C6FA4F2E}"/>
               </a:ext>
             </a:extLst>
           </p:cNvPr>
@@ -22529,7 +22529,7 @@
           <p:cNvPr id="5" name="Uitlegvoorbeeld — niet uit het boek">
             <a:extLst xmlns:a="http://schemas.openxmlformats.org/drawingml/2006/main">
               <a:ext uri="{FF2B5EF4-FFF2-40B4-BE49-F238E27FC236}">
-                <a16:creationId xmlns:a16="http://schemas.microsoft.com/office/drawing/2014/main" id="{84524AEE-FD02-4DF1-AB16-31FCF5ECC593}"/>
+                <a16:creationId xmlns:a16="http://schemas.microsoft.com/office/drawing/2014/main" id="{0466A7EB-2FDA-48E6-87FF-6C47A2888AA9}"/>
               </a:ext>
             </a:extLst>
           </p:cNvPr>
@@ -22586,7 +22586,7 @@
           <p:cNvPr id="6" name="Qv = 460 − 12P     |     P = 15">
             <a:extLst xmlns:a="http://schemas.openxmlformats.org/drawingml/2006/main">
               <a:ext uri="{FF2B5EF4-FFF2-40B4-BE49-F238E27FC236}">
-                <a16:creationId xmlns:a16="http://schemas.microsoft.com/office/drawing/2014/main" id="{768BF9D9-E943-4B51-8EFA-9CBC604A38A5}"/>
+                <a16:creationId xmlns:a16="http://schemas.microsoft.com/office/drawing/2014/main" id="{E7CADCA6-BBC4-4157-84CE-80779416C8E6}"/>
               </a:ext>
             </a:extLst>
           </p:cNvPr>
@@ -22643,7 +22643,7 @@
           <p:cNvPr id="7" name="Qv: bezoeken per week · P: prijs in euro per bezoek">
             <a:extLst xmlns:a="http://schemas.openxmlformats.org/drawingml/2006/main">
               <a:ext uri="{FF2B5EF4-FFF2-40B4-BE49-F238E27FC236}">
-                <a16:creationId xmlns:a16="http://schemas.microsoft.com/office/drawing/2014/main" id="{859ED291-628A-4DAB-9543-EA6ADD79EA76}"/>
+                <a16:creationId xmlns:a16="http://schemas.microsoft.com/office/drawing/2014/main" id="{328AFF56-4568-464D-B063-03AB3B278B33}"/>
               </a:ext>
             </a:extLst>
           </p:cNvPr>
@@ -22700,7 +22700,7 @@
           <p:cNvPr id="8" name="Qv = 460 − 12 × 15">
             <a:extLst xmlns:a="http://schemas.openxmlformats.org/drawingml/2006/main">
               <a:ext uri="{FF2B5EF4-FFF2-40B4-BE49-F238E27FC236}">
-                <a16:creationId xmlns:a16="http://schemas.microsoft.com/office/drawing/2014/main" id="{EB523F35-9897-4F0D-B4B9-248A31B51247}"/>
+                <a16:creationId xmlns:a16="http://schemas.microsoft.com/office/drawing/2014/main" id="{2DA7D062-2F7E-4532-856D-D9D293670329}"/>
               </a:ext>
             </a:extLst>
           </p:cNvPr>
@@ -22757,7 +22757,7 @@
           <p:cNvPr id="9" name="Qv = 460 − 180 = 280 bezoeken per week">
             <a:extLst xmlns:a="http://schemas.openxmlformats.org/drawingml/2006/main">
               <a:ext uri="{FF2B5EF4-FFF2-40B4-BE49-F238E27FC236}">
-                <a16:creationId xmlns:a16="http://schemas.microsoft.com/office/drawing/2014/main" id="{09CD313B-0BA4-4FA2-9310-B27F94F1BAD0}"/>
+                <a16:creationId xmlns:a16="http://schemas.microsoft.com/office/drawing/2014/main" id="{09E9595B-165A-4048-AB4B-6A921D83BB00}"/>
               </a:ext>
             </a:extLst>
           </p:cNvPr>
@@ -22814,7 +22814,7 @@
           <p:cNvPr id="10" name="Eerst vervangen, dan vermenigvuldigen, daarna aftrekken.">
             <a:extLst xmlns:a="http://schemas.openxmlformats.org/drawingml/2006/main">
               <a:ext uri="{FF2B5EF4-FFF2-40B4-BE49-F238E27FC236}">
-                <a16:creationId xmlns:a16="http://schemas.microsoft.com/office/drawing/2014/main" id="{C6B4400D-35C5-4639-97A4-83E31CB37F7B}"/>
+                <a16:creationId xmlns:a16="http://schemas.microsoft.com/office/drawing/2014/main" id="{7180BC27-7F90-4650-8D85-04A67AE7CBAA}"/>
               </a:ext>
             </a:extLst>
           </p:cNvPr>
@@ -22869,7 +22869,7 @@
     </p:spTree>
     <p:extLst>
       <p:ext uri="{BB962C8B-B14F-4D97-AF65-F5344CB8AC3E}">
-        <p14:creationId xmlns:p14="http://schemas.microsoft.com/office/powerpoint/2010/main" val="414029288"/>
+        <p14:creationId xmlns:p14="http://schemas.microsoft.com/office/powerpoint/2010/main" val="1543709861"/>
       </p:ext>
     </p:extLst>
   </p:cSld>
@@ -22900,7 +22900,7 @@
           <p:cNvPr id="9" name="Inkomenselasticiteit · Vraagreactie op inkomen">
             <a:extLst xmlns:a="http://schemas.openxmlformats.org/drawingml/2006/main">
               <a:ext uri="{FF2B5EF4-FFF2-40B4-BE49-F238E27FC236}">
-                <a16:creationId xmlns:a16="http://schemas.microsoft.com/office/drawing/2014/main" id="{99567F9E-83A6-482D-A918-162E49F5E5E7}"/>
+                <a16:creationId xmlns:a16="http://schemas.microsoft.com/office/drawing/2014/main" id="{80380F11-5B34-4F9D-A05F-6750FA70379C}"/>
               </a:ext>
             </a:extLst>
           </p:cNvPr>
@@ -22957,7 +22957,7 @@
           <p:cNvPr id="2" name="">
             <a:extLst xmlns:a="http://schemas.openxmlformats.org/drawingml/2006/main">
               <a:ext uri="{FF2B5EF4-FFF2-40B4-BE49-F238E27FC236}">
-                <a16:creationId xmlns:a16="http://schemas.microsoft.com/office/drawing/2014/main" id="{7608073E-1057-4FF7-862E-E82AC5F40F8A}"/>
+                <a16:creationId xmlns:a16="http://schemas.microsoft.com/office/drawing/2014/main" id="{EB6A9489-E969-476F-B00E-F03CA63D6D2B}"/>
               </a:ext>
             </a:extLst>
           </p:cNvPr>
@@ -22986,7 +22986,7 @@
           <p:cNvPr id="3" name="footer">
             <a:extLst xmlns:a="http://schemas.openxmlformats.org/drawingml/2006/main">
               <a:ext uri="{FF2B5EF4-FFF2-40B4-BE49-F238E27FC236}">
-                <a16:creationId xmlns:a16="http://schemas.microsoft.com/office/drawing/2014/main" id="{4BE4ECD8-8FB3-4CB0-B6D9-FCE63D946EA4}"/>
+                <a16:creationId xmlns:a16="http://schemas.microsoft.com/office/drawing/2014/main" id="{C0153928-3E4C-44F0-8C8B-1FE03AD6AD06}"/>
               </a:ext>
             </a:extLst>
           </p:cNvPr>
@@ -23043,7 +23043,7 @@
           <p:cNvPr id="4" name="slide-number">
             <a:extLst xmlns:a="http://schemas.openxmlformats.org/drawingml/2006/main">
               <a:ext uri="{FF2B5EF4-FFF2-40B4-BE49-F238E27FC236}">
-                <a16:creationId xmlns:a16="http://schemas.microsoft.com/office/drawing/2014/main" id="{F05DC52C-3513-4B2C-A809-144A05103F2C}"/>
+                <a16:creationId xmlns:a16="http://schemas.microsoft.com/office/drawing/2014/main" id="{C87742E6-C2C1-45DD-B415-3A7F28345BF5}"/>
               </a:ext>
             </a:extLst>
           </p:cNvPr>
@@ -23100,7 +23100,7 @@
           <p:cNvPr id="5" name="Uitlegvoorbeeld — niet uit het boek">
             <a:extLst xmlns:a="http://schemas.openxmlformats.org/drawingml/2006/main">
               <a:ext uri="{FF2B5EF4-FFF2-40B4-BE49-F238E27FC236}">
-                <a16:creationId xmlns:a16="http://schemas.microsoft.com/office/drawing/2014/main" id="{8F8DD36B-7949-4628-BE6A-9BBDB4A4E6AB}"/>
+                <a16:creationId xmlns:a16="http://schemas.microsoft.com/office/drawing/2014/main" id="{D6AE02A6-FCD8-44A1-BF26-98447FB7FF51}"/>
               </a:ext>
             </a:extLst>
           </p:cNvPr>
@@ -23157,7 +23157,7 @@
           <p:cNvPr id="6" name="Muziekwinkel: inkomen +8%, prijzen gelijk">
             <a:extLst xmlns:a="http://schemas.openxmlformats.org/drawingml/2006/main">
               <a:ext uri="{FF2B5EF4-FFF2-40B4-BE49-F238E27FC236}">
-                <a16:creationId xmlns:a16="http://schemas.microsoft.com/office/drawing/2014/main" id="{EFB96E9D-8782-4751-A804-03B32D8B2D13}"/>
+                <a16:creationId xmlns:a16="http://schemas.microsoft.com/office/drawing/2014/main" id="{5E818C5F-4408-4764-8CFD-0AE5088EBCD6}"/>
               </a:ext>
             </a:extLst>
           </p:cNvPr>
@@ -23533,7 +23533,7 @@
           <p:cNvPr id="8" name="Het teken vertelt of Qv met Y mee of tegen Y in beweegt.">
             <a:extLst xmlns:a="http://schemas.openxmlformats.org/drawingml/2006/main">
               <a:ext uri="{FF2B5EF4-FFF2-40B4-BE49-F238E27FC236}">
-                <a16:creationId xmlns:a16="http://schemas.microsoft.com/office/drawing/2014/main" id="{4AB0F82E-A9E5-430D-A033-7D86248E162F}"/>
+                <a16:creationId xmlns:a16="http://schemas.microsoft.com/office/drawing/2014/main" id="{624E3FA3-1B66-4823-A050-03806276E6EC}"/>
               </a:ext>
             </a:extLst>
           </p:cNvPr>
@@ -23588,7 +23588,7 @@
     </p:spTree>
     <p:extLst>
       <p:ext uri="{BB962C8B-B14F-4D97-AF65-F5344CB8AC3E}">
-        <p14:creationId xmlns:p14="http://schemas.microsoft.com/office/powerpoint/2010/main" val="2058181671"/>
+        <p14:creationId xmlns:p14="http://schemas.microsoft.com/office/powerpoint/2010/main" val="1039511807"/>
       </p:ext>
     </p:extLst>
   </p:cSld>
@@ -23619,7 +23619,7 @@
           <p:cNvPr id="8" name="Ei · Eerst het teken, dan de grootte">
             <a:extLst xmlns:a="http://schemas.openxmlformats.org/drawingml/2006/main">
               <a:ext uri="{FF2B5EF4-FFF2-40B4-BE49-F238E27FC236}">
-                <a16:creationId xmlns:a16="http://schemas.microsoft.com/office/drawing/2014/main" id="{D77FA522-8DC4-4B86-A75F-B2D144AC57FE}"/>
+                <a16:creationId xmlns:a16="http://schemas.microsoft.com/office/drawing/2014/main" id="{5850D92E-249C-451C-B8B9-8CE459CE6032}"/>
               </a:ext>
             </a:extLst>
           </p:cNvPr>
@@ -23676,7 +23676,7 @@
           <p:cNvPr id="2" name="">
             <a:extLst xmlns:a="http://schemas.openxmlformats.org/drawingml/2006/main">
               <a:ext uri="{FF2B5EF4-FFF2-40B4-BE49-F238E27FC236}">
-                <a16:creationId xmlns:a16="http://schemas.microsoft.com/office/drawing/2014/main" id="{0CEF6204-F368-4497-A28C-B8856E12EEF1}"/>
+                <a16:creationId xmlns:a16="http://schemas.microsoft.com/office/drawing/2014/main" id="{0E57412E-0096-4923-A0DA-CB9857480474}"/>
               </a:ext>
             </a:extLst>
           </p:cNvPr>
@@ -23705,7 +23705,7 @@
           <p:cNvPr id="3" name="footer">
             <a:extLst xmlns:a="http://schemas.openxmlformats.org/drawingml/2006/main">
               <a:ext uri="{FF2B5EF4-FFF2-40B4-BE49-F238E27FC236}">
-                <a16:creationId xmlns:a16="http://schemas.microsoft.com/office/drawing/2014/main" id="{6F9B7A18-F6C9-4BB0-9D52-255EEA2D3B96}"/>
+                <a16:creationId xmlns:a16="http://schemas.microsoft.com/office/drawing/2014/main" id="{A3133855-FF3D-4F92-9587-AF23B4021323}"/>
               </a:ext>
             </a:extLst>
           </p:cNvPr>
@@ -23762,7 +23762,7 @@
           <p:cNvPr id="4" name="slide-number">
             <a:extLst xmlns:a="http://schemas.openxmlformats.org/drawingml/2006/main">
               <a:ext uri="{FF2B5EF4-FFF2-40B4-BE49-F238E27FC236}">
-                <a16:creationId xmlns:a16="http://schemas.microsoft.com/office/drawing/2014/main" id="{4A6AB5FE-4DC7-4B94-9F65-BE85541F61DD}"/>
+                <a16:creationId xmlns:a16="http://schemas.microsoft.com/office/drawing/2014/main" id="{15F1C284-CF82-4F62-BDA9-522035F5F454}"/>
               </a:ext>
             </a:extLst>
           </p:cNvPr>
@@ -24138,7 +24138,7 @@
           <p:cNvPr id="6" name="Ei = 0: Qv verandert niet.&#10;Ei = 1: Qv verandert procentueel ">
             <a:extLst xmlns:a="http://schemas.openxmlformats.org/drawingml/2006/main">
               <a:ext uri="{FF2B5EF4-FFF2-40B4-BE49-F238E27FC236}">
-                <a16:creationId xmlns:a16="http://schemas.microsoft.com/office/drawing/2014/main" id="{3E76C6E2-C57A-44F4-8C25-C835C2BC8F6B}"/>
+                <a16:creationId xmlns:a16="http://schemas.microsoft.com/office/drawing/2014/main" id="{30DF16B0-B091-4EAA-989A-6B105686E6B2}"/>
               </a:ext>
             </a:extLst>
           </p:cNvPr>
@@ -24218,7 +24218,7 @@
           <p:cNvPr id="7" name="Grenswaarden krijgen hier geen categorielabel.">
             <a:extLst xmlns:a="http://schemas.openxmlformats.org/drawingml/2006/main">
               <a:ext uri="{FF2B5EF4-FFF2-40B4-BE49-F238E27FC236}">
-                <a16:creationId xmlns:a16="http://schemas.microsoft.com/office/drawing/2014/main" id="{6A84C42C-5112-4692-AC4B-C1AE0EF80843}"/>
+                <a16:creationId xmlns:a16="http://schemas.microsoft.com/office/drawing/2014/main" id="{28175D30-F9AA-49BE-A7F2-F269D062A416}"/>
               </a:ext>
             </a:extLst>
           </p:cNvPr>
@@ -24273,7 +24273,7 @@
     </p:spTree>
     <p:extLst>
       <p:ext uri="{BB962C8B-B14F-4D97-AF65-F5344CB8AC3E}">
-        <p14:creationId xmlns:p14="http://schemas.microsoft.com/office/powerpoint/2010/main" val="930726058"/>
+        <p14:creationId xmlns:p14="http://schemas.microsoft.com/office/powerpoint/2010/main" val="342068203"/>
       </p:ext>
     </p:extLst>
   </p:cSld>
@@ -24304,7 +24304,7 @@
           <p:cNvPr id="10" name="Ek · Vraag naar X, prijs van Z">
             <a:extLst xmlns:a="http://schemas.openxmlformats.org/drawingml/2006/main">
               <a:ext uri="{FF2B5EF4-FFF2-40B4-BE49-F238E27FC236}">
-                <a16:creationId xmlns:a16="http://schemas.microsoft.com/office/drawing/2014/main" id="{BD58F6F6-EC42-4F75-B231-C1749510B113}"/>
+                <a16:creationId xmlns:a16="http://schemas.microsoft.com/office/drawing/2014/main" id="{1F01333E-BC0F-4320-BD5C-72007225F141}"/>
               </a:ext>
             </a:extLst>
           </p:cNvPr>
@@ -24361,7 +24361,7 @@
           <p:cNvPr id="2" name="">
             <a:extLst xmlns:a="http://schemas.openxmlformats.org/drawingml/2006/main">
               <a:ext uri="{FF2B5EF4-FFF2-40B4-BE49-F238E27FC236}">
-                <a16:creationId xmlns:a16="http://schemas.microsoft.com/office/drawing/2014/main" id="{B5375553-C619-4BD2-AC53-9A3B3709EFF2}"/>
+                <a16:creationId xmlns:a16="http://schemas.microsoft.com/office/drawing/2014/main" id="{B8EEBF07-BDA9-4E0B-B2C9-7B795C966975}"/>
               </a:ext>
             </a:extLst>
           </p:cNvPr>
@@ -24390,7 +24390,7 @@
           <p:cNvPr id="3" name="footer">
             <a:extLst xmlns:a="http://schemas.openxmlformats.org/drawingml/2006/main">
               <a:ext uri="{FF2B5EF4-FFF2-40B4-BE49-F238E27FC236}">
-                <a16:creationId xmlns:a16="http://schemas.microsoft.com/office/drawing/2014/main" id="{6292B57B-9D95-49E4-87D0-65BDC300D2AD}"/>
+                <a16:creationId xmlns:a16="http://schemas.microsoft.com/office/drawing/2014/main" id="{B849A4A5-9A37-41EF-A8E6-F559DE2BB4E2}"/>
               </a:ext>
             </a:extLst>
           </p:cNvPr>
@@ -24447,7 +24447,7 @@
           <p:cNvPr id="4" name="slide-number">
             <a:extLst xmlns:a="http://schemas.openxmlformats.org/drawingml/2006/main">
               <a:ext uri="{FF2B5EF4-FFF2-40B4-BE49-F238E27FC236}">
-                <a16:creationId xmlns:a16="http://schemas.microsoft.com/office/drawing/2014/main" id="{28A48547-D298-449E-ADE7-7391313D75E5}"/>
+                <a16:creationId xmlns:a16="http://schemas.microsoft.com/office/drawing/2014/main" id="{6B0B64F5-5DE7-451F-8E4F-48A762B20144}"/>
               </a:ext>
             </a:extLst>
           </p:cNvPr>
@@ -24504,7 +24504,7 @@
           <p:cNvPr id="5" name="Uitlegvoorbeeld — niet uit het boek">
             <a:extLst xmlns:a="http://schemas.openxmlformats.org/drawingml/2006/main">
               <a:ext uri="{FF2B5EF4-FFF2-40B4-BE49-F238E27FC236}">
-                <a16:creationId xmlns:a16="http://schemas.microsoft.com/office/drawing/2014/main" id="{863AE388-2F43-4B8A-8BAE-B7989C315C7F}"/>
+                <a16:creationId xmlns:a16="http://schemas.microsoft.com/office/drawing/2014/main" id="{85B50C73-7B6A-432A-A9F5-D6A8E3948C45}"/>
               </a:ext>
             </a:extLst>
           </p:cNvPr>
@@ -24561,7 +24561,7 @@
           <p:cNvPr id="6" name="Prijs van e-readers +20%; overige factoren gelijk">
             <a:extLst xmlns:a="http://schemas.openxmlformats.org/drawingml/2006/main">
               <a:ext uri="{FF2B5EF4-FFF2-40B4-BE49-F238E27FC236}">
-                <a16:creationId xmlns:a16="http://schemas.microsoft.com/office/drawing/2014/main" id="{10D7FE54-8E25-4495-87EC-7963A4AF5F06}"/>
+                <a16:creationId xmlns:a16="http://schemas.microsoft.com/office/drawing/2014/main" id="{D00FED11-CE88-443A-8BAE-8CB77401D4B3}"/>
               </a:ext>
             </a:extLst>
           </p:cNvPr>
@@ -24863,7 +24863,7 @@
           <p:cNvPr id="8" name="Ek &gt; 0: substituten&#10;Goederen kunnen elkaar vervangen.">
             <a:extLst xmlns:a="http://schemas.openxmlformats.org/drawingml/2006/main">
               <a:ext uri="{FF2B5EF4-FFF2-40B4-BE49-F238E27FC236}">
-                <a16:creationId xmlns:a16="http://schemas.microsoft.com/office/drawing/2014/main" id="{435C83CA-03BE-48E8-AE69-62829FF3E0E6}"/>
+                <a16:creationId xmlns:a16="http://schemas.microsoft.com/office/drawing/2014/main" id="{03DDB3A3-59A4-45BB-9F7C-FD5D8106FF78}"/>
               </a:ext>
             </a:extLst>
           </p:cNvPr>
@@ -24943,7 +24943,7 @@
           <p:cNvPr id="9" name="Ek &lt; 0: complementen&#10;Goederen worden samen gebruikt.">
             <a:extLst xmlns:a="http://schemas.openxmlformats.org/drawingml/2006/main">
               <a:ext uri="{FF2B5EF4-FFF2-40B4-BE49-F238E27FC236}">
-                <a16:creationId xmlns:a16="http://schemas.microsoft.com/office/drawing/2014/main" id="{6A9C8C6D-0B4F-47AF-A49C-A373D808805F}"/>
+                <a16:creationId xmlns:a16="http://schemas.microsoft.com/office/drawing/2014/main" id="{B152565E-CC04-411D-8B6D-4AFA57311B4F}"/>
               </a:ext>
             </a:extLst>
           </p:cNvPr>
@@ -25021,7 +25021,7 @@
     </p:spTree>
     <p:extLst>
       <p:ext uri="{BB962C8B-B14F-4D97-AF65-F5344CB8AC3E}">
-        <p14:creationId xmlns:p14="http://schemas.microsoft.com/office/powerpoint/2010/main" val="1109912607"/>
+        <p14:creationId xmlns:p14="http://schemas.microsoft.com/office/powerpoint/2010/main" val="959745312"/>
       </p:ext>
     </p:extLst>
   </p:cSld>
@@ -25052,7 +25052,7 @@
           <p:cNvPr id="9" name="Ook bij een prijsdaling blijft het teken betekenisvol">
             <a:extLst xmlns:a="http://schemas.openxmlformats.org/drawingml/2006/main">
               <a:ext uri="{FF2B5EF4-FFF2-40B4-BE49-F238E27FC236}">
-                <a16:creationId xmlns:a16="http://schemas.microsoft.com/office/drawing/2014/main" id="{3E6532F8-843C-4F36-BB85-6C3B3F6143EA}"/>
+                <a16:creationId xmlns:a16="http://schemas.microsoft.com/office/drawing/2014/main" id="{A0CEEF22-5B11-4013-AC93-460745ADF59B}"/>
               </a:ext>
             </a:extLst>
           </p:cNvPr>
@@ -25109,7 +25109,7 @@
           <p:cNvPr id="2" name="">
             <a:extLst xmlns:a="http://schemas.openxmlformats.org/drawingml/2006/main">
               <a:ext uri="{FF2B5EF4-FFF2-40B4-BE49-F238E27FC236}">
-                <a16:creationId xmlns:a16="http://schemas.microsoft.com/office/drawing/2014/main" id="{12E04CBB-C7DB-499C-8C70-38A93363CEA4}"/>
+                <a16:creationId xmlns:a16="http://schemas.microsoft.com/office/drawing/2014/main" id="{14D84F6A-F91C-4F00-A5DB-0C6783906DD1}"/>
               </a:ext>
             </a:extLst>
           </p:cNvPr>
@@ -25138,7 +25138,7 @@
           <p:cNvPr id="3" name="footer">
             <a:extLst xmlns:a="http://schemas.openxmlformats.org/drawingml/2006/main">
               <a:ext uri="{FF2B5EF4-FFF2-40B4-BE49-F238E27FC236}">
-                <a16:creationId xmlns:a16="http://schemas.microsoft.com/office/drawing/2014/main" id="{90DE8C69-A9E5-40ED-9467-42263079F3BC}"/>
+                <a16:creationId xmlns:a16="http://schemas.microsoft.com/office/drawing/2014/main" id="{A005D668-7138-4C46-BCB4-581E88125821}"/>
               </a:ext>
             </a:extLst>
           </p:cNvPr>
@@ -25195,7 +25195,7 @@
           <p:cNvPr id="4" name="slide-number">
             <a:extLst xmlns:a="http://schemas.openxmlformats.org/drawingml/2006/main">
               <a:ext uri="{FF2B5EF4-FFF2-40B4-BE49-F238E27FC236}">
-                <a16:creationId xmlns:a16="http://schemas.microsoft.com/office/drawing/2014/main" id="{A2D21168-EC48-47E2-A496-37EDC96FE176}"/>
+                <a16:creationId xmlns:a16="http://schemas.microsoft.com/office/drawing/2014/main" id="{3E0DD037-514A-4C2A-AB07-13B6C6C3EECD}"/>
               </a:ext>
             </a:extLst>
           </p:cNvPr>
@@ -25252,7 +25252,7 @@
           <p:cNvPr id="5" name="Uitlegvoorbeeld — niet uit het boek">
             <a:extLst xmlns:a="http://schemas.openxmlformats.org/drawingml/2006/main">
               <a:ext uri="{FF2B5EF4-FFF2-40B4-BE49-F238E27FC236}">
-                <a16:creationId xmlns:a16="http://schemas.microsoft.com/office/drawing/2014/main" id="{1CFE972E-3875-46C3-9A0D-B64905CEFBF1}"/>
+                <a16:creationId xmlns:a16="http://schemas.microsoft.com/office/drawing/2014/main" id="{EBE896ED-7027-4871-883F-772F3B34BE8F}"/>
               </a:ext>
             </a:extLst>
           </p:cNvPr>
@@ -25309,7 +25309,7 @@
           <p:cNvPr id="6" name="Apart onderzoek: prijs van e-readers −20%">
             <a:extLst xmlns:a="http://schemas.openxmlformats.org/drawingml/2006/main">
               <a:ext uri="{FF2B5EF4-FFF2-40B4-BE49-F238E27FC236}">
-                <a16:creationId xmlns:a16="http://schemas.microsoft.com/office/drawing/2014/main" id="{ECD0AD3C-A0A4-4678-BCA7-DD24FBF7DB68}"/>
+                <a16:creationId xmlns:a16="http://schemas.microsoft.com/office/drawing/2014/main" id="{52127B7A-0A79-440D-A1D9-005AA8466D7C}"/>
               </a:ext>
             </a:extLst>
           </p:cNvPr>
@@ -25611,7 +25611,7 @@
           <p:cNvPr id="8" name="Twee mintekens → positief. Eén minteken → negatief.">
             <a:extLst xmlns:a="http://schemas.openxmlformats.org/drawingml/2006/main">
               <a:ext uri="{FF2B5EF4-FFF2-40B4-BE49-F238E27FC236}">
-                <a16:creationId xmlns:a16="http://schemas.microsoft.com/office/drawing/2014/main" id="{AC67E03A-D7BA-4AC0-8E7C-D5106CE6449A}"/>
+                <a16:creationId xmlns:a16="http://schemas.microsoft.com/office/drawing/2014/main" id="{39578007-03DD-411B-95FF-E5CA021BD34E}"/>
               </a:ext>
             </a:extLst>
           </p:cNvPr>
@@ -25666,7 +25666,7 @@
     </p:spTree>
     <p:extLst>
       <p:ext uri="{BB962C8B-B14F-4D97-AF65-F5344CB8AC3E}">
-        <p14:creationId xmlns:p14="http://schemas.microsoft.com/office/powerpoint/2010/main" val="1683539745"/>
+        <p14:creationId xmlns:p14="http://schemas.microsoft.com/office/powerpoint/2010/main" val="1652873118"/>
       </p:ext>
     </p:extLst>
   </p:cSld>
@@ -25697,7 +25697,7 @@
           <p:cNvPr id="8" name="LeesClub X · De betekenis van de variabelen">
             <a:extLst xmlns:a="http://schemas.openxmlformats.org/drawingml/2006/main">
               <a:ext uri="{FF2B5EF4-FFF2-40B4-BE49-F238E27FC236}">
-                <a16:creationId xmlns:a16="http://schemas.microsoft.com/office/drawing/2014/main" id="{3BEC4198-2956-40B2-96B1-A6A67BAF34F9}"/>
+                <a16:creationId xmlns:a16="http://schemas.microsoft.com/office/drawing/2014/main" id="{D18AEA50-74F9-422B-8DEA-816E13724AE5}"/>
               </a:ext>
             </a:extLst>
           </p:cNvPr>
@@ -25754,7 +25754,7 @@
           <p:cNvPr id="2" name="">
             <a:extLst xmlns:a="http://schemas.openxmlformats.org/drawingml/2006/main">
               <a:ext uri="{FF2B5EF4-FFF2-40B4-BE49-F238E27FC236}">
-                <a16:creationId xmlns:a16="http://schemas.microsoft.com/office/drawing/2014/main" id="{A9D6ACAA-D97D-49E8-957F-04ADA40CEA87}"/>
+                <a16:creationId xmlns:a16="http://schemas.microsoft.com/office/drawing/2014/main" id="{C8F32F11-2334-4DAA-AF68-58487B1BEDDC}"/>
               </a:ext>
             </a:extLst>
           </p:cNvPr>
@@ -25783,7 +25783,7 @@
           <p:cNvPr id="3" name="footer">
             <a:extLst xmlns:a="http://schemas.openxmlformats.org/drawingml/2006/main">
               <a:ext uri="{FF2B5EF4-FFF2-40B4-BE49-F238E27FC236}">
-                <a16:creationId xmlns:a16="http://schemas.microsoft.com/office/drawing/2014/main" id="{3CEE99EE-FEA9-45DF-8733-282B7D16DE39}"/>
+                <a16:creationId xmlns:a16="http://schemas.microsoft.com/office/drawing/2014/main" id="{7EC3A5C0-CBD2-4E0E-89CC-87DE7B836CCE}"/>
               </a:ext>
             </a:extLst>
           </p:cNvPr>
@@ -25840,7 +25840,7 @@
           <p:cNvPr id="4" name="slide-number">
             <a:extLst xmlns:a="http://schemas.openxmlformats.org/drawingml/2006/main">
               <a:ext uri="{FF2B5EF4-FFF2-40B4-BE49-F238E27FC236}">
-                <a16:creationId xmlns:a16="http://schemas.microsoft.com/office/drawing/2014/main" id="{25FBC197-4176-4064-9B1E-64B168AED22F}"/>
+                <a16:creationId xmlns:a16="http://schemas.microsoft.com/office/drawing/2014/main" id="{BA5A9237-ECBD-4931-B518-2B430A57CCB5}"/>
               </a:ext>
             </a:extLst>
           </p:cNvPr>
@@ -25897,7 +25897,7 @@
           <p:cNvPr id="5" name="Uitlegvoorbeeld — niet uit het boek">
             <a:extLst xmlns:a="http://schemas.openxmlformats.org/drawingml/2006/main">
               <a:ext uri="{FF2B5EF4-FFF2-40B4-BE49-F238E27FC236}">
-                <a16:creationId xmlns:a16="http://schemas.microsoft.com/office/drawing/2014/main" id="{DD0EAD1C-1465-4002-A430-A7386360F877}"/>
+                <a16:creationId xmlns:a16="http://schemas.microsoft.com/office/drawing/2014/main" id="{6A1F6101-D8C2-4708-B3C3-3EFDCE17B1EF}"/>
               </a:ext>
             </a:extLst>
           </p:cNvPr>
@@ -25954,7 +25954,7 @@
           <p:cNvPr id="6" name="Qx = 160 − 4Px + 2Pz + 0,01Y">
             <a:extLst xmlns:a="http://schemas.openxmlformats.org/drawingml/2006/main">
               <a:ext uri="{FF2B5EF4-FFF2-40B4-BE49-F238E27FC236}">
-                <a16:creationId xmlns:a16="http://schemas.microsoft.com/office/drawing/2014/main" id="{C41FA40E-7870-4F95-B987-BFB971D92B37}"/>
+                <a16:creationId xmlns:a16="http://schemas.microsoft.com/office/drawing/2014/main" id="{678E981B-C827-497C-9B47-E2D15005A4B9}"/>
               </a:ext>
             </a:extLst>
           </p:cNvPr>
@@ -26402,7 +26402,7 @@
     </p:spTree>
     <p:extLst>
       <p:ext uri="{BB962C8B-B14F-4D97-AF65-F5344CB8AC3E}">
-        <p14:creationId xmlns:p14="http://schemas.microsoft.com/office/powerpoint/2010/main" val="483197301"/>
+        <p14:creationId xmlns:p14="http://schemas.microsoft.com/office/powerpoint/2010/main" val="676706023"/>
       </p:ext>
     </p:extLst>
   </p:cSld>
